--- a/Структура маркетинга — отделы и ФОТ.pptx
+++ b/Структура маркетинга — отделы и ФОТ.pptx
@@ -1487,7 +1487,7 @@
                 <a:ea typeface="Arial" pitchFamily="34" charset="-122"/>
                 <a:cs typeface="Arial" pitchFamily="34" charset="-120"/>
               </a:rPr>
-              <a:t>13</a:t>
+              <a:t>14</a:t>
             </a:r>
             <a:endParaRPr lang="en-US" sz="2900" dirty="0"/>
           </a:p>
@@ -1618,7 +1618,7 @@
                 <a:ea typeface="Arial" pitchFamily="34" charset="-122"/>
                 <a:cs typeface="Arial" pitchFamily="34" charset="-120"/>
               </a:rPr>
-              <a:t>14 676 401 ₸</a:t>
+              <a:t>15 676 563 ₸</a:t>
             </a:r>
             <a:endParaRPr lang="en-US" sz="1200" dirty="0"/>
           </a:p>
@@ -2396,7 +2396,7 @@
                 <a:ea typeface="Arial" pitchFamily="34" charset="-122"/>
                 <a:cs typeface="Arial" pitchFamily="34" charset="-120"/>
               </a:rPr>
-              <a:t>43 050 159 ₸</a:t>
+              <a:t>44 050 321 ₸</a:t>
             </a:r>
             <a:endParaRPr lang="en-US" sz="2600" dirty="0"/>
           </a:p>
@@ -2570,7 +2570,7 @@
                 <a:ea typeface="Arial" pitchFamily="34" charset="-122"/>
                 <a:cs typeface="Arial" pitchFamily="34" charset="-120"/>
               </a:rPr>
-              <a:t>14 676 401 ₸</a:t>
+              <a:t>15 676 563 ₸</a:t>
             </a:r>
             <a:endParaRPr lang="en-US" sz="1900" dirty="0"/>
           </a:p>
@@ -2590,7 +2590,7 @@
                 <a:ea typeface="Arial" pitchFamily="34" charset="-122"/>
                 <a:cs typeface="Arial" pitchFamily="34" charset="-120"/>
               </a:rPr>
-              <a:t>ФОТ отдела · 13 чел. · оклады/мес</a:t>
+              <a:t>ФОТ отдела · 14 чел. · оклады/мес</a:t>
             </a:r>
             <a:endParaRPr lang="en-US" sz="1900" dirty="0"/>
           </a:p>
@@ -3408,69 +3408,7 @@
         </p:nvSpPr>
         <p:spPr>
           <a:xfrm>
-            <a:off x="6094476" y="1792224"/>
-            <a:ext cx="0" cy="54864"/>
-          </a:xfrm>
-          <a:prstGeom prst="line">
-            <a:avLst/>
-          </a:prstGeom>
-          <a:noFill/>
-          <a:ln w="12700">
-            <a:solidFill>
-              <a:srgbClr val="C7D8EE"/>
-            </a:solidFill>
-            <a:prstDash val="solid"/>
-          </a:ln>
-        </p:spPr>
-      </p:sp>
-      <p:sp>
-        <p:nvSpPr>
-          <p:cNvPr id="22" name="Text 20"/>
-          <p:cNvSpPr/>
-          <p:nvPr/>
-        </p:nvSpPr>
-        <p:spPr>
-          <a:xfrm>
-            <a:off x="4337304" y="1847088"/>
-            <a:ext cx="3514344" cy="292608"/>
-          </a:xfrm>
-          <a:prstGeom prst="rect">
-            <a:avLst/>
-          </a:prstGeom>
-          <a:noFill/>
-          <a:ln/>
-        </p:spPr>
-        <p:txBody>
-          <a:bodyPr wrap="square" lIns="0" tIns="0" rIns="0" bIns="0" rtlCol="0" anchor="ctr"/>
-          <a:lstStyle/>
-          <a:p>
-            <a:pPr algn="ctr" indent="0" marL="0">
-              <a:buNone/>
-            </a:pPr>
-            <a:r>
-              <a:rPr lang="en-US" sz="1200" b="1" dirty="0">
-                <a:solidFill>
-                  <a:srgbClr val="2E5C8A"/>
-                </a:solidFill>
-                <a:latin typeface="Arial" pitchFamily="34" charset="0"/>
-                <a:ea typeface="Arial" pitchFamily="34" charset="-122"/>
-                <a:cs typeface="Arial" pitchFamily="34" charset="-120"/>
-              </a:rPr>
-              <a:t>SMM  (gen · original · sport)</a:t>
-            </a:r>
-            <a:endParaRPr lang="en-US" sz="1200" dirty="0"/>
-          </a:p>
-        </p:txBody>
-      </p:sp>
-      <p:sp>
-        <p:nvSpPr>
-          <p:cNvPr id="23" name="Shape 21"/>
-          <p:cNvSpPr/>
-          <p:nvPr/>
-        </p:nvSpPr>
-        <p:spPr>
-          <a:xfrm>
-            <a:off x="4337304" y="2194560"/>
+            <a:off x="457200" y="5737860"/>
             <a:ext cx="3514344" cy="640080"/>
           </a:xfrm>
           <a:prstGeom prst="roundRect">
@@ -3498,14 +3436,119 @@
       </p:sp>
       <p:sp>
         <p:nvSpPr>
+          <p:cNvPr id="22" name="Text 20"/>
+          <p:cNvSpPr/>
+          <p:nvPr/>
+        </p:nvSpPr>
+        <p:spPr>
+          <a:xfrm>
+            <a:off x="530352" y="5783580"/>
+            <a:ext cx="3368040" cy="548640"/>
+          </a:xfrm>
+          <a:prstGeom prst="rect">
+            <a:avLst/>
+          </a:prstGeom>
+          <a:noFill/>
+          <a:ln/>
+        </p:spPr>
+        <p:txBody>
+          <a:bodyPr wrap="square" lIns="0" tIns="0" rIns="0" bIns="0" rtlCol="0" anchor="ctr"/>
+          <a:lstStyle/>
+          <a:p>
+            <a:pPr algn="ctr" indent="0" marL="0">
+              <a:lnSpc>
+                <a:spcPct val="100000"/>
+              </a:lnSpc>
+              <a:buNone/>
+            </a:pPr>
+            <a:r>
+              <a:rPr lang="en-US" sz="1050" b="1" dirty="0">
+                <a:solidFill>
+                  <a:srgbClr val="1F2A37"/>
+                </a:solidFill>
+                <a:latin typeface="Arial" pitchFamily="34" charset="0"/>
+                <a:ea typeface="Arial" pitchFamily="34" charset="-122"/>
+                <a:cs typeface="Arial" pitchFamily="34" charset="-120"/>
+              </a:rPr>
+              <a:t>Promo · Аяулым</a:t>
+            </a:r>
+            <a:endParaRPr lang="en-US" sz="1050" dirty="0"/>
+          </a:p>
+          <a:p>
+            <a:pPr algn="ctr" indent="0" marL="0">
+              <a:lnSpc>
+                <a:spcPct val="100000"/>
+              </a:lnSpc>
+              <a:buNone/>
+            </a:pPr>
+            <a:r>
+              <a:rPr lang="en-US" sz="800" i="1" dirty="0">
+                <a:solidFill>
+                  <a:srgbClr val="5B6B7C"/>
+                </a:solidFill>
+                <a:latin typeface="Arial" pitchFamily="34" charset="0"/>
+                <a:ea typeface="Arial" pitchFamily="34" charset="-122"/>
+                <a:cs typeface="Arial" pitchFamily="34" charset="-120"/>
+              </a:rPr>
+              <a:t>Иманбаева Аяулым Маратовна</a:t>
+            </a:r>
+            <a:endParaRPr lang="en-US" sz="1050" dirty="0"/>
+          </a:p>
+          <a:p>
+            <a:pPr algn="ctr" indent="0" marL="0">
+              <a:lnSpc>
+                <a:spcPct val="100000"/>
+              </a:lnSpc>
+              <a:buNone/>
+            </a:pPr>
+            <a:r>
+              <a:rPr lang="en-US" sz="1100" b="1" dirty="0">
+                <a:solidFill>
+                  <a:srgbClr val="0F6E4F"/>
+                </a:solidFill>
+                <a:latin typeface="Arial" pitchFamily="34" charset="0"/>
+                <a:ea typeface="Arial" pitchFamily="34" charset="-122"/>
+                <a:cs typeface="Arial" pitchFamily="34" charset="-120"/>
+              </a:rPr>
+              <a:t>1 000 162 ₸</a:t>
+            </a:r>
+            <a:endParaRPr lang="en-US" sz="1050" dirty="0"/>
+          </a:p>
+        </p:txBody>
+      </p:sp>
+      <p:sp>
+        <p:nvSpPr>
+          <p:cNvPr id="23" name="Shape 21"/>
+          <p:cNvSpPr/>
+          <p:nvPr/>
+        </p:nvSpPr>
+        <p:spPr>
+          <a:xfrm>
+            <a:off x="6094476" y="1792224"/>
+            <a:ext cx="0" cy="54864"/>
+          </a:xfrm>
+          <a:prstGeom prst="line">
+            <a:avLst/>
+          </a:prstGeom>
+          <a:noFill/>
+          <a:ln w="12700">
+            <a:solidFill>
+              <a:srgbClr val="C7D8EE"/>
+            </a:solidFill>
+            <a:prstDash val="solid"/>
+          </a:ln>
+        </p:spPr>
+      </p:sp>
+      <p:sp>
+        <p:nvSpPr>
           <p:cNvPr id="24" name="Text 22"/>
           <p:cNvSpPr/>
           <p:nvPr/>
         </p:nvSpPr>
         <p:spPr>
           <a:xfrm>
-            <a:off x="4410456" y="2240280"/>
-            <a:ext cx="3368040" cy="548640"/>
+            <a:off x="4337304" y="1847088"/>
+            <a:ext cx="3514344" cy="292608"/>
           </a:xfrm>
           <a:prstGeom prst="rect">
             <a:avLst/>
@@ -3518,63 +3561,20 @@
           <a:lstStyle/>
           <a:p>
             <a:pPr algn="ctr" indent="0" marL="0">
-              <a:lnSpc>
-                <a:spcPct val="100000"/>
-              </a:lnSpc>
-              <a:buNone/>
-            </a:pPr>
-            <a:r>
-              <a:rPr lang="en-US" sz="1050" b="1" dirty="0">
-                <a:solidFill>
-                  <a:srgbClr val="1F2A37"/>
-                </a:solidFill>
-                <a:latin typeface="Arial" pitchFamily="34" charset="0"/>
-                <a:ea typeface="Arial" pitchFamily="34" charset="-122"/>
-                <a:cs typeface="Arial" pitchFamily="34" charset="-120"/>
-              </a:rPr>
-              <a:t>Head of SMM · Мария</a:t>
-            </a:r>
-            <a:endParaRPr lang="en-US" sz="1050" dirty="0"/>
-          </a:p>
-          <a:p>
-            <a:pPr algn="ctr" indent="0" marL="0">
-              <a:lnSpc>
-                <a:spcPct val="100000"/>
-              </a:lnSpc>
-              <a:buNone/>
-            </a:pPr>
-            <a:r>
-              <a:rPr lang="en-US" sz="800" i="1" dirty="0">
-                <a:solidFill>
-                  <a:srgbClr val="5B6B7C"/>
-                </a:solidFill>
-                <a:latin typeface="Arial" pitchFamily="34" charset="0"/>
-                <a:ea typeface="Arial" pitchFamily="34" charset="-122"/>
-                <a:cs typeface="Arial" pitchFamily="34" charset="-120"/>
-              </a:rPr>
-              <a:t>Коренькова Мария Николаевна</a:t>
-            </a:r>
-            <a:endParaRPr lang="en-US" sz="1050" dirty="0"/>
-          </a:p>
-          <a:p>
-            <a:pPr algn="ctr" indent="0" marL="0">
-              <a:lnSpc>
-                <a:spcPct val="100000"/>
-              </a:lnSpc>
-              <a:buNone/>
-            </a:pPr>
-            <a:r>
-              <a:rPr lang="en-US" sz="1100" b="1" dirty="0">
-                <a:solidFill>
-                  <a:srgbClr val="0F6E4F"/>
-                </a:solidFill>
-                <a:latin typeface="Arial" pitchFamily="34" charset="0"/>
-                <a:ea typeface="Arial" pitchFamily="34" charset="-122"/>
-                <a:cs typeface="Arial" pitchFamily="34" charset="-120"/>
-              </a:rPr>
-              <a:t>1 625 032 ₸</a:t>
-            </a:r>
-            <a:endParaRPr lang="en-US" sz="1050" dirty="0"/>
+              <a:buNone/>
+            </a:pPr>
+            <a:r>
+              <a:rPr lang="en-US" sz="1200" b="1" dirty="0">
+                <a:solidFill>
+                  <a:srgbClr val="2E5C8A"/>
+                </a:solidFill>
+                <a:latin typeface="Arial" pitchFamily="34" charset="0"/>
+                <a:ea typeface="Arial" pitchFamily="34" charset="-122"/>
+                <a:cs typeface="Arial" pitchFamily="34" charset="-120"/>
+              </a:rPr>
+              <a:t>SMM  (gen · original · sport)</a:t>
+            </a:r>
+            <a:endParaRPr lang="en-US" sz="1200" dirty="0"/>
           </a:p>
         </p:txBody>
       </p:sp>
@@ -3586,7 +3586,7 @@
         </p:nvSpPr>
         <p:spPr>
           <a:xfrm>
-            <a:off x="4337304" y="2903220"/>
+            <a:off x="4337304" y="2194560"/>
             <a:ext cx="3514344" cy="640080"/>
           </a:xfrm>
           <a:prstGeom prst="roundRect">
@@ -3620,7 +3620,7 @@
         </p:nvSpPr>
         <p:spPr>
           <a:xfrm>
-            <a:off x="4410456" y="2948940"/>
+            <a:off x="4410456" y="2240280"/>
             <a:ext cx="3368040" cy="548640"/>
           </a:xfrm>
           <a:prstGeom prst="rect">
@@ -3648,7 +3648,7 @@
                 <a:ea typeface="Arial" pitchFamily="34" charset="-122"/>
                 <a:cs typeface="Arial" pitchFamily="34" charset="-120"/>
               </a:rPr>
-              <a:t>SMM Original</a:t>
+              <a:t>Head of SMM · Мария</a:t>
             </a:r>
             <a:endParaRPr lang="en-US" sz="1050" dirty="0"/>
           </a:p>
@@ -3668,7 +3668,7 @@
                 <a:ea typeface="Arial" pitchFamily="34" charset="-122"/>
                 <a:cs typeface="Arial" pitchFamily="34" charset="-120"/>
               </a:rPr>
-              <a:t>SMM менеджер · имя н/д</a:t>
+              <a:t>Коренькова Мария Николаевна</a:t>
             </a:r>
             <a:endParaRPr lang="en-US" sz="1050" dirty="0"/>
           </a:p>
@@ -3682,13 +3682,13 @@
             <a:r>
               <a:rPr lang="en-US" sz="1100" b="1" dirty="0">
                 <a:solidFill>
-                  <a:srgbClr val="B45309"/>
-                </a:solidFill>
-                <a:latin typeface="Arial" pitchFamily="34" charset="0"/>
-                <a:ea typeface="Arial" pitchFamily="34" charset="-122"/>
-                <a:cs typeface="Arial" pitchFamily="34" charset="-120"/>
-              </a:rPr>
-              <a:t>867 456 ₸  *</a:t>
+                  <a:srgbClr val="0F6E4F"/>
+                </a:solidFill>
+                <a:latin typeface="Arial" pitchFamily="34" charset="0"/>
+                <a:ea typeface="Arial" pitchFamily="34" charset="-122"/>
+                <a:cs typeface="Arial" pitchFamily="34" charset="-120"/>
+              </a:rPr>
+              <a:t>1 625 032 ₸</a:t>
             </a:r>
             <a:endParaRPr lang="en-US" sz="1050" dirty="0"/>
           </a:p>
@@ -3702,7 +3702,7 @@
         </p:nvSpPr>
         <p:spPr>
           <a:xfrm>
-            <a:off x="4337304" y="3611880"/>
+            <a:off x="4337304" y="2903220"/>
             <a:ext cx="3514344" cy="640080"/>
           </a:xfrm>
           <a:prstGeom prst="roundRect">
@@ -3736,7 +3736,7 @@
         </p:nvSpPr>
         <p:spPr>
           <a:xfrm>
-            <a:off x="4410456" y="3657600"/>
+            <a:off x="4410456" y="2948940"/>
             <a:ext cx="3368040" cy="548640"/>
           </a:xfrm>
           <a:prstGeom prst="rect">
@@ -3764,7 +3764,7 @@
                 <a:ea typeface="Arial" pitchFamily="34" charset="-122"/>
                 <a:cs typeface="Arial" pitchFamily="34" charset="-120"/>
               </a:rPr>
-              <a:t>SMM Gen</a:t>
+              <a:t>SMM Original</a:t>
             </a:r>
             <a:endParaRPr lang="en-US" sz="1050" dirty="0"/>
           </a:p>
@@ -3818,7 +3818,7 @@
         </p:nvSpPr>
         <p:spPr>
           <a:xfrm>
-            <a:off x="4337304" y="4320540"/>
+            <a:off x="4337304" y="3611880"/>
             <a:ext cx="3514344" cy="640080"/>
           </a:xfrm>
           <a:prstGeom prst="roundRect">
@@ -3852,7 +3852,7 @@
         </p:nvSpPr>
         <p:spPr>
           <a:xfrm>
-            <a:off x="4410456" y="4366260"/>
+            <a:off x="4410456" y="3657600"/>
             <a:ext cx="3368040" cy="548640"/>
           </a:xfrm>
           <a:prstGeom prst="rect">
@@ -3880,7 +3880,7 @@
                 <a:ea typeface="Arial" pitchFamily="34" charset="-122"/>
                 <a:cs typeface="Arial" pitchFamily="34" charset="-120"/>
               </a:rPr>
-              <a:t>SMM Sport</a:t>
+              <a:t>SMM Gen</a:t>
             </a:r>
             <a:endParaRPr lang="en-US" sz="1050" dirty="0"/>
           </a:p>
@@ -3934,7 +3934,7 @@
         </p:nvSpPr>
         <p:spPr>
           <a:xfrm>
-            <a:off x="4337304" y="5029200"/>
+            <a:off x="4337304" y="4320540"/>
             <a:ext cx="3514344" cy="640080"/>
           </a:xfrm>
           <a:prstGeom prst="roundRect">
@@ -3968,7 +3968,7 @@
         </p:nvSpPr>
         <p:spPr>
           <a:xfrm>
-            <a:off x="4410456" y="5074920"/>
+            <a:off x="4410456" y="4366260"/>
             <a:ext cx="3368040" cy="548640"/>
           </a:xfrm>
           <a:prstGeom prst="rect">
@@ -3996,7 +3996,7 @@
                 <a:ea typeface="Arial" pitchFamily="34" charset="-122"/>
                 <a:cs typeface="Arial" pitchFamily="34" charset="-120"/>
               </a:rPr>
-              <a:t>SMM Original</a:t>
+              <a:t>SMM Sport</a:t>
             </a:r>
             <a:endParaRPr lang="en-US" sz="1050" dirty="0"/>
           </a:p>
@@ -4050,7 +4050,7 @@
         </p:nvSpPr>
         <p:spPr>
           <a:xfrm>
-            <a:off x="4337304" y="5737860"/>
+            <a:off x="4337304" y="5029200"/>
             <a:ext cx="3514344" cy="640080"/>
           </a:xfrm>
           <a:prstGeom prst="roundRect">
@@ -4084,7 +4084,7 @@
         </p:nvSpPr>
         <p:spPr>
           <a:xfrm>
-            <a:off x="4410456" y="5783580"/>
+            <a:off x="4410456" y="5074920"/>
             <a:ext cx="3368040" cy="548640"/>
           </a:xfrm>
           <a:prstGeom prst="rect">
@@ -4112,7 +4112,7 @@
                 <a:ea typeface="Arial" pitchFamily="34" charset="-122"/>
                 <a:cs typeface="Arial" pitchFamily="34" charset="-120"/>
               </a:rPr>
-              <a:t>Telegram редактор Sport</a:t>
+              <a:t>SMM Original</a:t>
             </a:r>
             <a:endParaRPr lang="en-US" sz="1050" dirty="0"/>
           </a:p>
@@ -4132,7 +4132,7 @@
                 <a:ea typeface="Arial" pitchFamily="34" charset="-122"/>
                 <a:cs typeface="Arial" pitchFamily="34" charset="-120"/>
               </a:rPr>
-              <a:t>Куричев Иван Николаевич</a:t>
+              <a:t>SMM менеджер · имя н/д</a:t>
             </a:r>
             <a:endParaRPr lang="en-US" sz="1050" dirty="0"/>
           </a:p>
@@ -4146,13 +4146,13 @@
             <a:r>
               <a:rPr lang="en-US" sz="1100" b="1" dirty="0">
                 <a:solidFill>
-                  <a:srgbClr val="0F6E4F"/>
-                </a:solidFill>
-                <a:latin typeface="Arial" pitchFamily="34" charset="0"/>
-                <a:ea typeface="Arial" pitchFamily="34" charset="-122"/>
-                <a:cs typeface="Arial" pitchFamily="34" charset="-120"/>
-              </a:rPr>
-              <a:t>513 920 ₸</a:t>
+                  <a:srgbClr val="B45309"/>
+                </a:solidFill>
+                <a:latin typeface="Arial" pitchFamily="34" charset="0"/>
+                <a:ea typeface="Arial" pitchFamily="34" charset="-122"/>
+                <a:cs typeface="Arial" pitchFamily="34" charset="-120"/>
+              </a:rPr>
+              <a:t>867 456 ₸  *</a:t>
             </a:r>
             <a:endParaRPr lang="en-US" sz="1050" dirty="0"/>
           </a:p>
@@ -4166,69 +4166,7 @@
         </p:nvSpPr>
         <p:spPr>
           <a:xfrm>
-            <a:off x="9974580" y="1792224"/>
-            <a:ext cx="0" cy="54864"/>
-          </a:xfrm>
-          <a:prstGeom prst="line">
-            <a:avLst/>
-          </a:prstGeom>
-          <a:noFill/>
-          <a:ln w="12700">
-            <a:solidFill>
-              <a:srgbClr val="C7D8EE"/>
-            </a:solidFill>
-            <a:prstDash val="solid"/>
-          </a:ln>
-        </p:spPr>
-      </p:sp>
-      <p:sp>
-        <p:nvSpPr>
-          <p:cNvPr id="36" name="Text 34"/>
-          <p:cNvSpPr/>
-          <p:nvPr/>
-        </p:nvSpPr>
-        <p:spPr>
-          <a:xfrm>
-            <a:off x="8217408" y="1847088"/>
-            <a:ext cx="3514344" cy="292608"/>
-          </a:xfrm>
-          <a:prstGeom prst="rect">
-            <a:avLst/>
-          </a:prstGeom>
-          <a:noFill/>
-          <a:ln/>
-        </p:spPr>
-        <p:txBody>
-          <a:bodyPr wrap="square" lIns="0" tIns="0" rIns="0" bIns="0" rtlCol="0" anchor="ctr"/>
-          <a:lstStyle/>
-          <a:p>
-            <a:pPr algn="ctr" indent="0" marL="0">
-              <a:buNone/>
-            </a:pPr>
-            <a:r>
-              <a:rPr lang="en-US" sz="1200" b="1" dirty="0">
-                <a:solidFill>
-                  <a:srgbClr val="2E5C8A"/>
-                </a:solidFill>
-                <a:latin typeface="Arial" pitchFamily="34" charset="0"/>
-                <a:ea typeface="Arial" pitchFamily="34" charset="-122"/>
-                <a:cs typeface="Arial" pitchFamily="34" charset="-120"/>
-              </a:rPr>
-              <a:t>PR</a:t>
-            </a:r>
-            <a:endParaRPr lang="en-US" sz="1200" dirty="0"/>
-          </a:p>
-        </p:txBody>
-      </p:sp>
-      <p:sp>
-        <p:nvSpPr>
-          <p:cNvPr id="37" name="Shape 35"/>
-          <p:cNvSpPr/>
-          <p:nvPr/>
-        </p:nvSpPr>
-        <p:spPr>
-          <a:xfrm>
-            <a:off x="8217408" y="2194560"/>
+            <a:off x="4337304" y="5737860"/>
             <a:ext cx="3514344" cy="640080"/>
           </a:xfrm>
           <a:prstGeom prst="roundRect">
@@ -4256,7 +4194,185 @@
       </p:sp>
       <p:sp>
         <p:nvSpPr>
+          <p:cNvPr id="36" name="Text 34"/>
+          <p:cNvSpPr/>
+          <p:nvPr/>
+        </p:nvSpPr>
+        <p:spPr>
+          <a:xfrm>
+            <a:off x="4410456" y="5783580"/>
+            <a:ext cx="3368040" cy="548640"/>
+          </a:xfrm>
+          <a:prstGeom prst="rect">
+            <a:avLst/>
+          </a:prstGeom>
+          <a:noFill/>
+          <a:ln/>
+        </p:spPr>
+        <p:txBody>
+          <a:bodyPr wrap="square" lIns="0" tIns="0" rIns="0" bIns="0" rtlCol="0" anchor="ctr"/>
+          <a:lstStyle/>
+          <a:p>
+            <a:pPr algn="ctr" indent="0" marL="0">
+              <a:lnSpc>
+                <a:spcPct val="100000"/>
+              </a:lnSpc>
+              <a:buNone/>
+            </a:pPr>
+            <a:r>
+              <a:rPr lang="en-US" sz="1050" b="1" dirty="0">
+                <a:solidFill>
+                  <a:srgbClr val="1F2A37"/>
+                </a:solidFill>
+                <a:latin typeface="Arial" pitchFamily="34" charset="0"/>
+                <a:ea typeface="Arial" pitchFamily="34" charset="-122"/>
+                <a:cs typeface="Arial" pitchFamily="34" charset="-120"/>
+              </a:rPr>
+              <a:t>Telegram редактор Sport</a:t>
+            </a:r>
+            <a:endParaRPr lang="en-US" sz="1050" dirty="0"/>
+          </a:p>
+          <a:p>
+            <a:pPr algn="ctr" indent="0" marL="0">
+              <a:lnSpc>
+                <a:spcPct val="100000"/>
+              </a:lnSpc>
+              <a:buNone/>
+            </a:pPr>
+            <a:r>
+              <a:rPr lang="en-US" sz="800" i="1" dirty="0">
+                <a:solidFill>
+                  <a:srgbClr val="5B6B7C"/>
+                </a:solidFill>
+                <a:latin typeface="Arial" pitchFamily="34" charset="0"/>
+                <a:ea typeface="Arial" pitchFamily="34" charset="-122"/>
+                <a:cs typeface="Arial" pitchFamily="34" charset="-120"/>
+              </a:rPr>
+              <a:t>Куричев Иван Николаевич</a:t>
+            </a:r>
+            <a:endParaRPr lang="en-US" sz="1050" dirty="0"/>
+          </a:p>
+          <a:p>
+            <a:pPr algn="ctr" indent="0" marL="0">
+              <a:lnSpc>
+                <a:spcPct val="100000"/>
+              </a:lnSpc>
+              <a:buNone/>
+            </a:pPr>
+            <a:r>
+              <a:rPr lang="en-US" sz="1100" b="1" dirty="0">
+                <a:solidFill>
+                  <a:srgbClr val="0F6E4F"/>
+                </a:solidFill>
+                <a:latin typeface="Arial" pitchFamily="34" charset="0"/>
+                <a:ea typeface="Arial" pitchFamily="34" charset="-122"/>
+                <a:cs typeface="Arial" pitchFamily="34" charset="-120"/>
+              </a:rPr>
+              <a:t>513 920 ₸</a:t>
+            </a:r>
+            <a:endParaRPr lang="en-US" sz="1050" dirty="0"/>
+          </a:p>
+        </p:txBody>
+      </p:sp>
+      <p:sp>
+        <p:nvSpPr>
+          <p:cNvPr id="37" name="Shape 35"/>
+          <p:cNvSpPr/>
+          <p:nvPr/>
+        </p:nvSpPr>
+        <p:spPr>
+          <a:xfrm>
+            <a:off x="9974580" y="1792224"/>
+            <a:ext cx="0" cy="54864"/>
+          </a:xfrm>
+          <a:prstGeom prst="line">
+            <a:avLst/>
+          </a:prstGeom>
+          <a:noFill/>
+          <a:ln w="12700">
+            <a:solidFill>
+              <a:srgbClr val="C7D8EE"/>
+            </a:solidFill>
+            <a:prstDash val="solid"/>
+          </a:ln>
+        </p:spPr>
+      </p:sp>
+      <p:sp>
+        <p:nvSpPr>
           <p:cNvPr id="38" name="Text 36"/>
+          <p:cNvSpPr/>
+          <p:nvPr/>
+        </p:nvSpPr>
+        <p:spPr>
+          <a:xfrm>
+            <a:off x="8217408" y="1847088"/>
+            <a:ext cx="3514344" cy="292608"/>
+          </a:xfrm>
+          <a:prstGeom prst="rect">
+            <a:avLst/>
+          </a:prstGeom>
+          <a:noFill/>
+          <a:ln/>
+        </p:spPr>
+        <p:txBody>
+          <a:bodyPr wrap="square" lIns="0" tIns="0" rIns="0" bIns="0" rtlCol="0" anchor="ctr"/>
+          <a:lstStyle/>
+          <a:p>
+            <a:pPr algn="ctr" indent="0" marL="0">
+              <a:buNone/>
+            </a:pPr>
+            <a:r>
+              <a:rPr lang="en-US" sz="1200" b="1" dirty="0">
+                <a:solidFill>
+                  <a:srgbClr val="2E5C8A"/>
+                </a:solidFill>
+                <a:latin typeface="Arial" pitchFamily="34" charset="0"/>
+                <a:ea typeface="Arial" pitchFamily="34" charset="-122"/>
+                <a:cs typeface="Arial" pitchFamily="34" charset="-120"/>
+              </a:rPr>
+              <a:t>PR</a:t>
+            </a:r>
+            <a:endParaRPr lang="en-US" sz="1200" dirty="0"/>
+          </a:p>
+        </p:txBody>
+      </p:sp>
+      <p:sp>
+        <p:nvSpPr>
+          <p:cNvPr id="39" name="Shape 37"/>
+          <p:cNvSpPr/>
+          <p:nvPr/>
+        </p:nvSpPr>
+        <p:spPr>
+          <a:xfrm>
+            <a:off x="8217408" y="2194560"/>
+            <a:ext cx="3514344" cy="640080"/>
+          </a:xfrm>
+          <a:prstGeom prst="roundRect">
+            <a:avLst>
+              <a:gd name="adj" fmla="val 8571"/>
+            </a:avLst>
+          </a:prstGeom>
+          <a:solidFill>
+            <a:srgbClr val="EAF1FB"/>
+          </a:solidFill>
+          <a:ln w="12700">
+            <a:solidFill>
+              <a:srgbClr val="C7D8EE"/>
+            </a:solidFill>
+            <a:prstDash val="solid"/>
+          </a:ln>
+          <a:effectLst>
+            <a:outerShdw sx="100000" sy="100000" kx="0" ky="0" algn="bl" rotWithShape="0" blurRad="50800" dist="25400" dir="5400000">
+              <a:srgbClr val="9AA7B4">
+                <a:alpha val="28000"/>
+              </a:srgbClr>
+            </a:outerShdw>
+          </a:effectLst>
+        </p:spPr>
+      </p:sp>
+      <p:sp>
+        <p:nvSpPr>
+          <p:cNvPr id="40" name="Text 38"/>
           <p:cNvSpPr/>
           <p:nvPr/>
         </p:nvSpPr>
@@ -9060,7 +9176,7 @@
                 <a:ea typeface="Arial" pitchFamily="34" charset="-122"/>
                 <a:cs typeface="Arial" pitchFamily="34" charset="-120"/>
               </a:rPr>
-              <a:t>ФОТ отдела = сумма должностных окладов (тотал) всех позиций отдела, включая руководителя. Суммы взяты из Excel; руководители и senior-роли — из отдельного блока стоимостей. Итог по 4 отделам: 43 050 159 ₸ в месяц.</a:t>
+              <a:t>ФОТ отдела = сумма должностных окладов (тотал) всех позиций отдела, включая руководителя. Суммы взяты из Excel; руководители и senior-роли — из отдельного блока стоимостей. Итог по 4 отделам: 44 050 321 ₸ в месяц.</a:t>
             </a:r>
             <a:endParaRPr lang="en-US" sz="1200" dirty="0"/>
           </a:p>

--- a/Структура маркетинга — отделы и ФОТ.pptx
+++ b/Структура маркетинга — отделы и ФОТ.pptx
@@ -2070,7 +2070,7 @@
                 <a:ea typeface="Arial" pitchFamily="34" charset="-122"/>
                 <a:cs typeface="Arial" pitchFamily="34" charset="-120"/>
               </a:rPr>
-              <a:t>15 846 637 ₸</a:t>
+              <a:t>12 930 047 ₸</a:t>
             </a:r>
             <a:endParaRPr lang="en-US" sz="1200" dirty="0"/>
           </a:p>
@@ -2396,7 +2396,7 @@
                 <a:ea typeface="Arial" pitchFamily="34" charset="-122"/>
                 <a:cs typeface="Arial" pitchFamily="34" charset="-120"/>
               </a:rPr>
-              <a:t>44 050 321 ₸</a:t>
+              <a:t>41 133 731 ₸</a:t>
             </a:r>
             <a:endParaRPr lang="en-US" sz="2600" dirty="0"/>
           </a:p>
@@ -2604,12 +2604,12 @@
         </p:nvSpPr>
         <p:spPr>
           <a:xfrm>
-            <a:off x="3991356" y="1005840"/>
-            <a:ext cx="4206240" cy="731520"/>
+            <a:off x="4448556" y="1060704"/>
+            <a:ext cx="3291840" cy="658368"/>
           </a:xfrm>
           <a:prstGeom prst="roundRect">
             <a:avLst>
-              <a:gd name="adj" fmla="val 7500"/>
+              <a:gd name="adj" fmla="val 8333"/>
             </a:avLst>
           </a:prstGeom>
           <a:solidFill>
@@ -2638,8 +2638,8 @@
         </p:nvSpPr>
         <p:spPr>
           <a:xfrm>
-            <a:off x="4064508" y="1051560"/>
-            <a:ext cx="4059936" cy="640080"/>
+            <a:off x="4521708" y="1106424"/>
+            <a:ext cx="3145536" cy="566928"/>
           </a:xfrm>
           <a:prstGeom prst="rect">
             <a:avLst/>
@@ -2720,8 +2720,8 @@
         </p:nvSpPr>
         <p:spPr>
           <a:xfrm>
-            <a:off x="6094476" y="1737360"/>
-            <a:ext cx="0" cy="54864"/>
+            <a:off x="6094476" y="1719072"/>
+            <a:ext cx="0" cy="91440"/>
           </a:xfrm>
           <a:prstGeom prst="line">
             <a:avLst/>
@@ -2743,8 +2743,8 @@
         </p:nvSpPr>
         <p:spPr>
           <a:xfrm>
-            <a:off x="2214372" y="1792224"/>
-            <a:ext cx="7760208" cy="0"/>
+            <a:off x="2203704" y="1810512"/>
+            <a:ext cx="8618220" cy="0"/>
           </a:xfrm>
           <a:prstGeom prst="line">
             <a:avLst/>
@@ -2766,8 +2766,8 @@
         </p:nvSpPr>
         <p:spPr>
           <a:xfrm>
-            <a:off x="2214372" y="1792224"/>
-            <a:ext cx="0" cy="54864"/>
+            <a:off x="2203704" y="1810512"/>
+            <a:ext cx="0" cy="146304"/>
           </a:xfrm>
           <a:prstGeom prst="line">
             <a:avLst/>
@@ -2783,14 +2783,60 @@
       </p:sp>
       <p:sp>
         <p:nvSpPr>
-          <p:cNvPr id="10" name="Text 8"/>
-          <p:cNvSpPr/>
-          <p:nvPr/>
-        </p:nvSpPr>
-        <p:spPr>
-          <a:xfrm>
-            <a:off x="457200" y="1847088"/>
-            <a:ext cx="3514344" cy="292608"/>
+          <p:cNvPr id="10" name="Shape 8"/>
+          <p:cNvSpPr/>
+          <p:nvPr/>
+        </p:nvSpPr>
+        <p:spPr>
+          <a:xfrm>
+            <a:off x="6963156" y="1810512"/>
+            <a:ext cx="0" cy="146304"/>
+          </a:xfrm>
+          <a:prstGeom prst="line">
+            <a:avLst/>
+          </a:prstGeom>
+          <a:noFill/>
+          <a:ln w="12700">
+            <a:solidFill>
+              <a:srgbClr val="C7D8EE"/>
+            </a:solidFill>
+            <a:prstDash val="solid"/>
+          </a:ln>
+        </p:spPr>
+      </p:sp>
+      <p:sp>
+        <p:nvSpPr>
+          <p:cNvPr id="11" name="Shape 9"/>
+          <p:cNvSpPr/>
+          <p:nvPr/>
+        </p:nvSpPr>
+        <p:spPr>
+          <a:xfrm>
+            <a:off x="10821924" y="1810512"/>
+            <a:ext cx="0" cy="146304"/>
+          </a:xfrm>
+          <a:prstGeom prst="line">
+            <a:avLst/>
+          </a:prstGeom>
+          <a:noFill/>
+          <a:ln w="12700">
+            <a:solidFill>
+              <a:srgbClr val="C7D8EE"/>
+            </a:solidFill>
+            <a:prstDash val="solid"/>
+          </a:ln>
+        </p:spPr>
+      </p:sp>
+      <p:sp>
+        <p:nvSpPr>
+          <p:cNvPr id="12" name="Text 10"/>
+          <p:cNvSpPr/>
+          <p:nvPr/>
+        </p:nvSpPr>
+        <p:spPr>
+          <a:xfrm>
+            <a:off x="457200" y="1956816"/>
+            <a:ext cx="3493008" cy="292608"/>
           </a:xfrm>
           <a:prstGeom prst="rect">
             <a:avLst/>
@@ -2814,7 +2860,7 @@
                 <a:ea typeface="Arial" pitchFamily="34" charset="-122"/>
                 <a:cs typeface="Arial" pitchFamily="34" charset="-120"/>
               </a:rPr>
-              <a:t>Промо / Контент  (original · sport)</a:t>
+              <a:t>Контент  (original · sport)</a:t>
             </a:r>
             <a:endParaRPr lang="en-US" sz="1200" dirty="0"/>
           </a:p>
@@ -2822,18 +2868,96 @@
       </p:sp>
       <p:sp>
         <p:nvSpPr>
-          <p:cNvPr id="11" name="Shape 9"/>
-          <p:cNvSpPr/>
-          <p:nvPr/>
-        </p:nvSpPr>
-        <p:spPr>
-          <a:xfrm>
-            <a:off x="457200" y="2194560"/>
-            <a:ext cx="3514344" cy="640080"/>
+          <p:cNvPr id="13" name="Text 11"/>
+          <p:cNvSpPr/>
+          <p:nvPr/>
+        </p:nvSpPr>
+        <p:spPr>
+          <a:xfrm>
+            <a:off x="4315968" y="1956816"/>
+            <a:ext cx="5294376" cy="292608"/>
+          </a:xfrm>
+          <a:prstGeom prst="rect">
+            <a:avLst/>
+          </a:prstGeom>
+          <a:noFill/>
+          <a:ln/>
+        </p:spPr>
+        <p:txBody>
+          <a:bodyPr wrap="square" lIns="0" tIns="0" rIns="0" bIns="0" rtlCol="0" anchor="ctr"/>
+          <a:lstStyle/>
+          <a:p>
+            <a:pPr algn="ctr" indent="0" marL="0">
+              <a:buNone/>
+            </a:pPr>
+            <a:r>
+              <a:rPr lang="en-US" sz="1200" b="1" dirty="0">
+                <a:solidFill>
+                  <a:srgbClr val="2E5C8A"/>
+                </a:solidFill>
+                <a:latin typeface="Arial" pitchFamily="34" charset="0"/>
+                <a:ea typeface="Arial" pitchFamily="34" charset="-122"/>
+                <a:cs typeface="Arial" pitchFamily="34" charset="-120"/>
+              </a:rPr>
+              <a:t>SMM  (gen · original · sport)</a:t>
+            </a:r>
+            <a:endParaRPr lang="en-US" sz="1200" dirty="0"/>
+          </a:p>
+        </p:txBody>
+      </p:sp>
+      <p:sp>
+        <p:nvSpPr>
+          <p:cNvPr id="14" name="Text 12"/>
+          <p:cNvSpPr/>
+          <p:nvPr/>
+        </p:nvSpPr>
+        <p:spPr>
+          <a:xfrm>
+            <a:off x="9976104" y="1956816"/>
+            <a:ext cx="1691640" cy="292608"/>
+          </a:xfrm>
+          <a:prstGeom prst="rect">
+            <a:avLst/>
+          </a:prstGeom>
+          <a:noFill/>
+          <a:ln/>
+        </p:spPr>
+        <p:txBody>
+          <a:bodyPr wrap="square" lIns="0" tIns="0" rIns="0" bIns="0" rtlCol="0" anchor="ctr"/>
+          <a:lstStyle/>
+          <a:p>
+            <a:pPr algn="ctr" indent="0" marL="0">
+              <a:buNone/>
+            </a:pPr>
+            <a:r>
+              <a:rPr lang="en-US" sz="1200" b="1" dirty="0">
+                <a:solidFill>
+                  <a:srgbClr val="2E5C8A"/>
+                </a:solidFill>
+                <a:latin typeface="Arial" pitchFamily="34" charset="0"/>
+                <a:ea typeface="Arial" pitchFamily="34" charset="-122"/>
+                <a:cs typeface="Arial" pitchFamily="34" charset="-120"/>
+              </a:rPr>
+              <a:t>PR</a:t>
+            </a:r>
+            <a:endParaRPr lang="en-US" sz="1200" dirty="0"/>
+          </a:p>
+        </p:txBody>
+      </p:sp>
+      <p:sp>
+        <p:nvSpPr>
+          <p:cNvPr id="15" name="Shape 13"/>
+          <p:cNvSpPr/>
+          <p:nvPr/>
+        </p:nvSpPr>
+        <p:spPr>
+          <a:xfrm>
+            <a:off x="457200" y="2340864"/>
+            <a:ext cx="1691640" cy="932688"/>
           </a:xfrm>
           <a:prstGeom prst="roundRect">
             <a:avLst>
-              <a:gd name="adj" fmla="val 8571"/>
+              <a:gd name="adj" fmla="val 5882"/>
             </a:avLst>
           </a:prstGeom>
           <a:solidFill>
@@ -2856,14 +2980,14 @@
       </p:sp>
       <p:sp>
         <p:nvSpPr>
-          <p:cNvPr id="12" name="Text 10"/>
-          <p:cNvSpPr/>
-          <p:nvPr/>
-        </p:nvSpPr>
-        <p:spPr>
-          <a:xfrm>
-            <a:off x="530352" y="2240280"/>
-            <a:ext cx="3368040" cy="548640"/>
+          <p:cNvPr id="16" name="Text 14"/>
+          <p:cNvSpPr/>
+          <p:nvPr/>
+        </p:nvSpPr>
+        <p:spPr>
+          <a:xfrm>
+            <a:off x="530352" y="2386584"/>
+            <a:ext cx="1545336" cy="841248"/>
           </a:xfrm>
           <a:prstGeom prst="rect">
             <a:avLst/>
@@ -2882,7 +3006,7 @@
               <a:buNone/>
             </a:pPr>
             <a:r>
-              <a:rPr lang="en-US" sz="1050" b="1" dirty="0">
+              <a:rPr lang="en-US" sz="945" b="1" dirty="0">
                 <a:solidFill>
                   <a:srgbClr val="1F2A37"/>
                 </a:solidFill>
@@ -2892,17 +3016,17 @@
               </a:rPr>
               <a:t>Senior Promo Original · Аида А</a:t>
             </a:r>
-            <a:endParaRPr lang="en-US" sz="1050" dirty="0"/>
-          </a:p>
-          <a:p>
-            <a:pPr algn="ctr" indent="0" marL="0">
-              <a:lnSpc>
-                <a:spcPct val="100000"/>
-              </a:lnSpc>
-              <a:buNone/>
-            </a:pPr>
-            <a:r>
-              <a:rPr lang="en-US" sz="800" i="1" dirty="0">
+            <a:endParaRPr lang="en-US" sz="945" dirty="0"/>
+          </a:p>
+          <a:p>
+            <a:pPr algn="ctr" indent="0" marL="0">
+              <a:lnSpc>
+                <a:spcPct val="100000"/>
+              </a:lnSpc>
+              <a:buNone/>
+            </a:pPr>
+            <a:r>
+              <a:rPr lang="en-US" sz="720" i="1" dirty="0">
                 <a:solidFill>
                   <a:srgbClr val="5B6B7C"/>
                 </a:solidFill>
@@ -2912,17 +3036,17 @@
               </a:rPr>
               <a:t>Әлішбай Аида Шералықызы</a:t>
             </a:r>
-            <a:endParaRPr lang="en-US" sz="1050" dirty="0"/>
-          </a:p>
-          <a:p>
-            <a:pPr algn="ctr" indent="0" marL="0">
-              <a:lnSpc>
-                <a:spcPct val="100000"/>
-              </a:lnSpc>
-              <a:buNone/>
-            </a:pPr>
-            <a:r>
-              <a:rPr lang="en-US" sz="1100" b="1" dirty="0">
+            <a:endParaRPr lang="en-US" sz="945" dirty="0"/>
+          </a:p>
+          <a:p>
+            <a:pPr algn="ctr" indent="0" marL="0">
+              <a:lnSpc>
+                <a:spcPct val="100000"/>
+              </a:lnSpc>
+              <a:buNone/>
+            </a:pPr>
+            <a:r>
+              <a:rPr lang="en-US" sz="990" b="1" dirty="0">
                 <a:solidFill>
                   <a:srgbClr val="0F6E4F"/>
                 </a:solidFill>
@@ -2932,24 +3056,24 @@
               </a:rPr>
               <a:t>1 247 076 ₸</a:t>
             </a:r>
-            <a:endParaRPr lang="en-US" sz="1050" dirty="0"/>
-          </a:p>
-        </p:txBody>
-      </p:sp>
-      <p:sp>
-        <p:nvSpPr>
-          <p:cNvPr id="13" name="Shape 11"/>
-          <p:cNvSpPr/>
-          <p:nvPr/>
-        </p:nvSpPr>
-        <p:spPr>
-          <a:xfrm>
-            <a:off x="457200" y="2903220"/>
-            <a:ext cx="3514344" cy="640080"/>
+            <a:endParaRPr lang="en-US" sz="945" dirty="0"/>
+          </a:p>
+        </p:txBody>
+      </p:sp>
+      <p:sp>
+        <p:nvSpPr>
+          <p:cNvPr id="17" name="Shape 15"/>
+          <p:cNvSpPr/>
+          <p:nvPr/>
+        </p:nvSpPr>
+        <p:spPr>
+          <a:xfrm>
+            <a:off x="457200" y="3364992"/>
+            <a:ext cx="1691640" cy="932688"/>
           </a:xfrm>
           <a:prstGeom prst="roundRect">
             <a:avLst>
-              <a:gd name="adj" fmla="val 8571"/>
+              <a:gd name="adj" fmla="val 5882"/>
             </a:avLst>
           </a:prstGeom>
           <a:solidFill>
@@ -2972,14 +3096,14 @@
       </p:sp>
       <p:sp>
         <p:nvSpPr>
-          <p:cNvPr id="14" name="Text 12"/>
-          <p:cNvSpPr/>
-          <p:nvPr/>
-        </p:nvSpPr>
-        <p:spPr>
-          <a:xfrm>
-            <a:off x="530352" y="2948940"/>
-            <a:ext cx="3368040" cy="548640"/>
+          <p:cNvPr id="18" name="Text 16"/>
+          <p:cNvSpPr/>
+          <p:nvPr/>
+        </p:nvSpPr>
+        <p:spPr>
+          <a:xfrm>
+            <a:off x="530352" y="3410712"/>
+            <a:ext cx="1545336" cy="841248"/>
           </a:xfrm>
           <a:prstGeom prst="rect">
             <a:avLst/>
@@ -2998,7 +3122,7 @@
               <a:buNone/>
             </a:pPr>
             <a:r>
-              <a:rPr lang="en-US" sz="1050" b="1" dirty="0">
+              <a:rPr lang="en-US" sz="945" b="1" dirty="0">
                 <a:solidFill>
                   <a:srgbClr val="1F2A37"/>
                 </a:solidFill>
@@ -3006,19 +3130,19 @@
                 <a:ea typeface="Arial" pitchFamily="34" charset="-122"/>
                 <a:cs typeface="Arial" pitchFamily="34" charset="-120"/>
               </a:rPr>
-              <a:t>Promo · Александр К</a:t>
-            </a:r>
-            <a:endParaRPr lang="en-US" sz="1050" dirty="0"/>
-          </a:p>
-          <a:p>
-            <a:pPr algn="ctr" indent="0" marL="0">
-              <a:lnSpc>
-                <a:spcPct val="100000"/>
-              </a:lnSpc>
-              <a:buNone/>
-            </a:pPr>
-            <a:r>
-              <a:rPr lang="en-US" sz="800" i="1" dirty="0">
+              <a:t>Promo · Райлана</a:t>
+            </a:r>
+            <a:endParaRPr lang="en-US" sz="945" dirty="0"/>
+          </a:p>
+          <a:p>
+            <a:pPr algn="ctr" indent="0" marL="0">
+              <a:lnSpc>
+                <a:spcPct val="100000"/>
+              </a:lnSpc>
+              <a:buNone/>
+            </a:pPr>
+            <a:r>
+              <a:rPr lang="en-US" sz="720" i="1" dirty="0">
                 <a:solidFill>
                   <a:srgbClr val="5B6B7C"/>
                 </a:solidFill>
@@ -3026,19 +3150,19 @@
                 <a:ea typeface="Arial" pitchFamily="34" charset="-122"/>
                 <a:cs typeface="Arial" pitchFamily="34" charset="-120"/>
               </a:rPr>
-              <a:t>Казачков Александр</a:t>
-            </a:r>
-            <a:endParaRPr lang="en-US" sz="1050" dirty="0"/>
-          </a:p>
-          <a:p>
-            <a:pPr algn="ctr" indent="0" marL="0">
-              <a:lnSpc>
-                <a:spcPct val="100000"/>
-              </a:lnSpc>
-              <a:buNone/>
-            </a:pPr>
-            <a:r>
-              <a:rPr lang="en-US" sz="1100" b="1" dirty="0">
+              <a:t>Жанибекова Райлана Нурлановна</a:t>
+            </a:r>
+            <a:endParaRPr lang="en-US" sz="945" dirty="0"/>
+          </a:p>
+          <a:p>
+            <a:pPr algn="ctr" indent="0" marL="0">
+              <a:lnSpc>
+                <a:spcPct val="100000"/>
+              </a:lnSpc>
+              <a:buNone/>
+            </a:pPr>
+            <a:r>
+              <a:rPr lang="en-US" sz="990" b="1" dirty="0">
                 <a:solidFill>
                   <a:srgbClr val="0F6E4F"/>
                 </a:solidFill>
@@ -3046,26 +3170,26 @@
                 <a:ea typeface="Arial" pitchFamily="34" charset="-122"/>
                 <a:cs typeface="Arial" pitchFamily="34" charset="-120"/>
               </a:rPr>
-              <a:t>800 000 ₸</a:t>
-            </a:r>
-            <a:endParaRPr lang="en-US" sz="1050" dirty="0"/>
-          </a:p>
-        </p:txBody>
-      </p:sp>
-      <p:sp>
-        <p:nvSpPr>
-          <p:cNvPr id="15" name="Shape 13"/>
-          <p:cNvSpPr/>
-          <p:nvPr/>
-        </p:nvSpPr>
-        <p:spPr>
-          <a:xfrm>
-            <a:off x="457200" y="3611880"/>
-            <a:ext cx="3514344" cy="640080"/>
+              <a:t>1 000 162 ₸</a:t>
+            </a:r>
+            <a:endParaRPr lang="en-US" sz="945" dirty="0"/>
+          </a:p>
+        </p:txBody>
+      </p:sp>
+      <p:sp>
+        <p:nvSpPr>
+          <p:cNvPr id="19" name="Shape 17"/>
+          <p:cNvSpPr/>
+          <p:nvPr/>
+        </p:nvSpPr>
+        <p:spPr>
+          <a:xfrm>
+            <a:off x="457200" y="4389120"/>
+            <a:ext cx="1691640" cy="932688"/>
           </a:xfrm>
           <a:prstGeom prst="roundRect">
             <a:avLst>
-              <a:gd name="adj" fmla="val 8571"/>
+              <a:gd name="adj" fmla="val 5882"/>
             </a:avLst>
           </a:prstGeom>
           <a:solidFill>
@@ -3088,14 +3212,14 @@
       </p:sp>
       <p:sp>
         <p:nvSpPr>
-          <p:cNvPr id="16" name="Text 14"/>
-          <p:cNvSpPr/>
-          <p:nvPr/>
-        </p:nvSpPr>
-        <p:spPr>
-          <a:xfrm>
-            <a:off x="530352" y="3657600"/>
-            <a:ext cx="3368040" cy="548640"/>
+          <p:cNvPr id="20" name="Text 18"/>
+          <p:cNvSpPr/>
+          <p:nvPr/>
+        </p:nvSpPr>
+        <p:spPr>
+          <a:xfrm>
+            <a:off x="530352" y="4434840"/>
+            <a:ext cx="1545336" cy="841248"/>
           </a:xfrm>
           <a:prstGeom prst="rect">
             <a:avLst/>
@@ -3114,7 +3238,7 @@
               <a:buNone/>
             </a:pPr>
             <a:r>
-              <a:rPr lang="en-US" sz="1050" b="1" dirty="0">
+              <a:rPr lang="en-US" sz="945" b="1" dirty="0">
                 <a:solidFill>
                   <a:srgbClr val="1F2A37"/>
                 </a:solidFill>
@@ -3122,19 +3246,19 @@
                 <a:ea typeface="Arial" pitchFamily="34" charset="-122"/>
                 <a:cs typeface="Arial" pitchFamily="34" charset="-120"/>
               </a:rPr>
-              <a:t>Promo · Райлана</a:t>
-            </a:r>
-            <a:endParaRPr lang="en-US" sz="1050" dirty="0"/>
-          </a:p>
-          <a:p>
-            <a:pPr algn="ctr" indent="0" marL="0">
-              <a:lnSpc>
-                <a:spcPct val="100000"/>
-              </a:lnSpc>
-              <a:buNone/>
-            </a:pPr>
-            <a:r>
-              <a:rPr lang="en-US" sz="800" i="1" dirty="0">
+              <a:t>Promo · Чолпон</a:t>
+            </a:r>
+            <a:endParaRPr lang="en-US" sz="945" dirty="0"/>
+          </a:p>
+          <a:p>
+            <a:pPr algn="ctr" indent="0" marL="0">
+              <a:lnSpc>
+                <a:spcPct val="100000"/>
+              </a:lnSpc>
+              <a:buNone/>
+            </a:pPr>
+            <a:r>
+              <a:rPr lang="en-US" sz="720" i="1" dirty="0">
                 <a:solidFill>
                   <a:srgbClr val="5B6B7C"/>
                 </a:solidFill>
@@ -3142,19 +3266,19 @@
                 <a:ea typeface="Arial" pitchFamily="34" charset="-122"/>
                 <a:cs typeface="Arial" pitchFamily="34" charset="-120"/>
               </a:rPr>
-              <a:t>Жанибекова Райлана Нурлановна</a:t>
-            </a:r>
-            <a:endParaRPr lang="en-US" sz="1050" dirty="0"/>
-          </a:p>
-          <a:p>
-            <a:pPr algn="ctr" indent="0" marL="0">
-              <a:lnSpc>
-                <a:spcPct val="100000"/>
-              </a:lnSpc>
-              <a:buNone/>
-            </a:pPr>
-            <a:r>
-              <a:rPr lang="en-US" sz="1100" b="1" dirty="0">
+              <a:t>Эркинова Чолпон</a:t>
+            </a:r>
+            <a:endParaRPr lang="en-US" sz="945" dirty="0"/>
+          </a:p>
+          <a:p>
+            <a:pPr algn="ctr" indent="0" marL="0">
+              <a:lnSpc>
+                <a:spcPct val="100000"/>
+              </a:lnSpc>
+              <a:buNone/>
+            </a:pPr>
+            <a:r>
+              <a:rPr lang="en-US" sz="990" b="1" dirty="0">
                 <a:solidFill>
                   <a:srgbClr val="0F6E4F"/>
                 </a:solidFill>
@@ -3162,26 +3286,26 @@
                 <a:ea typeface="Arial" pitchFamily="34" charset="-122"/>
                 <a:cs typeface="Arial" pitchFamily="34" charset="-120"/>
               </a:rPr>
-              <a:t>1 000 162 ₸</a:t>
-            </a:r>
-            <a:endParaRPr lang="en-US" sz="1050" dirty="0"/>
-          </a:p>
-        </p:txBody>
-      </p:sp>
-      <p:sp>
-        <p:nvSpPr>
-          <p:cNvPr id="17" name="Shape 15"/>
-          <p:cNvSpPr/>
-          <p:nvPr/>
-        </p:nvSpPr>
-        <p:spPr>
-          <a:xfrm>
-            <a:off x="457200" y="4320540"/>
-            <a:ext cx="3514344" cy="640080"/>
+              <a:t>1 025 642 ₸</a:t>
+            </a:r>
+            <a:endParaRPr lang="en-US" sz="945" dirty="0"/>
+          </a:p>
+        </p:txBody>
+      </p:sp>
+      <p:sp>
+        <p:nvSpPr>
+          <p:cNvPr id="21" name="Shape 19"/>
+          <p:cNvSpPr/>
+          <p:nvPr/>
+        </p:nvSpPr>
+        <p:spPr>
+          <a:xfrm>
+            <a:off x="2258568" y="2340864"/>
+            <a:ext cx="1691640" cy="932688"/>
           </a:xfrm>
           <a:prstGeom prst="roundRect">
             <a:avLst>
-              <a:gd name="adj" fmla="val 8571"/>
+              <a:gd name="adj" fmla="val 5882"/>
             </a:avLst>
           </a:prstGeom>
           <a:solidFill>
@@ -3204,14 +3328,14 @@
       </p:sp>
       <p:sp>
         <p:nvSpPr>
-          <p:cNvPr id="18" name="Text 16"/>
-          <p:cNvSpPr/>
-          <p:nvPr/>
-        </p:nvSpPr>
-        <p:spPr>
-          <a:xfrm>
-            <a:off x="530352" y="4366260"/>
-            <a:ext cx="3368040" cy="548640"/>
+          <p:cNvPr id="22" name="Text 20"/>
+          <p:cNvSpPr/>
+          <p:nvPr/>
+        </p:nvSpPr>
+        <p:spPr>
+          <a:xfrm>
+            <a:off x="2331720" y="2386584"/>
+            <a:ext cx="1545336" cy="841248"/>
           </a:xfrm>
           <a:prstGeom prst="rect">
             <a:avLst/>
@@ -3230,7 +3354,7 @@
               <a:buNone/>
             </a:pPr>
             <a:r>
-              <a:rPr lang="en-US" sz="1050" b="1" dirty="0">
+              <a:rPr lang="en-US" sz="945" b="1" dirty="0">
                 <a:solidFill>
                   <a:srgbClr val="1F2A37"/>
                 </a:solidFill>
@@ -3238,19 +3362,19 @@
                 <a:ea typeface="Arial" pitchFamily="34" charset="-122"/>
                 <a:cs typeface="Arial" pitchFamily="34" charset="-120"/>
               </a:rPr>
-              <a:t>Promo · Яков</a:t>
-            </a:r>
-            <a:endParaRPr lang="en-US" sz="1050" dirty="0"/>
-          </a:p>
-          <a:p>
-            <a:pPr algn="ctr" indent="0" marL="0">
-              <a:lnSpc>
-                <a:spcPct val="100000"/>
-              </a:lnSpc>
-              <a:buNone/>
-            </a:pPr>
-            <a:r>
-              <a:rPr lang="en-US" sz="800" i="1" dirty="0">
+              <a:t>Promo · Александр К</a:t>
+            </a:r>
+            <a:endParaRPr lang="en-US" sz="945" dirty="0"/>
+          </a:p>
+          <a:p>
+            <a:pPr algn="ctr" indent="0" marL="0">
+              <a:lnSpc>
+                <a:spcPct val="100000"/>
+              </a:lnSpc>
+              <a:buNone/>
+            </a:pPr>
+            <a:r>
+              <a:rPr lang="en-US" sz="720" i="1" dirty="0">
                 <a:solidFill>
                   <a:srgbClr val="5B6B7C"/>
                 </a:solidFill>
@@ -3258,19 +3382,19 @@
                 <a:ea typeface="Arial" pitchFamily="34" charset="-122"/>
                 <a:cs typeface="Arial" pitchFamily="34" charset="-120"/>
               </a:rPr>
-              <a:t>Сорокин Яков Андреевич</a:t>
-            </a:r>
-            <a:endParaRPr lang="en-US" sz="1050" dirty="0"/>
-          </a:p>
-          <a:p>
-            <a:pPr algn="ctr" indent="0" marL="0">
-              <a:lnSpc>
-                <a:spcPct val="100000"/>
-              </a:lnSpc>
-              <a:buNone/>
-            </a:pPr>
-            <a:r>
-              <a:rPr lang="en-US" sz="1100" b="1" dirty="0">
+              <a:t>Казачков Александр</a:t>
+            </a:r>
+            <a:endParaRPr lang="en-US" sz="945" dirty="0"/>
+          </a:p>
+          <a:p>
+            <a:pPr algn="ctr" indent="0" marL="0">
+              <a:lnSpc>
+                <a:spcPct val="100000"/>
+              </a:lnSpc>
+              <a:buNone/>
+            </a:pPr>
+            <a:r>
+              <a:rPr lang="en-US" sz="990" b="1" dirty="0">
                 <a:solidFill>
                   <a:srgbClr val="0F6E4F"/>
                 </a:solidFill>
@@ -3278,26 +3402,26 @@
                 <a:ea typeface="Arial" pitchFamily="34" charset="-122"/>
                 <a:cs typeface="Arial" pitchFamily="34" charset="-120"/>
               </a:rPr>
-              <a:t>614 931 ₸</a:t>
-            </a:r>
-            <a:endParaRPr lang="en-US" sz="1050" dirty="0"/>
-          </a:p>
-        </p:txBody>
-      </p:sp>
-      <p:sp>
-        <p:nvSpPr>
-          <p:cNvPr id="19" name="Shape 17"/>
-          <p:cNvSpPr/>
-          <p:nvPr/>
-        </p:nvSpPr>
-        <p:spPr>
-          <a:xfrm>
-            <a:off x="457200" y="5029200"/>
-            <a:ext cx="3514344" cy="640080"/>
+              <a:t>800 000 ₸</a:t>
+            </a:r>
+            <a:endParaRPr lang="en-US" sz="945" dirty="0"/>
+          </a:p>
+        </p:txBody>
+      </p:sp>
+      <p:sp>
+        <p:nvSpPr>
+          <p:cNvPr id="23" name="Shape 21"/>
+          <p:cNvSpPr/>
+          <p:nvPr/>
+        </p:nvSpPr>
+        <p:spPr>
+          <a:xfrm>
+            <a:off x="2258568" y="3364992"/>
+            <a:ext cx="1691640" cy="932688"/>
           </a:xfrm>
           <a:prstGeom prst="roundRect">
             <a:avLst>
-              <a:gd name="adj" fmla="val 8571"/>
+              <a:gd name="adj" fmla="val 5882"/>
             </a:avLst>
           </a:prstGeom>
           <a:solidFill>
@@ -3320,14 +3444,14 @@
       </p:sp>
       <p:sp>
         <p:nvSpPr>
-          <p:cNvPr id="20" name="Text 18"/>
-          <p:cNvSpPr/>
-          <p:nvPr/>
-        </p:nvSpPr>
-        <p:spPr>
-          <a:xfrm>
-            <a:off x="530352" y="5074920"/>
-            <a:ext cx="3368040" cy="548640"/>
+          <p:cNvPr id="24" name="Text 22"/>
+          <p:cNvSpPr/>
+          <p:nvPr/>
+        </p:nvSpPr>
+        <p:spPr>
+          <a:xfrm>
+            <a:off x="2331720" y="3410712"/>
+            <a:ext cx="1545336" cy="841248"/>
           </a:xfrm>
           <a:prstGeom prst="rect">
             <a:avLst/>
@@ -3346,7 +3470,7 @@
               <a:buNone/>
             </a:pPr>
             <a:r>
-              <a:rPr lang="en-US" sz="1050" b="1" dirty="0">
+              <a:rPr lang="en-US" sz="945" b="1" dirty="0">
                 <a:solidFill>
                   <a:srgbClr val="1F2A37"/>
                 </a:solidFill>
@@ -3354,19 +3478,19 @@
                 <a:ea typeface="Arial" pitchFamily="34" charset="-122"/>
                 <a:cs typeface="Arial" pitchFamily="34" charset="-120"/>
               </a:rPr>
-              <a:t>Promo · Чолпон</a:t>
-            </a:r>
-            <a:endParaRPr lang="en-US" sz="1050" dirty="0"/>
-          </a:p>
-          <a:p>
-            <a:pPr algn="ctr" indent="0" marL="0">
-              <a:lnSpc>
-                <a:spcPct val="100000"/>
-              </a:lnSpc>
-              <a:buNone/>
-            </a:pPr>
-            <a:r>
-              <a:rPr lang="en-US" sz="800" i="1" dirty="0">
+              <a:t>Promo · Яков</a:t>
+            </a:r>
+            <a:endParaRPr lang="en-US" sz="945" dirty="0"/>
+          </a:p>
+          <a:p>
+            <a:pPr algn="ctr" indent="0" marL="0">
+              <a:lnSpc>
+                <a:spcPct val="100000"/>
+              </a:lnSpc>
+              <a:buNone/>
+            </a:pPr>
+            <a:r>
+              <a:rPr lang="en-US" sz="720" i="1" dirty="0">
                 <a:solidFill>
                   <a:srgbClr val="5B6B7C"/>
                 </a:solidFill>
@@ -3374,19 +3498,19 @@
                 <a:ea typeface="Arial" pitchFamily="34" charset="-122"/>
                 <a:cs typeface="Arial" pitchFamily="34" charset="-120"/>
               </a:rPr>
-              <a:t>Эркинова Чолпон</a:t>
-            </a:r>
-            <a:endParaRPr lang="en-US" sz="1050" dirty="0"/>
-          </a:p>
-          <a:p>
-            <a:pPr algn="ctr" indent="0" marL="0">
-              <a:lnSpc>
-                <a:spcPct val="100000"/>
-              </a:lnSpc>
-              <a:buNone/>
-            </a:pPr>
-            <a:r>
-              <a:rPr lang="en-US" sz="1100" b="1" dirty="0">
+              <a:t>Сорокин Яков Андреевич</a:t>
+            </a:r>
+            <a:endParaRPr lang="en-US" sz="945" dirty="0"/>
+          </a:p>
+          <a:p>
+            <a:pPr algn="ctr" indent="0" marL="0">
+              <a:lnSpc>
+                <a:spcPct val="100000"/>
+              </a:lnSpc>
+              <a:buNone/>
+            </a:pPr>
+            <a:r>
+              <a:rPr lang="en-US" sz="990" b="1" dirty="0">
                 <a:solidFill>
                   <a:srgbClr val="0F6E4F"/>
                 </a:solidFill>
@@ -3394,26 +3518,26 @@
                 <a:ea typeface="Arial" pitchFamily="34" charset="-122"/>
                 <a:cs typeface="Arial" pitchFamily="34" charset="-120"/>
               </a:rPr>
-              <a:t>1 025 642 ₸</a:t>
-            </a:r>
-            <a:endParaRPr lang="en-US" sz="1050" dirty="0"/>
-          </a:p>
-        </p:txBody>
-      </p:sp>
-      <p:sp>
-        <p:nvSpPr>
-          <p:cNvPr id="21" name="Shape 19"/>
-          <p:cNvSpPr/>
-          <p:nvPr/>
-        </p:nvSpPr>
-        <p:spPr>
-          <a:xfrm>
-            <a:off x="457200" y="5737860"/>
-            <a:ext cx="3514344" cy="640080"/>
+              <a:t>614 931 ₸</a:t>
+            </a:r>
+            <a:endParaRPr lang="en-US" sz="945" dirty="0"/>
+          </a:p>
+        </p:txBody>
+      </p:sp>
+      <p:sp>
+        <p:nvSpPr>
+          <p:cNvPr id="25" name="Shape 23"/>
+          <p:cNvSpPr/>
+          <p:nvPr/>
+        </p:nvSpPr>
+        <p:spPr>
+          <a:xfrm>
+            <a:off x="2258568" y="4389120"/>
+            <a:ext cx="1691640" cy="932688"/>
           </a:xfrm>
           <a:prstGeom prst="roundRect">
             <a:avLst>
-              <a:gd name="adj" fmla="val 8571"/>
+              <a:gd name="adj" fmla="val 5882"/>
             </a:avLst>
           </a:prstGeom>
           <a:solidFill>
@@ -3436,14 +3560,14 @@
       </p:sp>
       <p:sp>
         <p:nvSpPr>
-          <p:cNvPr id="22" name="Text 20"/>
-          <p:cNvSpPr/>
-          <p:nvPr/>
-        </p:nvSpPr>
-        <p:spPr>
-          <a:xfrm>
-            <a:off x="530352" y="5783580"/>
-            <a:ext cx="3368040" cy="548640"/>
+          <p:cNvPr id="26" name="Text 24"/>
+          <p:cNvSpPr/>
+          <p:nvPr/>
+        </p:nvSpPr>
+        <p:spPr>
+          <a:xfrm>
+            <a:off x="2331720" y="4434840"/>
+            <a:ext cx="1545336" cy="841248"/>
           </a:xfrm>
           <a:prstGeom prst="rect">
             <a:avLst/>
@@ -3462,7 +3586,7 @@
               <a:buNone/>
             </a:pPr>
             <a:r>
-              <a:rPr lang="en-US" sz="1050" b="1" dirty="0">
+              <a:rPr lang="en-US" sz="945" b="1" dirty="0">
                 <a:solidFill>
                   <a:srgbClr val="1F2A37"/>
                 </a:solidFill>
@@ -3472,17 +3596,17 @@
               </a:rPr>
               <a:t>Promo · Аяулым</a:t>
             </a:r>
-            <a:endParaRPr lang="en-US" sz="1050" dirty="0"/>
-          </a:p>
-          <a:p>
-            <a:pPr algn="ctr" indent="0" marL="0">
-              <a:lnSpc>
-                <a:spcPct val="100000"/>
-              </a:lnSpc>
-              <a:buNone/>
-            </a:pPr>
-            <a:r>
-              <a:rPr lang="en-US" sz="800" i="1" dirty="0">
+            <a:endParaRPr lang="en-US" sz="945" dirty="0"/>
+          </a:p>
+          <a:p>
+            <a:pPr algn="ctr" indent="0" marL="0">
+              <a:lnSpc>
+                <a:spcPct val="100000"/>
+              </a:lnSpc>
+              <a:buNone/>
+            </a:pPr>
+            <a:r>
+              <a:rPr lang="en-US" sz="720" i="1" dirty="0">
                 <a:solidFill>
                   <a:srgbClr val="5B6B7C"/>
                 </a:solidFill>
@@ -3492,17 +3616,17 @@
               </a:rPr>
               <a:t>Иманбаева Аяулым Маратовна</a:t>
             </a:r>
-            <a:endParaRPr lang="en-US" sz="1050" dirty="0"/>
-          </a:p>
-          <a:p>
-            <a:pPr algn="ctr" indent="0" marL="0">
-              <a:lnSpc>
-                <a:spcPct val="100000"/>
-              </a:lnSpc>
-              <a:buNone/>
-            </a:pPr>
-            <a:r>
-              <a:rPr lang="en-US" sz="1100" b="1" dirty="0">
+            <a:endParaRPr lang="en-US" sz="945" dirty="0"/>
+          </a:p>
+          <a:p>
+            <a:pPr algn="ctr" indent="0" marL="0">
+              <a:lnSpc>
+                <a:spcPct val="100000"/>
+              </a:lnSpc>
+              <a:buNone/>
+            </a:pPr>
+            <a:r>
+              <a:rPr lang="en-US" sz="990" b="1" dirty="0">
                 <a:solidFill>
                   <a:srgbClr val="0F6E4F"/>
                 </a:solidFill>
@@ -3512,20 +3636,253 @@
               </a:rPr>
               <a:t>1 000 162 ₸</a:t>
             </a:r>
-            <a:endParaRPr lang="en-US" sz="1050" dirty="0"/>
-          </a:p>
-        </p:txBody>
-      </p:sp>
-      <p:sp>
-        <p:nvSpPr>
-          <p:cNvPr id="23" name="Shape 21"/>
-          <p:cNvSpPr/>
-          <p:nvPr/>
-        </p:nvSpPr>
-        <p:spPr>
-          <a:xfrm>
-            <a:off x="6094476" y="1792224"/>
-            <a:ext cx="0" cy="54864"/>
+            <a:endParaRPr lang="en-US" sz="945" dirty="0"/>
+          </a:p>
+        </p:txBody>
+      </p:sp>
+      <p:sp>
+        <p:nvSpPr>
+          <p:cNvPr id="27" name="Shape 25"/>
+          <p:cNvSpPr/>
+          <p:nvPr/>
+        </p:nvSpPr>
+        <p:spPr>
+          <a:xfrm>
+            <a:off x="5728716" y="2340864"/>
+            <a:ext cx="2468880" cy="676656"/>
+          </a:xfrm>
+          <a:prstGeom prst="roundRect">
+            <a:avLst>
+              <a:gd name="adj" fmla="val 8108"/>
+            </a:avLst>
+          </a:prstGeom>
+          <a:solidFill>
+            <a:srgbClr val="2E5C8A"/>
+          </a:solidFill>
+          <a:ln w="12700">
+            <a:solidFill>
+              <a:srgbClr val="2E5C8A"/>
+            </a:solidFill>
+            <a:prstDash val="solid"/>
+          </a:ln>
+          <a:effectLst>
+            <a:outerShdw sx="100000" sy="100000" kx="0" ky="0" algn="bl" rotWithShape="0" blurRad="50800" dist="25400" dir="5400000">
+              <a:srgbClr val="9AA7B4">
+                <a:alpha val="28000"/>
+              </a:srgbClr>
+            </a:outerShdw>
+          </a:effectLst>
+        </p:spPr>
+      </p:sp>
+      <p:sp>
+        <p:nvSpPr>
+          <p:cNvPr id="28" name="Text 26"/>
+          <p:cNvSpPr/>
+          <p:nvPr/>
+        </p:nvSpPr>
+        <p:spPr>
+          <a:xfrm>
+            <a:off x="5801868" y="2386584"/>
+            <a:ext cx="2322576" cy="585216"/>
+          </a:xfrm>
+          <a:prstGeom prst="rect">
+            <a:avLst/>
+          </a:prstGeom>
+          <a:noFill/>
+          <a:ln/>
+        </p:spPr>
+        <p:txBody>
+          <a:bodyPr wrap="square" lIns="0" tIns="0" rIns="0" bIns="0" rtlCol="0" anchor="ctr"/>
+          <a:lstStyle/>
+          <a:p>
+            <a:pPr algn="ctr" indent="0" marL="0">
+              <a:lnSpc>
+                <a:spcPct val="100000"/>
+              </a:lnSpc>
+              <a:buNone/>
+            </a:pPr>
+            <a:r>
+              <a:rPr lang="en-US" sz="1140" b="1" dirty="0">
+                <a:solidFill>
+                  <a:srgbClr val="FFFFFF"/>
+                </a:solidFill>
+                <a:latin typeface="Arial" pitchFamily="34" charset="0"/>
+                <a:ea typeface="Arial" pitchFamily="34" charset="-122"/>
+                <a:cs typeface="Arial" pitchFamily="34" charset="-120"/>
+              </a:rPr>
+              <a:t>Head of SMM · Мария</a:t>
+            </a:r>
+            <a:endParaRPr lang="en-US" sz="1140" dirty="0"/>
+          </a:p>
+          <a:p>
+            <a:pPr algn="ctr" indent="0" marL="0">
+              <a:lnSpc>
+                <a:spcPct val="100000"/>
+              </a:lnSpc>
+              <a:buNone/>
+            </a:pPr>
+            <a:r>
+              <a:rPr lang="en-US" sz="760" i="1" dirty="0">
+                <a:solidFill>
+                  <a:srgbClr val="DCE6F5"/>
+                </a:solidFill>
+                <a:latin typeface="Arial" pitchFamily="34" charset="0"/>
+                <a:ea typeface="Arial" pitchFamily="34" charset="-122"/>
+                <a:cs typeface="Arial" pitchFamily="34" charset="-120"/>
+              </a:rPr>
+              <a:t>Коренькова Мария Николаевна</a:t>
+            </a:r>
+            <a:endParaRPr lang="en-US" sz="1140" dirty="0"/>
+          </a:p>
+          <a:p>
+            <a:pPr algn="ctr" indent="0" marL="0">
+              <a:lnSpc>
+                <a:spcPct val="100000"/>
+              </a:lnSpc>
+              <a:buNone/>
+            </a:pPr>
+            <a:r>
+              <a:rPr lang="en-US" sz="1140" b="1" dirty="0">
+                <a:solidFill>
+                  <a:srgbClr val="FFFFFF"/>
+                </a:solidFill>
+                <a:latin typeface="Arial" pitchFamily="34" charset="0"/>
+                <a:ea typeface="Arial" pitchFamily="34" charset="-122"/>
+                <a:cs typeface="Arial" pitchFamily="34" charset="-120"/>
+              </a:rPr>
+              <a:t>1 625 032 ₸</a:t>
+            </a:r>
+            <a:endParaRPr lang="en-US" sz="1140" dirty="0"/>
+          </a:p>
+        </p:txBody>
+      </p:sp>
+      <p:sp>
+        <p:nvSpPr>
+          <p:cNvPr id="29" name="Text 27"/>
+          <p:cNvSpPr/>
+          <p:nvPr/>
+        </p:nvSpPr>
+        <p:spPr>
+          <a:xfrm>
+            <a:off x="4315968" y="3090672"/>
+            <a:ext cx="1691640" cy="201168"/>
+          </a:xfrm>
+          <a:prstGeom prst="rect">
+            <a:avLst/>
+          </a:prstGeom>
+          <a:noFill/>
+          <a:ln/>
+        </p:spPr>
+        <p:txBody>
+          <a:bodyPr wrap="square" lIns="0" tIns="0" rIns="0" bIns="0" rtlCol="0" anchor="ctr"/>
+          <a:lstStyle/>
+          <a:p>
+            <a:pPr algn="ctr" indent="0" marL="0">
+              <a:buNone/>
+            </a:pPr>
+            <a:r>
+              <a:rPr lang="en-US" sz="900" b="1" dirty="0">
+                <a:solidFill>
+                  <a:srgbClr val="5B6B7C"/>
+                </a:solidFill>
+                <a:latin typeface="Arial" pitchFamily="34" charset="0"/>
+                <a:ea typeface="Arial" pitchFamily="34" charset="-122"/>
+                <a:cs typeface="Arial" pitchFamily="34" charset="-120"/>
+              </a:rPr>
+              <a:t>Originals</a:t>
+            </a:r>
+            <a:endParaRPr lang="en-US" sz="900" dirty="0"/>
+          </a:p>
+        </p:txBody>
+      </p:sp>
+      <p:sp>
+        <p:nvSpPr>
+          <p:cNvPr id="30" name="Text 28"/>
+          <p:cNvSpPr/>
+          <p:nvPr/>
+        </p:nvSpPr>
+        <p:spPr>
+          <a:xfrm>
+            <a:off x="6117336" y="3090672"/>
+            <a:ext cx="1691640" cy="201168"/>
+          </a:xfrm>
+          <a:prstGeom prst="rect">
+            <a:avLst/>
+          </a:prstGeom>
+          <a:noFill/>
+          <a:ln/>
+        </p:spPr>
+        <p:txBody>
+          <a:bodyPr wrap="square" lIns="0" tIns="0" rIns="0" bIns="0" rtlCol="0" anchor="ctr"/>
+          <a:lstStyle/>
+          <a:p>
+            <a:pPr algn="ctr" indent="0" marL="0">
+              <a:buNone/>
+            </a:pPr>
+            <a:r>
+              <a:rPr lang="en-US" sz="900" b="1" dirty="0">
+                <a:solidFill>
+                  <a:srgbClr val="5B6B7C"/>
+                </a:solidFill>
+                <a:latin typeface="Arial" pitchFamily="34" charset="0"/>
+                <a:ea typeface="Arial" pitchFamily="34" charset="-122"/>
+                <a:cs typeface="Arial" pitchFamily="34" charset="-120"/>
+              </a:rPr>
+              <a:t>Gen</a:t>
+            </a:r>
+            <a:endParaRPr lang="en-US" sz="900" dirty="0"/>
+          </a:p>
+        </p:txBody>
+      </p:sp>
+      <p:sp>
+        <p:nvSpPr>
+          <p:cNvPr id="31" name="Text 29"/>
+          <p:cNvSpPr/>
+          <p:nvPr/>
+        </p:nvSpPr>
+        <p:spPr>
+          <a:xfrm>
+            <a:off x="7918704" y="3090672"/>
+            <a:ext cx="1691640" cy="201168"/>
+          </a:xfrm>
+          <a:prstGeom prst="rect">
+            <a:avLst/>
+          </a:prstGeom>
+          <a:noFill/>
+          <a:ln/>
+        </p:spPr>
+        <p:txBody>
+          <a:bodyPr wrap="square" lIns="0" tIns="0" rIns="0" bIns="0" rtlCol="0" anchor="ctr"/>
+          <a:lstStyle/>
+          <a:p>
+            <a:pPr algn="ctr" indent="0" marL="0">
+              <a:buNone/>
+            </a:pPr>
+            <a:r>
+              <a:rPr lang="en-US" sz="900" b="1" dirty="0">
+                <a:solidFill>
+                  <a:srgbClr val="5B6B7C"/>
+                </a:solidFill>
+                <a:latin typeface="Arial" pitchFamily="34" charset="0"/>
+                <a:ea typeface="Arial" pitchFamily="34" charset="-122"/>
+                <a:cs typeface="Arial" pitchFamily="34" charset="-120"/>
+              </a:rPr>
+              <a:t>Sport</a:t>
+            </a:r>
+            <a:endParaRPr lang="en-US" sz="900" dirty="0"/>
+          </a:p>
+        </p:txBody>
+      </p:sp>
+      <p:sp>
+        <p:nvSpPr>
+          <p:cNvPr id="32" name="Shape 30"/>
+          <p:cNvSpPr/>
+          <p:nvPr/>
+        </p:nvSpPr>
+        <p:spPr>
+          <a:xfrm>
+            <a:off x="6963156" y="3017520"/>
+            <a:ext cx="0" cy="128016"/>
           </a:xfrm>
           <a:prstGeom prst="line">
             <a:avLst/>
@@ -3541,57 +3898,110 @@
       </p:sp>
       <p:sp>
         <p:nvSpPr>
-          <p:cNvPr id="24" name="Text 22"/>
-          <p:cNvSpPr/>
-          <p:nvPr/>
-        </p:nvSpPr>
-        <p:spPr>
-          <a:xfrm>
-            <a:off x="4337304" y="1847088"/>
-            <a:ext cx="3514344" cy="292608"/>
-          </a:xfrm>
-          <a:prstGeom prst="rect">
-            <a:avLst/>
-          </a:prstGeom>
-          <a:noFill/>
-          <a:ln/>
-        </p:spPr>
-        <p:txBody>
-          <a:bodyPr wrap="square" lIns="0" tIns="0" rIns="0" bIns="0" rtlCol="0" anchor="ctr"/>
-          <a:lstStyle/>
-          <a:p>
-            <a:pPr algn="ctr" indent="0" marL="0">
-              <a:buNone/>
-            </a:pPr>
-            <a:r>
-              <a:rPr lang="en-US" sz="1200" b="1" dirty="0">
-                <a:solidFill>
-                  <a:srgbClr val="2E5C8A"/>
-                </a:solidFill>
-                <a:latin typeface="Arial" pitchFamily="34" charset="0"/>
-                <a:ea typeface="Arial" pitchFamily="34" charset="-122"/>
-                <a:cs typeface="Arial" pitchFamily="34" charset="-120"/>
-              </a:rPr>
-              <a:t>SMM  (gen · original · sport)</a:t>
-            </a:r>
-            <a:endParaRPr lang="en-US" sz="1200" dirty="0"/>
-          </a:p>
-        </p:txBody>
-      </p:sp>
-      <p:sp>
-        <p:nvSpPr>
-          <p:cNvPr id="25" name="Shape 23"/>
-          <p:cNvSpPr/>
-          <p:nvPr/>
-        </p:nvSpPr>
-        <p:spPr>
-          <a:xfrm>
-            <a:off x="4337304" y="2194560"/>
-            <a:ext cx="3514344" cy="640080"/>
+          <p:cNvPr id="33" name="Shape 31"/>
+          <p:cNvSpPr/>
+          <p:nvPr/>
+        </p:nvSpPr>
+        <p:spPr>
+          <a:xfrm>
+            <a:off x="5161788" y="3145536"/>
+            <a:ext cx="3602736" cy="0"/>
+          </a:xfrm>
+          <a:prstGeom prst="line">
+            <a:avLst/>
+          </a:prstGeom>
+          <a:noFill/>
+          <a:ln w="12700">
+            <a:solidFill>
+              <a:srgbClr val="C7D8EE"/>
+            </a:solidFill>
+            <a:prstDash val="solid"/>
+          </a:ln>
+        </p:spPr>
+      </p:sp>
+      <p:sp>
+        <p:nvSpPr>
+          <p:cNvPr id="34" name="Shape 32"/>
+          <p:cNvSpPr/>
+          <p:nvPr/>
+        </p:nvSpPr>
+        <p:spPr>
+          <a:xfrm>
+            <a:off x="5161788" y="3145536"/>
+            <a:ext cx="0" cy="182880"/>
+          </a:xfrm>
+          <a:prstGeom prst="line">
+            <a:avLst/>
+          </a:prstGeom>
+          <a:noFill/>
+          <a:ln w="12700">
+            <a:solidFill>
+              <a:srgbClr val="C7D8EE"/>
+            </a:solidFill>
+            <a:prstDash val="solid"/>
+          </a:ln>
+        </p:spPr>
+      </p:sp>
+      <p:sp>
+        <p:nvSpPr>
+          <p:cNvPr id="35" name="Shape 33"/>
+          <p:cNvSpPr/>
+          <p:nvPr/>
+        </p:nvSpPr>
+        <p:spPr>
+          <a:xfrm>
+            <a:off x="6963156" y="3145536"/>
+            <a:ext cx="0" cy="182880"/>
+          </a:xfrm>
+          <a:prstGeom prst="line">
+            <a:avLst/>
+          </a:prstGeom>
+          <a:noFill/>
+          <a:ln w="12700">
+            <a:solidFill>
+              <a:srgbClr val="C7D8EE"/>
+            </a:solidFill>
+            <a:prstDash val="solid"/>
+          </a:ln>
+        </p:spPr>
+      </p:sp>
+      <p:sp>
+        <p:nvSpPr>
+          <p:cNvPr id="36" name="Shape 34"/>
+          <p:cNvSpPr/>
+          <p:nvPr/>
+        </p:nvSpPr>
+        <p:spPr>
+          <a:xfrm>
+            <a:off x="8764524" y="3145536"/>
+            <a:ext cx="0" cy="182880"/>
+          </a:xfrm>
+          <a:prstGeom prst="line">
+            <a:avLst/>
+          </a:prstGeom>
+          <a:noFill/>
+          <a:ln w="12700">
+            <a:solidFill>
+              <a:srgbClr val="C7D8EE"/>
+            </a:solidFill>
+            <a:prstDash val="solid"/>
+          </a:ln>
+        </p:spPr>
+      </p:sp>
+      <p:sp>
+        <p:nvSpPr>
+          <p:cNvPr id="37" name="Shape 35"/>
+          <p:cNvSpPr/>
+          <p:nvPr/>
+        </p:nvSpPr>
+        <p:spPr>
+          <a:xfrm>
+            <a:off x="4315968" y="3328416"/>
+            <a:ext cx="1691640" cy="859536"/>
           </a:xfrm>
           <a:prstGeom prst="roundRect">
             <a:avLst>
-              <a:gd name="adj" fmla="val 8571"/>
+              <a:gd name="adj" fmla="val 6383"/>
             </a:avLst>
           </a:prstGeom>
           <a:solidFill>
@@ -3614,14 +4024,14 @@
       </p:sp>
       <p:sp>
         <p:nvSpPr>
-          <p:cNvPr id="26" name="Text 24"/>
-          <p:cNvSpPr/>
-          <p:nvPr/>
-        </p:nvSpPr>
-        <p:spPr>
-          <a:xfrm>
-            <a:off x="4410456" y="2240280"/>
-            <a:ext cx="3368040" cy="548640"/>
+          <p:cNvPr id="38" name="Text 36"/>
+          <p:cNvSpPr/>
+          <p:nvPr/>
+        </p:nvSpPr>
+        <p:spPr>
+          <a:xfrm>
+            <a:off x="4389120" y="3374136"/>
+            <a:ext cx="1545336" cy="768096"/>
           </a:xfrm>
           <a:prstGeom prst="rect">
             <a:avLst/>
@@ -3640,7 +4050,7 @@
               <a:buNone/>
             </a:pPr>
             <a:r>
-              <a:rPr lang="en-US" sz="1050" b="1" dirty="0">
+              <a:rPr lang="en-US" sz="945" b="1" dirty="0">
                 <a:solidFill>
                   <a:srgbClr val="1F2A37"/>
                 </a:solidFill>
@@ -3648,19 +4058,19 @@
                 <a:ea typeface="Arial" pitchFamily="34" charset="-122"/>
                 <a:cs typeface="Arial" pitchFamily="34" charset="-120"/>
               </a:rPr>
-              <a:t>Head of SMM · Мария</a:t>
-            </a:r>
-            <a:endParaRPr lang="en-US" sz="1050" dirty="0"/>
-          </a:p>
-          <a:p>
-            <a:pPr algn="ctr" indent="0" marL="0">
-              <a:lnSpc>
-                <a:spcPct val="100000"/>
-              </a:lnSpc>
-              <a:buNone/>
-            </a:pPr>
-            <a:r>
-              <a:rPr lang="en-US" sz="800" i="1" dirty="0">
+              <a:t>SMM Original</a:t>
+            </a:r>
+            <a:endParaRPr lang="en-US" sz="945" dirty="0"/>
+          </a:p>
+          <a:p>
+            <a:pPr algn="ctr" indent="0" marL="0">
+              <a:lnSpc>
+                <a:spcPct val="100000"/>
+              </a:lnSpc>
+              <a:buNone/>
+            </a:pPr>
+            <a:r>
+              <a:rPr lang="en-US" sz="720" i="1" dirty="0">
                 <a:solidFill>
                   <a:srgbClr val="5B6B7C"/>
                 </a:solidFill>
@@ -3668,46 +4078,46 @@
                 <a:ea typeface="Arial" pitchFamily="34" charset="-122"/>
                 <a:cs typeface="Arial" pitchFamily="34" charset="-120"/>
               </a:rPr>
-              <a:t>Коренькова Мария Николаевна</a:t>
-            </a:r>
-            <a:endParaRPr lang="en-US" sz="1050" dirty="0"/>
-          </a:p>
-          <a:p>
-            <a:pPr algn="ctr" indent="0" marL="0">
-              <a:lnSpc>
-                <a:spcPct val="100000"/>
-              </a:lnSpc>
-              <a:buNone/>
-            </a:pPr>
-            <a:r>
-              <a:rPr lang="en-US" sz="1100" b="1" dirty="0">
-                <a:solidFill>
-                  <a:srgbClr val="0F6E4F"/>
-                </a:solidFill>
-                <a:latin typeface="Arial" pitchFamily="34" charset="0"/>
-                <a:ea typeface="Arial" pitchFamily="34" charset="-122"/>
-                <a:cs typeface="Arial" pitchFamily="34" charset="-120"/>
-              </a:rPr>
-              <a:t>1 625 032 ₸</a:t>
-            </a:r>
-            <a:endParaRPr lang="en-US" sz="1050" dirty="0"/>
-          </a:p>
-        </p:txBody>
-      </p:sp>
-      <p:sp>
-        <p:nvSpPr>
-          <p:cNvPr id="27" name="Shape 25"/>
-          <p:cNvSpPr/>
-          <p:nvPr/>
-        </p:nvSpPr>
-        <p:spPr>
-          <a:xfrm>
-            <a:off x="4337304" y="2903220"/>
-            <a:ext cx="3514344" cy="640080"/>
+              <a:t>SMM менеджер · имя н/д</a:t>
+            </a:r>
+            <a:endParaRPr lang="en-US" sz="945" dirty="0"/>
+          </a:p>
+          <a:p>
+            <a:pPr algn="ctr" indent="0" marL="0">
+              <a:lnSpc>
+                <a:spcPct val="100000"/>
+              </a:lnSpc>
+              <a:buNone/>
+            </a:pPr>
+            <a:r>
+              <a:rPr lang="en-US" sz="990" b="1" dirty="0">
+                <a:solidFill>
+                  <a:srgbClr val="B45309"/>
+                </a:solidFill>
+                <a:latin typeface="Arial" pitchFamily="34" charset="0"/>
+                <a:ea typeface="Arial" pitchFamily="34" charset="-122"/>
+                <a:cs typeface="Arial" pitchFamily="34" charset="-120"/>
+              </a:rPr>
+              <a:t>867 456 ₸  *</a:t>
+            </a:r>
+            <a:endParaRPr lang="en-US" sz="945" dirty="0"/>
+          </a:p>
+        </p:txBody>
+      </p:sp>
+      <p:sp>
+        <p:nvSpPr>
+          <p:cNvPr id="39" name="Shape 37"/>
+          <p:cNvSpPr/>
+          <p:nvPr/>
+        </p:nvSpPr>
+        <p:spPr>
+          <a:xfrm>
+            <a:off x="4315968" y="4279392"/>
+            <a:ext cx="1691640" cy="859536"/>
           </a:xfrm>
           <a:prstGeom prst="roundRect">
             <a:avLst>
-              <a:gd name="adj" fmla="val 8571"/>
+              <a:gd name="adj" fmla="val 6383"/>
             </a:avLst>
           </a:prstGeom>
           <a:solidFill>
@@ -3730,14 +4140,14 @@
       </p:sp>
       <p:sp>
         <p:nvSpPr>
-          <p:cNvPr id="28" name="Text 26"/>
-          <p:cNvSpPr/>
-          <p:nvPr/>
-        </p:nvSpPr>
-        <p:spPr>
-          <a:xfrm>
-            <a:off x="4410456" y="2948940"/>
-            <a:ext cx="3368040" cy="548640"/>
+          <p:cNvPr id="40" name="Text 38"/>
+          <p:cNvSpPr/>
+          <p:nvPr/>
+        </p:nvSpPr>
+        <p:spPr>
+          <a:xfrm>
+            <a:off x="4389120" y="4325112"/>
+            <a:ext cx="1545336" cy="768096"/>
           </a:xfrm>
           <a:prstGeom prst="rect">
             <a:avLst/>
@@ -3756,7 +4166,7 @@
               <a:buNone/>
             </a:pPr>
             <a:r>
-              <a:rPr lang="en-US" sz="1050" b="1" dirty="0">
+              <a:rPr lang="en-US" sz="945" b="1" dirty="0">
                 <a:solidFill>
                   <a:srgbClr val="1F2A37"/>
                 </a:solidFill>
@@ -3766,17 +4176,17 @@
               </a:rPr>
               <a:t>SMM Original</a:t>
             </a:r>
-            <a:endParaRPr lang="en-US" sz="1050" dirty="0"/>
-          </a:p>
-          <a:p>
-            <a:pPr algn="ctr" indent="0" marL="0">
-              <a:lnSpc>
-                <a:spcPct val="100000"/>
-              </a:lnSpc>
-              <a:buNone/>
-            </a:pPr>
-            <a:r>
-              <a:rPr lang="en-US" sz="800" i="1" dirty="0">
+            <a:endParaRPr lang="en-US" sz="945" dirty="0"/>
+          </a:p>
+          <a:p>
+            <a:pPr algn="ctr" indent="0" marL="0">
+              <a:lnSpc>
+                <a:spcPct val="100000"/>
+              </a:lnSpc>
+              <a:buNone/>
+            </a:pPr>
+            <a:r>
+              <a:rPr lang="en-US" sz="720" i="1" dirty="0">
                 <a:solidFill>
                   <a:srgbClr val="5B6B7C"/>
                 </a:solidFill>
@@ -3786,17 +4196,17 @@
               </a:rPr>
               <a:t>SMM менеджер · имя н/д</a:t>
             </a:r>
-            <a:endParaRPr lang="en-US" sz="1050" dirty="0"/>
-          </a:p>
-          <a:p>
-            <a:pPr algn="ctr" indent="0" marL="0">
-              <a:lnSpc>
-                <a:spcPct val="100000"/>
-              </a:lnSpc>
-              <a:buNone/>
-            </a:pPr>
-            <a:r>
-              <a:rPr lang="en-US" sz="1100" b="1" dirty="0">
+            <a:endParaRPr lang="en-US" sz="945" dirty="0"/>
+          </a:p>
+          <a:p>
+            <a:pPr algn="ctr" indent="0" marL="0">
+              <a:lnSpc>
+                <a:spcPct val="100000"/>
+              </a:lnSpc>
+              <a:buNone/>
+            </a:pPr>
+            <a:r>
+              <a:rPr lang="en-US" sz="990" b="1" dirty="0">
                 <a:solidFill>
                   <a:srgbClr val="B45309"/>
                 </a:solidFill>
@@ -3806,24 +4216,24 @@
               </a:rPr>
               <a:t>867 456 ₸  *</a:t>
             </a:r>
-            <a:endParaRPr lang="en-US" sz="1050" dirty="0"/>
-          </a:p>
-        </p:txBody>
-      </p:sp>
-      <p:sp>
-        <p:nvSpPr>
-          <p:cNvPr id="29" name="Shape 27"/>
-          <p:cNvSpPr/>
-          <p:nvPr/>
-        </p:nvSpPr>
-        <p:spPr>
-          <a:xfrm>
-            <a:off x="4337304" y="3611880"/>
-            <a:ext cx="3514344" cy="640080"/>
+            <a:endParaRPr lang="en-US" sz="945" dirty="0"/>
+          </a:p>
+        </p:txBody>
+      </p:sp>
+      <p:sp>
+        <p:nvSpPr>
+          <p:cNvPr id="41" name="Shape 39"/>
+          <p:cNvSpPr/>
+          <p:nvPr/>
+        </p:nvSpPr>
+        <p:spPr>
+          <a:xfrm>
+            <a:off x="6117336" y="3328416"/>
+            <a:ext cx="1691640" cy="859536"/>
           </a:xfrm>
           <a:prstGeom prst="roundRect">
             <a:avLst>
-              <a:gd name="adj" fmla="val 8571"/>
+              <a:gd name="adj" fmla="val 6383"/>
             </a:avLst>
           </a:prstGeom>
           <a:solidFill>
@@ -3846,14 +4256,14 @@
       </p:sp>
       <p:sp>
         <p:nvSpPr>
-          <p:cNvPr id="30" name="Text 28"/>
-          <p:cNvSpPr/>
-          <p:nvPr/>
-        </p:nvSpPr>
-        <p:spPr>
-          <a:xfrm>
-            <a:off x="4410456" y="3657600"/>
-            <a:ext cx="3368040" cy="548640"/>
+          <p:cNvPr id="42" name="Text 40"/>
+          <p:cNvSpPr/>
+          <p:nvPr/>
+        </p:nvSpPr>
+        <p:spPr>
+          <a:xfrm>
+            <a:off x="6190488" y="3374136"/>
+            <a:ext cx="1545336" cy="768096"/>
           </a:xfrm>
           <a:prstGeom prst="rect">
             <a:avLst/>
@@ -3872,7 +4282,7 @@
               <a:buNone/>
             </a:pPr>
             <a:r>
-              <a:rPr lang="en-US" sz="1050" b="1" dirty="0">
+              <a:rPr lang="en-US" sz="945" b="1" dirty="0">
                 <a:solidFill>
                   <a:srgbClr val="1F2A37"/>
                 </a:solidFill>
@@ -3882,17 +4292,17 @@
               </a:rPr>
               <a:t>SMM Gen</a:t>
             </a:r>
-            <a:endParaRPr lang="en-US" sz="1050" dirty="0"/>
-          </a:p>
-          <a:p>
-            <a:pPr algn="ctr" indent="0" marL="0">
-              <a:lnSpc>
-                <a:spcPct val="100000"/>
-              </a:lnSpc>
-              <a:buNone/>
-            </a:pPr>
-            <a:r>
-              <a:rPr lang="en-US" sz="800" i="1" dirty="0">
+            <a:endParaRPr lang="en-US" sz="945" dirty="0"/>
+          </a:p>
+          <a:p>
+            <a:pPr algn="ctr" indent="0" marL="0">
+              <a:lnSpc>
+                <a:spcPct val="100000"/>
+              </a:lnSpc>
+              <a:buNone/>
+            </a:pPr>
+            <a:r>
+              <a:rPr lang="en-US" sz="720" i="1" dirty="0">
                 <a:solidFill>
                   <a:srgbClr val="5B6B7C"/>
                 </a:solidFill>
@@ -3902,17 +4312,17 @@
               </a:rPr>
               <a:t>SMM менеджер · имя н/д</a:t>
             </a:r>
-            <a:endParaRPr lang="en-US" sz="1050" dirty="0"/>
-          </a:p>
-          <a:p>
-            <a:pPr algn="ctr" indent="0" marL="0">
-              <a:lnSpc>
-                <a:spcPct val="100000"/>
-              </a:lnSpc>
-              <a:buNone/>
-            </a:pPr>
-            <a:r>
-              <a:rPr lang="en-US" sz="1100" b="1" dirty="0">
+            <a:endParaRPr lang="en-US" sz="945" dirty="0"/>
+          </a:p>
+          <a:p>
+            <a:pPr algn="ctr" indent="0" marL="0">
+              <a:lnSpc>
+                <a:spcPct val="100000"/>
+              </a:lnSpc>
+              <a:buNone/>
+            </a:pPr>
+            <a:r>
+              <a:rPr lang="en-US" sz="990" b="1" dirty="0">
                 <a:solidFill>
                   <a:srgbClr val="B45309"/>
                 </a:solidFill>
@@ -3922,24 +4332,24 @@
               </a:rPr>
               <a:t>867 456 ₸  *</a:t>
             </a:r>
-            <a:endParaRPr lang="en-US" sz="1050" dirty="0"/>
-          </a:p>
-        </p:txBody>
-      </p:sp>
-      <p:sp>
-        <p:nvSpPr>
-          <p:cNvPr id="31" name="Shape 29"/>
-          <p:cNvSpPr/>
-          <p:nvPr/>
-        </p:nvSpPr>
-        <p:spPr>
-          <a:xfrm>
-            <a:off x="4337304" y="4320540"/>
-            <a:ext cx="3514344" cy="640080"/>
+            <a:endParaRPr lang="en-US" sz="945" dirty="0"/>
+          </a:p>
+        </p:txBody>
+      </p:sp>
+      <p:sp>
+        <p:nvSpPr>
+          <p:cNvPr id="43" name="Shape 41"/>
+          <p:cNvSpPr/>
+          <p:nvPr/>
+        </p:nvSpPr>
+        <p:spPr>
+          <a:xfrm>
+            <a:off x="7918704" y="3328416"/>
+            <a:ext cx="1691640" cy="859536"/>
           </a:xfrm>
           <a:prstGeom prst="roundRect">
             <a:avLst>
-              <a:gd name="adj" fmla="val 8571"/>
+              <a:gd name="adj" fmla="val 6383"/>
             </a:avLst>
           </a:prstGeom>
           <a:solidFill>
@@ -3962,14 +4372,14 @@
       </p:sp>
       <p:sp>
         <p:nvSpPr>
-          <p:cNvPr id="32" name="Text 30"/>
-          <p:cNvSpPr/>
-          <p:nvPr/>
-        </p:nvSpPr>
-        <p:spPr>
-          <a:xfrm>
-            <a:off x="4410456" y="4366260"/>
-            <a:ext cx="3368040" cy="548640"/>
+          <p:cNvPr id="44" name="Text 42"/>
+          <p:cNvSpPr/>
+          <p:nvPr/>
+        </p:nvSpPr>
+        <p:spPr>
+          <a:xfrm>
+            <a:off x="7991856" y="3374136"/>
+            <a:ext cx="1545336" cy="768096"/>
           </a:xfrm>
           <a:prstGeom prst="rect">
             <a:avLst/>
@@ -3988,7 +4398,7 @@
               <a:buNone/>
             </a:pPr>
             <a:r>
-              <a:rPr lang="en-US" sz="1050" b="1" dirty="0">
+              <a:rPr lang="en-US" sz="945" b="1" dirty="0">
                 <a:solidFill>
                   <a:srgbClr val="1F2A37"/>
                 </a:solidFill>
@@ -3998,17 +4408,17 @@
               </a:rPr>
               <a:t>SMM Sport</a:t>
             </a:r>
-            <a:endParaRPr lang="en-US" sz="1050" dirty="0"/>
-          </a:p>
-          <a:p>
-            <a:pPr algn="ctr" indent="0" marL="0">
-              <a:lnSpc>
-                <a:spcPct val="100000"/>
-              </a:lnSpc>
-              <a:buNone/>
-            </a:pPr>
-            <a:r>
-              <a:rPr lang="en-US" sz="800" i="1" dirty="0">
+            <a:endParaRPr lang="en-US" sz="945" dirty="0"/>
+          </a:p>
+          <a:p>
+            <a:pPr algn="ctr" indent="0" marL="0">
+              <a:lnSpc>
+                <a:spcPct val="100000"/>
+              </a:lnSpc>
+              <a:buNone/>
+            </a:pPr>
+            <a:r>
+              <a:rPr lang="en-US" sz="720" i="1" dirty="0">
                 <a:solidFill>
                   <a:srgbClr val="5B6B7C"/>
                 </a:solidFill>
@@ -4018,17 +4428,17 @@
               </a:rPr>
               <a:t>SMM менеджер · имя н/д</a:t>
             </a:r>
-            <a:endParaRPr lang="en-US" sz="1050" dirty="0"/>
-          </a:p>
-          <a:p>
-            <a:pPr algn="ctr" indent="0" marL="0">
-              <a:lnSpc>
-                <a:spcPct val="100000"/>
-              </a:lnSpc>
-              <a:buNone/>
-            </a:pPr>
-            <a:r>
-              <a:rPr lang="en-US" sz="1100" b="1" dirty="0">
+            <a:endParaRPr lang="en-US" sz="945" dirty="0"/>
+          </a:p>
+          <a:p>
+            <a:pPr algn="ctr" indent="0" marL="0">
+              <a:lnSpc>
+                <a:spcPct val="100000"/>
+              </a:lnSpc>
+              <a:buNone/>
+            </a:pPr>
+            <a:r>
+              <a:rPr lang="en-US" sz="990" b="1" dirty="0">
                 <a:solidFill>
                   <a:srgbClr val="B45309"/>
                 </a:solidFill>
@@ -4038,24 +4448,24 @@
               </a:rPr>
               <a:t>867 456 ₸  *</a:t>
             </a:r>
-            <a:endParaRPr lang="en-US" sz="1050" dirty="0"/>
-          </a:p>
-        </p:txBody>
-      </p:sp>
-      <p:sp>
-        <p:nvSpPr>
-          <p:cNvPr id="33" name="Shape 31"/>
-          <p:cNvSpPr/>
-          <p:nvPr/>
-        </p:nvSpPr>
-        <p:spPr>
-          <a:xfrm>
-            <a:off x="4337304" y="5029200"/>
-            <a:ext cx="3514344" cy="640080"/>
+            <a:endParaRPr lang="en-US" sz="945" dirty="0"/>
+          </a:p>
+        </p:txBody>
+      </p:sp>
+      <p:sp>
+        <p:nvSpPr>
+          <p:cNvPr id="45" name="Shape 43"/>
+          <p:cNvSpPr/>
+          <p:nvPr/>
+        </p:nvSpPr>
+        <p:spPr>
+          <a:xfrm>
+            <a:off x="7918704" y="4279392"/>
+            <a:ext cx="1691640" cy="859536"/>
           </a:xfrm>
           <a:prstGeom prst="roundRect">
             <a:avLst>
-              <a:gd name="adj" fmla="val 8571"/>
+              <a:gd name="adj" fmla="val 6383"/>
             </a:avLst>
           </a:prstGeom>
           <a:solidFill>
@@ -4078,14 +4488,14 @@
       </p:sp>
       <p:sp>
         <p:nvSpPr>
-          <p:cNvPr id="34" name="Text 32"/>
-          <p:cNvSpPr/>
-          <p:nvPr/>
-        </p:nvSpPr>
-        <p:spPr>
-          <a:xfrm>
-            <a:off x="4410456" y="5074920"/>
-            <a:ext cx="3368040" cy="548640"/>
+          <p:cNvPr id="46" name="Text 44"/>
+          <p:cNvSpPr/>
+          <p:nvPr/>
+        </p:nvSpPr>
+        <p:spPr>
+          <a:xfrm>
+            <a:off x="7991856" y="4325112"/>
+            <a:ext cx="1545336" cy="768096"/>
           </a:xfrm>
           <a:prstGeom prst="rect">
             <a:avLst/>
@@ -4104,7 +4514,7 @@
               <a:buNone/>
             </a:pPr>
             <a:r>
-              <a:rPr lang="en-US" sz="1050" b="1" dirty="0">
+              <a:rPr lang="en-US" sz="945" b="1" dirty="0">
                 <a:solidFill>
                   <a:srgbClr val="1F2A37"/>
                 </a:solidFill>
@@ -4112,19 +4522,19 @@
                 <a:ea typeface="Arial" pitchFamily="34" charset="-122"/>
                 <a:cs typeface="Arial" pitchFamily="34" charset="-120"/>
               </a:rPr>
-              <a:t>SMM Original</a:t>
-            </a:r>
-            <a:endParaRPr lang="en-US" sz="1050" dirty="0"/>
-          </a:p>
-          <a:p>
-            <a:pPr algn="ctr" indent="0" marL="0">
-              <a:lnSpc>
-                <a:spcPct val="100000"/>
-              </a:lnSpc>
-              <a:buNone/>
-            </a:pPr>
-            <a:r>
-              <a:rPr lang="en-US" sz="800" i="1" dirty="0">
+              <a:t>Telegram редактор Sport</a:t>
+            </a:r>
+            <a:endParaRPr lang="en-US" sz="945" dirty="0"/>
+          </a:p>
+          <a:p>
+            <a:pPr algn="ctr" indent="0" marL="0">
+              <a:lnSpc>
+                <a:spcPct val="100000"/>
+              </a:lnSpc>
+              <a:buNone/>
+            </a:pPr>
+            <a:r>
+              <a:rPr lang="en-US" sz="720" i="1" dirty="0">
                 <a:solidFill>
                   <a:srgbClr val="5B6B7C"/>
                 </a:solidFill>
@@ -4132,46 +4542,46 @@
                 <a:ea typeface="Arial" pitchFamily="34" charset="-122"/>
                 <a:cs typeface="Arial" pitchFamily="34" charset="-120"/>
               </a:rPr>
-              <a:t>SMM менеджер · имя н/д</a:t>
-            </a:r>
-            <a:endParaRPr lang="en-US" sz="1050" dirty="0"/>
-          </a:p>
-          <a:p>
-            <a:pPr algn="ctr" indent="0" marL="0">
-              <a:lnSpc>
-                <a:spcPct val="100000"/>
-              </a:lnSpc>
-              <a:buNone/>
-            </a:pPr>
-            <a:r>
-              <a:rPr lang="en-US" sz="1100" b="1" dirty="0">
-                <a:solidFill>
-                  <a:srgbClr val="B45309"/>
-                </a:solidFill>
-                <a:latin typeface="Arial" pitchFamily="34" charset="0"/>
-                <a:ea typeface="Arial" pitchFamily="34" charset="-122"/>
-                <a:cs typeface="Arial" pitchFamily="34" charset="-120"/>
-              </a:rPr>
-              <a:t>867 456 ₸  *</a:t>
-            </a:r>
-            <a:endParaRPr lang="en-US" sz="1050" dirty="0"/>
-          </a:p>
-        </p:txBody>
-      </p:sp>
-      <p:sp>
-        <p:nvSpPr>
-          <p:cNvPr id="35" name="Shape 33"/>
-          <p:cNvSpPr/>
-          <p:nvPr/>
-        </p:nvSpPr>
-        <p:spPr>
-          <a:xfrm>
-            <a:off x="4337304" y="5737860"/>
-            <a:ext cx="3514344" cy="640080"/>
+              <a:t>Куричев Иван Николаевич</a:t>
+            </a:r>
+            <a:endParaRPr lang="en-US" sz="945" dirty="0"/>
+          </a:p>
+          <a:p>
+            <a:pPr algn="ctr" indent="0" marL="0">
+              <a:lnSpc>
+                <a:spcPct val="100000"/>
+              </a:lnSpc>
+              <a:buNone/>
+            </a:pPr>
+            <a:r>
+              <a:rPr lang="en-US" sz="990" b="1" dirty="0">
+                <a:solidFill>
+                  <a:srgbClr val="0F6E4F"/>
+                </a:solidFill>
+                <a:latin typeface="Arial" pitchFamily="34" charset="0"/>
+                <a:ea typeface="Arial" pitchFamily="34" charset="-122"/>
+                <a:cs typeface="Arial" pitchFamily="34" charset="-120"/>
+              </a:rPr>
+              <a:t>513 920 ₸</a:t>
+            </a:r>
+            <a:endParaRPr lang="en-US" sz="945" dirty="0"/>
+          </a:p>
+        </p:txBody>
+      </p:sp>
+      <p:sp>
+        <p:nvSpPr>
+          <p:cNvPr id="47" name="Shape 45"/>
+          <p:cNvSpPr/>
+          <p:nvPr/>
+        </p:nvSpPr>
+        <p:spPr>
+          <a:xfrm>
+            <a:off x="9976104" y="2340864"/>
+            <a:ext cx="1691640" cy="932688"/>
           </a:xfrm>
           <a:prstGeom prst="roundRect">
             <a:avLst>
-              <a:gd name="adj" fmla="val 8571"/>
+              <a:gd name="adj" fmla="val 5882"/>
             </a:avLst>
           </a:prstGeom>
           <a:solidFill>
@@ -4194,14 +4604,14 @@
       </p:sp>
       <p:sp>
         <p:nvSpPr>
-          <p:cNvPr id="36" name="Text 34"/>
-          <p:cNvSpPr/>
-          <p:nvPr/>
-        </p:nvSpPr>
-        <p:spPr>
-          <a:xfrm>
-            <a:off x="4410456" y="5783580"/>
-            <a:ext cx="3368040" cy="548640"/>
+          <p:cNvPr id="48" name="Text 46"/>
+          <p:cNvSpPr/>
+          <p:nvPr/>
+        </p:nvSpPr>
+        <p:spPr>
+          <a:xfrm>
+            <a:off x="10049256" y="2386584"/>
+            <a:ext cx="1545336" cy="841248"/>
           </a:xfrm>
           <a:prstGeom prst="rect">
             <a:avLst/>
@@ -4220,7 +4630,7 @@
               <a:buNone/>
             </a:pPr>
             <a:r>
-              <a:rPr lang="en-US" sz="1050" b="1" dirty="0">
+              <a:rPr lang="en-US" sz="945" b="1" dirty="0">
                 <a:solidFill>
                   <a:srgbClr val="1F2A37"/>
                 </a:solidFill>
@@ -4228,19 +4638,19 @@
                 <a:ea typeface="Arial" pitchFamily="34" charset="-122"/>
                 <a:cs typeface="Arial" pitchFamily="34" charset="-120"/>
               </a:rPr>
-              <a:t>Telegram редактор Sport</a:t>
-            </a:r>
-            <a:endParaRPr lang="en-US" sz="1050" dirty="0"/>
-          </a:p>
-          <a:p>
-            <a:pPr algn="ctr" indent="0" marL="0">
-              <a:lnSpc>
-                <a:spcPct val="100000"/>
-              </a:lnSpc>
-              <a:buNone/>
-            </a:pPr>
-            <a:r>
-              <a:rPr lang="en-US" sz="800" i="1" dirty="0">
+              <a:t>Pr manager · Аружан</a:t>
+            </a:r>
+            <a:endParaRPr lang="en-US" sz="945" dirty="0"/>
+          </a:p>
+          <a:p>
+            <a:pPr algn="ctr" indent="0" marL="0">
+              <a:lnSpc>
+                <a:spcPct val="100000"/>
+              </a:lnSpc>
+              <a:buNone/>
+            </a:pPr>
+            <a:r>
+              <a:rPr lang="en-US" sz="720" i="1" dirty="0">
                 <a:solidFill>
                   <a:srgbClr val="5B6B7C"/>
                 </a:solidFill>
@@ -4248,19 +4658,19 @@
                 <a:ea typeface="Arial" pitchFamily="34" charset="-122"/>
                 <a:cs typeface="Arial" pitchFamily="34" charset="-120"/>
               </a:rPr>
-              <a:t>Куричев Иван Николаевич</a:t>
-            </a:r>
-            <a:endParaRPr lang="en-US" sz="1050" dirty="0"/>
-          </a:p>
-          <a:p>
-            <a:pPr algn="ctr" indent="0" marL="0">
-              <a:lnSpc>
-                <a:spcPct val="100000"/>
-              </a:lnSpc>
-              <a:buNone/>
-            </a:pPr>
-            <a:r>
-              <a:rPr lang="en-US" sz="1100" b="1" dirty="0">
+              <a:t>PR менеджер</a:t>
+            </a:r>
+            <a:endParaRPr lang="en-US" sz="945" dirty="0"/>
+          </a:p>
+          <a:p>
+            <a:pPr algn="ctr" indent="0" marL="0">
+              <a:lnSpc>
+                <a:spcPct val="100000"/>
+              </a:lnSpc>
+              <a:buNone/>
+            </a:pPr>
+            <a:r>
+              <a:rPr lang="en-US" sz="990" b="1" dirty="0">
                 <a:solidFill>
                   <a:srgbClr val="0F6E4F"/>
                 </a:solidFill>
@@ -4268,187 +4678,9 @@
                 <a:ea typeface="Arial" pitchFamily="34" charset="-122"/>
                 <a:cs typeface="Arial" pitchFamily="34" charset="-120"/>
               </a:rPr>
-              <a:t>513 920 ₸</a:t>
-            </a:r>
-            <a:endParaRPr lang="en-US" sz="1050" dirty="0"/>
-          </a:p>
-        </p:txBody>
-      </p:sp>
-      <p:sp>
-        <p:nvSpPr>
-          <p:cNvPr id="37" name="Shape 35"/>
-          <p:cNvSpPr/>
-          <p:nvPr/>
-        </p:nvSpPr>
-        <p:spPr>
-          <a:xfrm>
-            <a:off x="9974580" y="1792224"/>
-            <a:ext cx="0" cy="54864"/>
-          </a:xfrm>
-          <a:prstGeom prst="line">
-            <a:avLst/>
-          </a:prstGeom>
-          <a:noFill/>
-          <a:ln w="12700">
-            <a:solidFill>
-              <a:srgbClr val="C7D8EE"/>
-            </a:solidFill>
-            <a:prstDash val="solid"/>
-          </a:ln>
-        </p:spPr>
-      </p:sp>
-      <p:sp>
-        <p:nvSpPr>
-          <p:cNvPr id="38" name="Text 36"/>
-          <p:cNvSpPr/>
-          <p:nvPr/>
-        </p:nvSpPr>
-        <p:spPr>
-          <a:xfrm>
-            <a:off x="8217408" y="1847088"/>
-            <a:ext cx="3514344" cy="292608"/>
-          </a:xfrm>
-          <a:prstGeom prst="rect">
-            <a:avLst/>
-          </a:prstGeom>
-          <a:noFill/>
-          <a:ln/>
-        </p:spPr>
-        <p:txBody>
-          <a:bodyPr wrap="square" lIns="0" tIns="0" rIns="0" bIns="0" rtlCol="0" anchor="ctr"/>
-          <a:lstStyle/>
-          <a:p>
-            <a:pPr algn="ctr" indent="0" marL="0">
-              <a:buNone/>
-            </a:pPr>
-            <a:r>
-              <a:rPr lang="en-US" sz="1200" b="1" dirty="0">
-                <a:solidFill>
-                  <a:srgbClr val="2E5C8A"/>
-                </a:solidFill>
-                <a:latin typeface="Arial" pitchFamily="34" charset="0"/>
-                <a:ea typeface="Arial" pitchFamily="34" charset="-122"/>
-                <a:cs typeface="Arial" pitchFamily="34" charset="-120"/>
-              </a:rPr>
-              <a:t>PR</a:t>
-            </a:r>
-            <a:endParaRPr lang="en-US" sz="1200" dirty="0"/>
-          </a:p>
-        </p:txBody>
-      </p:sp>
-      <p:sp>
-        <p:nvSpPr>
-          <p:cNvPr id="39" name="Shape 37"/>
-          <p:cNvSpPr/>
-          <p:nvPr/>
-        </p:nvSpPr>
-        <p:spPr>
-          <a:xfrm>
-            <a:off x="8217408" y="2194560"/>
-            <a:ext cx="3514344" cy="640080"/>
-          </a:xfrm>
-          <a:prstGeom prst="roundRect">
-            <a:avLst>
-              <a:gd name="adj" fmla="val 8571"/>
-            </a:avLst>
-          </a:prstGeom>
-          <a:solidFill>
-            <a:srgbClr val="EAF1FB"/>
-          </a:solidFill>
-          <a:ln w="12700">
-            <a:solidFill>
-              <a:srgbClr val="C7D8EE"/>
-            </a:solidFill>
-            <a:prstDash val="solid"/>
-          </a:ln>
-          <a:effectLst>
-            <a:outerShdw sx="100000" sy="100000" kx="0" ky="0" algn="bl" rotWithShape="0" blurRad="50800" dist="25400" dir="5400000">
-              <a:srgbClr val="9AA7B4">
-                <a:alpha val="28000"/>
-              </a:srgbClr>
-            </a:outerShdw>
-          </a:effectLst>
-        </p:spPr>
-      </p:sp>
-      <p:sp>
-        <p:nvSpPr>
-          <p:cNvPr id="40" name="Text 38"/>
-          <p:cNvSpPr/>
-          <p:nvPr/>
-        </p:nvSpPr>
-        <p:spPr>
-          <a:xfrm>
-            <a:off x="8290560" y="2240280"/>
-            <a:ext cx="3368040" cy="548640"/>
-          </a:xfrm>
-          <a:prstGeom prst="rect">
-            <a:avLst/>
-          </a:prstGeom>
-          <a:noFill/>
-          <a:ln/>
-        </p:spPr>
-        <p:txBody>
-          <a:bodyPr wrap="square" lIns="0" tIns="0" rIns="0" bIns="0" rtlCol="0" anchor="ctr"/>
-          <a:lstStyle/>
-          <a:p>
-            <a:pPr algn="ctr" indent="0" marL="0">
-              <a:lnSpc>
-                <a:spcPct val="100000"/>
-              </a:lnSpc>
-              <a:buNone/>
-            </a:pPr>
-            <a:r>
-              <a:rPr lang="en-US" sz="1050" b="1" dirty="0">
-                <a:solidFill>
-                  <a:srgbClr val="1F2A37"/>
-                </a:solidFill>
-                <a:latin typeface="Arial" pitchFamily="34" charset="0"/>
-                <a:ea typeface="Arial" pitchFamily="34" charset="-122"/>
-                <a:cs typeface="Arial" pitchFamily="34" charset="-120"/>
-              </a:rPr>
-              <a:t>Pr manager · Аружан</a:t>
-            </a:r>
-            <a:endParaRPr lang="en-US" sz="1050" dirty="0"/>
-          </a:p>
-          <a:p>
-            <a:pPr algn="ctr" indent="0" marL="0">
-              <a:lnSpc>
-                <a:spcPct val="100000"/>
-              </a:lnSpc>
-              <a:buNone/>
-            </a:pPr>
-            <a:r>
-              <a:rPr lang="en-US" sz="800" i="1" dirty="0">
-                <a:solidFill>
-                  <a:srgbClr val="5B6B7C"/>
-                </a:solidFill>
-                <a:latin typeface="Arial" pitchFamily="34" charset="0"/>
-                <a:ea typeface="Arial" pitchFamily="34" charset="-122"/>
-                <a:cs typeface="Arial" pitchFamily="34" charset="-120"/>
-              </a:rPr>
-              <a:t>PR менеджер</a:t>
-            </a:r>
-            <a:endParaRPr lang="en-US" sz="1050" dirty="0"/>
-          </a:p>
-          <a:p>
-            <a:pPr algn="ctr" indent="0" marL="0">
-              <a:lnSpc>
-                <a:spcPct val="100000"/>
-              </a:lnSpc>
-              <a:buNone/>
-            </a:pPr>
-            <a:r>
-              <a:rPr lang="en-US" sz="1100" b="1" dirty="0">
-                <a:solidFill>
-                  <a:srgbClr val="0F6E4F"/>
-                </a:solidFill>
-                <a:latin typeface="Arial" pitchFamily="34" charset="0"/>
-                <a:ea typeface="Arial" pitchFamily="34" charset="-122"/>
-                <a:cs typeface="Arial" pitchFamily="34" charset="-120"/>
-              </a:rPr>
               <a:t>1 212 314 ₸</a:t>
             </a:r>
-            <a:endParaRPr lang="en-US" sz="1050" dirty="0"/>
+            <a:endParaRPr lang="en-US" sz="945" dirty="0"/>
           </a:p>
         </p:txBody>
       </p:sp>
@@ -5593,7 +5825,7 @@
                 <a:ea typeface="Arial" pitchFamily="34" charset="-122"/>
                 <a:cs typeface="Arial" pitchFamily="34" charset="-120"/>
               </a:rPr>
-              <a:t>15 846 637 ₸</a:t>
+              <a:t>12 930 047 ₸</a:t>
             </a:r>
             <a:endParaRPr lang="en-US" sz="1900" dirty="0"/>
           </a:p>
@@ -5627,12 +5859,12 @@
         </p:nvSpPr>
         <p:spPr>
           <a:xfrm>
-            <a:off x="3899916" y="1060704"/>
-            <a:ext cx="4389120" cy="768096"/>
+            <a:off x="3991356" y="1060704"/>
+            <a:ext cx="4206240" cy="658368"/>
           </a:xfrm>
           <a:prstGeom prst="roundRect">
             <a:avLst>
-              <a:gd name="adj" fmla="val 7143"/>
+              <a:gd name="adj" fmla="val 8333"/>
             </a:avLst>
           </a:prstGeom>
           <a:solidFill>
@@ -5661,8 +5893,8 @@
         </p:nvSpPr>
         <p:spPr>
           <a:xfrm>
-            <a:off x="3973068" y="1106424"/>
-            <a:ext cx="4242816" cy="676656"/>
+            <a:off x="4064508" y="1106424"/>
+            <a:ext cx="4059936" cy="566928"/>
           </a:xfrm>
           <a:prstGeom prst="rect">
             <a:avLst/>
@@ -5743,8 +5975,8 @@
         </p:nvSpPr>
         <p:spPr>
           <a:xfrm>
-            <a:off x="6094476" y="1828800"/>
-            <a:ext cx="0" cy="54864"/>
+            <a:off x="6094476" y="1719072"/>
+            <a:ext cx="0" cy="91440"/>
           </a:xfrm>
           <a:prstGeom prst="line">
             <a:avLst/>
@@ -5766,8 +5998,8 @@
         </p:nvSpPr>
         <p:spPr>
           <a:xfrm>
-            <a:off x="3063240" y="1883664"/>
-            <a:ext cx="6062472" cy="0"/>
+            <a:off x="3017520" y="1810512"/>
+            <a:ext cx="6126480" cy="0"/>
           </a:xfrm>
           <a:prstGeom prst="line">
             <a:avLst/>
@@ -5789,8 +6021,8 @@
         </p:nvSpPr>
         <p:spPr>
           <a:xfrm>
-            <a:off x="3063240" y="1883664"/>
-            <a:ext cx="0" cy="219456"/>
+            <a:off x="3017520" y="1810512"/>
+            <a:ext cx="0" cy="201168"/>
           </a:xfrm>
           <a:prstGeom prst="line">
             <a:avLst/>
@@ -5812,8 +6044,8 @@
         </p:nvSpPr>
         <p:spPr>
           <a:xfrm>
-            <a:off x="9125712" y="1883664"/>
-            <a:ext cx="0" cy="219456"/>
+            <a:off x="9144000" y="1810512"/>
+            <a:ext cx="0" cy="201168"/>
           </a:xfrm>
           <a:prstGeom prst="line">
             <a:avLst/>
@@ -5835,12 +6067,12 @@
         </p:nvSpPr>
         <p:spPr>
           <a:xfrm>
-            <a:off x="822960" y="2103120"/>
-            <a:ext cx="4480560" cy="731520"/>
+            <a:off x="1005840" y="2011680"/>
+            <a:ext cx="4023360" cy="658368"/>
           </a:xfrm>
           <a:prstGeom prst="roundRect">
             <a:avLst>
-              <a:gd name="adj" fmla="val 7500"/>
+              <a:gd name="adj" fmla="val 8333"/>
             </a:avLst>
           </a:prstGeom>
           <a:solidFill>
@@ -5869,8 +6101,8 @@
         </p:nvSpPr>
         <p:spPr>
           <a:xfrm>
-            <a:off x="896112" y="2148840"/>
-            <a:ext cx="4334256" cy="640080"/>
+            <a:off x="1078992" y="2057400"/>
+            <a:ext cx="3877056" cy="566928"/>
           </a:xfrm>
           <a:prstGeom prst="rect">
             <a:avLst/>
@@ -5951,12 +6183,12 @@
         </p:nvSpPr>
         <p:spPr>
           <a:xfrm>
-            <a:off x="6885432" y="2103120"/>
-            <a:ext cx="4480560" cy="731520"/>
+            <a:off x="7498080" y="2011680"/>
+            <a:ext cx="3291840" cy="658368"/>
           </a:xfrm>
           <a:prstGeom prst="roundRect">
             <a:avLst>
-              <a:gd name="adj" fmla="val 7500"/>
+              <a:gd name="adj" fmla="val 8333"/>
             </a:avLst>
           </a:prstGeom>
           <a:solidFill>
@@ -5985,8 +6217,8 @@
         </p:nvSpPr>
         <p:spPr>
           <a:xfrm>
-            <a:off x="6958584" y="2148840"/>
-            <a:ext cx="4334256" cy="640080"/>
+            <a:off x="7571232" y="2057400"/>
+            <a:ext cx="3145536" cy="566928"/>
           </a:xfrm>
           <a:prstGeom prst="rect">
             <a:avLst/>
@@ -6061,14 +6293,92 @@
       </p:sp>
       <p:sp>
         <p:nvSpPr>
-          <p:cNvPr id="15" name="Shape 13"/>
-          <p:cNvSpPr/>
-          <p:nvPr/>
-        </p:nvSpPr>
-        <p:spPr>
-          <a:xfrm>
-            <a:off x="3063240" y="2834640"/>
-            <a:ext cx="0" cy="182880"/>
+          <p:cNvPr id="15" name="Text 13"/>
+          <p:cNvSpPr/>
+          <p:nvPr/>
+        </p:nvSpPr>
+        <p:spPr>
+          <a:xfrm>
+            <a:off x="1005840" y="2743200"/>
+            <a:ext cx="4023360" cy="256032"/>
+          </a:xfrm>
+          <a:prstGeom prst="rect">
+            <a:avLst/>
+          </a:prstGeom>
+          <a:noFill/>
+          <a:ln/>
+        </p:spPr>
+        <p:txBody>
+          <a:bodyPr wrap="square" lIns="0" tIns="0" rIns="0" bIns="0" rtlCol="0" anchor="ctr"/>
+          <a:lstStyle/>
+          <a:p>
+            <a:pPr algn="ctr" indent="0" marL="0">
+              <a:buNone/>
+            </a:pPr>
+            <a:r>
+              <a:rPr lang="en-US" sz="1200" b="1" dirty="0">
+                <a:solidFill>
+                  <a:srgbClr val="2E5C8A"/>
+                </a:solidFill>
+                <a:latin typeface="Arial" pitchFamily="34" charset="0"/>
+                <a:ea typeface="Arial" pitchFamily="34" charset="-122"/>
+                <a:cs typeface="Arial" pitchFamily="34" charset="-120"/>
+              </a:rPr>
+              <a:t>Design</a:t>
+            </a:r>
+            <a:endParaRPr lang="en-US" sz="1200" dirty="0"/>
+          </a:p>
+        </p:txBody>
+      </p:sp>
+      <p:sp>
+        <p:nvSpPr>
+          <p:cNvPr id="16" name="Text 14"/>
+          <p:cNvSpPr/>
+          <p:nvPr/>
+        </p:nvSpPr>
+        <p:spPr>
+          <a:xfrm>
+            <a:off x="7498080" y="2743200"/>
+            <a:ext cx="3291840" cy="256032"/>
+          </a:xfrm>
+          <a:prstGeom prst="rect">
+            <a:avLst/>
+          </a:prstGeom>
+          <a:noFill/>
+          <a:ln/>
+        </p:spPr>
+        <p:txBody>
+          <a:bodyPr wrap="square" lIns="0" tIns="0" rIns="0" bIns="0" rtlCol="0" anchor="ctr"/>
+          <a:lstStyle/>
+          <a:p>
+            <a:pPr algn="ctr" indent="0" marL="0">
+              <a:buNone/>
+            </a:pPr>
+            <a:r>
+              <a:rPr lang="en-US" sz="1200" b="1" dirty="0">
+                <a:solidFill>
+                  <a:srgbClr val="2E5C8A"/>
+                </a:solidFill>
+                <a:latin typeface="Arial" pitchFamily="34" charset="0"/>
+                <a:ea typeface="Arial" pitchFamily="34" charset="-122"/>
+                <a:cs typeface="Arial" pitchFamily="34" charset="-120"/>
+              </a:rPr>
+              <a:t>Video production</a:t>
+            </a:r>
+            <a:endParaRPr lang="en-US" sz="1200" dirty="0"/>
+          </a:p>
+        </p:txBody>
+      </p:sp>
+      <p:sp>
+        <p:nvSpPr>
+          <p:cNvPr id="17" name="Shape 15"/>
+          <p:cNvSpPr/>
+          <p:nvPr/>
+        </p:nvSpPr>
+        <p:spPr>
+          <a:xfrm>
+            <a:off x="3017520" y="2670048"/>
+            <a:ext cx="0" cy="292608"/>
           </a:xfrm>
           <a:prstGeom prst="line">
             <a:avLst/>
@@ -6084,18 +6394,87 @@
       </p:sp>
       <p:sp>
         <p:nvSpPr>
-          <p:cNvPr id="16" name="Shape 14"/>
-          <p:cNvSpPr/>
-          <p:nvPr/>
-        </p:nvSpPr>
-        <p:spPr>
-          <a:xfrm>
-            <a:off x="822960" y="3017520"/>
-            <a:ext cx="4480560" cy="621792"/>
+          <p:cNvPr id="18" name="Shape 16"/>
+          <p:cNvSpPr/>
+          <p:nvPr/>
+        </p:nvSpPr>
+        <p:spPr>
+          <a:xfrm>
+            <a:off x="1965960" y="2962656"/>
+            <a:ext cx="2103120" cy="0"/>
+          </a:xfrm>
+          <a:prstGeom prst="line">
+            <a:avLst/>
+          </a:prstGeom>
+          <a:noFill/>
+          <a:ln w="12700">
+            <a:solidFill>
+              <a:srgbClr val="C7D8EE"/>
+            </a:solidFill>
+            <a:prstDash val="solid"/>
+          </a:ln>
+        </p:spPr>
+      </p:sp>
+      <p:sp>
+        <p:nvSpPr>
+          <p:cNvPr id="19" name="Shape 17"/>
+          <p:cNvSpPr/>
+          <p:nvPr/>
+        </p:nvSpPr>
+        <p:spPr>
+          <a:xfrm>
+            <a:off x="1965960" y="2962656"/>
+            <a:ext cx="0" cy="146304"/>
+          </a:xfrm>
+          <a:prstGeom prst="line">
+            <a:avLst/>
+          </a:prstGeom>
+          <a:noFill/>
+          <a:ln w="12700">
+            <a:solidFill>
+              <a:srgbClr val="C7D8EE"/>
+            </a:solidFill>
+            <a:prstDash val="solid"/>
+          </a:ln>
+        </p:spPr>
+      </p:sp>
+      <p:sp>
+        <p:nvSpPr>
+          <p:cNvPr id="20" name="Shape 18"/>
+          <p:cNvSpPr/>
+          <p:nvPr/>
+        </p:nvSpPr>
+        <p:spPr>
+          <a:xfrm>
+            <a:off x="4069080" y="2962656"/>
+            <a:ext cx="0" cy="146304"/>
+          </a:xfrm>
+          <a:prstGeom prst="line">
+            <a:avLst/>
+          </a:prstGeom>
+          <a:noFill/>
+          <a:ln w="12700">
+            <a:solidFill>
+              <a:srgbClr val="C7D8EE"/>
+            </a:solidFill>
+            <a:prstDash val="solid"/>
+          </a:ln>
+        </p:spPr>
+      </p:sp>
+      <p:sp>
+        <p:nvSpPr>
+          <p:cNvPr id="21" name="Shape 19"/>
+          <p:cNvSpPr/>
+          <p:nvPr/>
+        </p:nvSpPr>
+        <p:spPr>
+          <a:xfrm>
+            <a:off x="1005840" y="3108960"/>
+            <a:ext cx="1920240" cy="658368"/>
           </a:xfrm>
           <a:prstGeom prst="roundRect">
             <a:avLst>
-              <a:gd name="adj" fmla="val 8824"/>
+              <a:gd name="adj" fmla="val 8333"/>
             </a:avLst>
           </a:prstGeom>
           <a:solidFill>
@@ -6118,14 +6497,14 @@
       </p:sp>
       <p:sp>
         <p:nvSpPr>
-          <p:cNvPr id="17" name="Text 15"/>
-          <p:cNvSpPr/>
-          <p:nvPr/>
-        </p:nvSpPr>
-        <p:spPr>
-          <a:xfrm>
-            <a:off x="896112" y="3063240"/>
-            <a:ext cx="4334256" cy="530352"/>
+          <p:cNvPr id="22" name="Text 20"/>
+          <p:cNvSpPr/>
+          <p:nvPr/>
+        </p:nvSpPr>
+        <p:spPr>
+          <a:xfrm>
+            <a:off x="1078992" y="3154680"/>
+            <a:ext cx="1773936" cy="566928"/>
           </a:xfrm>
           <a:prstGeom prst="rect">
             <a:avLst/>
@@ -6144,7 +6523,7 @@
               <a:buNone/>
             </a:pPr>
             <a:r>
-              <a:rPr lang="en-US" sz="1050" b="1" dirty="0">
+              <a:rPr lang="en-US" sz="998" b="1" dirty="0">
                 <a:solidFill>
                   <a:srgbClr val="1F2A37"/>
                 </a:solidFill>
@@ -6154,17 +6533,17 @@
               </a:rPr>
               <a:t>Graph</a:t>
             </a:r>
-            <a:endParaRPr lang="en-US" sz="1050" dirty="0"/>
-          </a:p>
-          <a:p>
-            <a:pPr algn="ctr" indent="0" marL="0">
-              <a:lnSpc>
-                <a:spcPct val="100000"/>
-              </a:lnSpc>
-              <a:buNone/>
-            </a:pPr>
-            <a:r>
-              <a:rPr lang="en-US" sz="800" i="1" dirty="0">
+            <a:endParaRPr lang="en-US" sz="998" dirty="0"/>
+          </a:p>
+          <a:p>
+            <a:pPr algn="ctr" indent="0" marL="0">
+              <a:lnSpc>
+                <a:spcPct val="100000"/>
+              </a:lnSpc>
+              <a:buNone/>
+            </a:pPr>
+            <a:r>
+              <a:rPr lang="en-US" sz="760" i="1" dirty="0">
                 <a:solidFill>
                   <a:srgbClr val="5B6B7C"/>
                 </a:solidFill>
@@ -6174,17 +6553,17 @@
               </a:rPr>
               <a:t>Дизайнер · имя н/д</a:t>
             </a:r>
-            <a:endParaRPr lang="en-US" sz="1050" dirty="0"/>
-          </a:p>
-          <a:p>
-            <a:pPr algn="ctr" indent="0" marL="0">
-              <a:lnSpc>
-                <a:spcPct val="100000"/>
-              </a:lnSpc>
-              <a:buNone/>
-            </a:pPr>
-            <a:r>
-              <a:rPr lang="en-US" sz="1100" b="1" dirty="0">
+            <a:endParaRPr lang="en-US" sz="998" dirty="0"/>
+          </a:p>
+          <a:p>
+            <a:pPr algn="ctr" indent="0" marL="0">
+              <a:lnSpc>
+                <a:spcPct val="100000"/>
+              </a:lnSpc>
+              <a:buNone/>
+            </a:pPr>
+            <a:r>
+              <a:rPr lang="en-US" sz="1045" b="1" dirty="0">
                 <a:solidFill>
                   <a:srgbClr val="B45309"/>
                 </a:solidFill>
@@ -6194,24 +6573,24 @@
               </a:rPr>
               <a:t>940 000 ₸  *</a:t>
             </a:r>
-            <a:endParaRPr lang="en-US" sz="1050" dirty="0"/>
-          </a:p>
-        </p:txBody>
-      </p:sp>
-      <p:sp>
-        <p:nvSpPr>
-          <p:cNvPr id="18" name="Shape 16"/>
-          <p:cNvSpPr/>
-          <p:nvPr/>
-        </p:nvSpPr>
-        <p:spPr>
-          <a:xfrm>
-            <a:off x="822960" y="3707892"/>
-            <a:ext cx="4480560" cy="621792"/>
+            <a:endParaRPr lang="en-US" sz="998" dirty="0"/>
+          </a:p>
+        </p:txBody>
+      </p:sp>
+      <p:sp>
+        <p:nvSpPr>
+          <p:cNvPr id="23" name="Shape 21"/>
+          <p:cNvSpPr/>
+          <p:nvPr/>
+        </p:nvSpPr>
+        <p:spPr>
+          <a:xfrm>
+            <a:off x="1005840" y="3895344"/>
+            <a:ext cx="1920240" cy="658368"/>
           </a:xfrm>
           <a:prstGeom prst="roundRect">
             <a:avLst>
-              <a:gd name="adj" fmla="val 8824"/>
+              <a:gd name="adj" fmla="val 8333"/>
             </a:avLst>
           </a:prstGeom>
           <a:solidFill>
@@ -6234,14 +6613,14 @@
       </p:sp>
       <p:sp>
         <p:nvSpPr>
-          <p:cNvPr id="19" name="Text 17"/>
-          <p:cNvSpPr/>
-          <p:nvPr/>
-        </p:nvSpPr>
-        <p:spPr>
-          <a:xfrm>
-            <a:off x="896112" y="3753612"/>
-            <a:ext cx="4334256" cy="530352"/>
+          <p:cNvPr id="24" name="Text 22"/>
+          <p:cNvSpPr/>
+          <p:nvPr/>
+        </p:nvSpPr>
+        <p:spPr>
+          <a:xfrm>
+            <a:off x="1078992" y="3941064"/>
+            <a:ext cx="1773936" cy="566928"/>
           </a:xfrm>
           <a:prstGeom prst="rect">
             <a:avLst/>
@@ -6260,7 +6639,7 @@
               <a:buNone/>
             </a:pPr>
             <a:r>
-              <a:rPr lang="en-US" sz="1050" b="1" dirty="0">
+              <a:rPr lang="en-US" sz="998" b="1" dirty="0">
                 <a:solidFill>
                   <a:srgbClr val="1F2A37"/>
                 </a:solidFill>
@@ -6270,17 +6649,17 @@
               </a:rPr>
               <a:t>Graph</a:t>
             </a:r>
-            <a:endParaRPr lang="en-US" sz="1050" dirty="0"/>
-          </a:p>
-          <a:p>
-            <a:pPr algn="ctr" indent="0" marL="0">
-              <a:lnSpc>
-                <a:spcPct val="100000"/>
-              </a:lnSpc>
-              <a:buNone/>
-            </a:pPr>
-            <a:r>
-              <a:rPr lang="en-US" sz="800" i="1" dirty="0">
+            <a:endParaRPr lang="en-US" sz="998" dirty="0"/>
+          </a:p>
+          <a:p>
+            <a:pPr algn="ctr" indent="0" marL="0">
+              <a:lnSpc>
+                <a:spcPct val="100000"/>
+              </a:lnSpc>
+              <a:buNone/>
+            </a:pPr>
+            <a:r>
+              <a:rPr lang="en-US" sz="760" i="1" dirty="0">
                 <a:solidFill>
                   <a:srgbClr val="5B6B7C"/>
                 </a:solidFill>
@@ -6290,17 +6669,17 @@
               </a:rPr>
               <a:t>Дизайнер · имя н/д</a:t>
             </a:r>
-            <a:endParaRPr lang="en-US" sz="1050" dirty="0"/>
-          </a:p>
-          <a:p>
-            <a:pPr algn="ctr" indent="0" marL="0">
-              <a:lnSpc>
-                <a:spcPct val="100000"/>
-              </a:lnSpc>
-              <a:buNone/>
-            </a:pPr>
-            <a:r>
-              <a:rPr lang="en-US" sz="1100" b="1" dirty="0">
+            <a:endParaRPr lang="en-US" sz="998" dirty="0"/>
+          </a:p>
+          <a:p>
+            <a:pPr algn="ctr" indent="0" marL="0">
+              <a:lnSpc>
+                <a:spcPct val="100000"/>
+              </a:lnSpc>
+              <a:buNone/>
+            </a:pPr>
+            <a:r>
+              <a:rPr lang="en-US" sz="1045" b="1" dirty="0">
                 <a:solidFill>
                   <a:srgbClr val="B45309"/>
                 </a:solidFill>
@@ -6310,24 +6689,24 @@
               </a:rPr>
               <a:t>940 000 ₸  *</a:t>
             </a:r>
-            <a:endParaRPr lang="en-US" sz="1050" dirty="0"/>
-          </a:p>
-        </p:txBody>
-      </p:sp>
-      <p:sp>
-        <p:nvSpPr>
-          <p:cNvPr id="20" name="Shape 18"/>
-          <p:cNvSpPr/>
-          <p:nvPr/>
-        </p:nvSpPr>
-        <p:spPr>
-          <a:xfrm>
-            <a:off x="822960" y="4398264"/>
-            <a:ext cx="4480560" cy="621792"/>
+            <a:endParaRPr lang="en-US" sz="998" dirty="0"/>
+          </a:p>
+        </p:txBody>
+      </p:sp>
+      <p:sp>
+        <p:nvSpPr>
+          <p:cNvPr id="25" name="Shape 23"/>
+          <p:cNvSpPr/>
+          <p:nvPr/>
+        </p:nvSpPr>
+        <p:spPr>
+          <a:xfrm>
+            <a:off x="1005840" y="4681728"/>
+            <a:ext cx="1920240" cy="658368"/>
           </a:xfrm>
           <a:prstGeom prst="roundRect">
             <a:avLst>
-              <a:gd name="adj" fmla="val 8824"/>
+              <a:gd name="adj" fmla="val 8333"/>
             </a:avLst>
           </a:prstGeom>
           <a:solidFill>
@@ -6350,14 +6729,14 @@
       </p:sp>
       <p:sp>
         <p:nvSpPr>
-          <p:cNvPr id="21" name="Text 19"/>
-          <p:cNvSpPr/>
-          <p:nvPr/>
-        </p:nvSpPr>
-        <p:spPr>
-          <a:xfrm>
-            <a:off x="896112" y="4443984"/>
-            <a:ext cx="4334256" cy="530352"/>
+          <p:cNvPr id="26" name="Text 24"/>
+          <p:cNvSpPr/>
+          <p:nvPr/>
+        </p:nvSpPr>
+        <p:spPr>
+          <a:xfrm>
+            <a:off x="1078992" y="4727448"/>
+            <a:ext cx="1773936" cy="566928"/>
           </a:xfrm>
           <a:prstGeom prst="rect">
             <a:avLst/>
@@ -6376,7 +6755,7 @@
               <a:buNone/>
             </a:pPr>
             <a:r>
-              <a:rPr lang="en-US" sz="1050" b="1" dirty="0">
+              <a:rPr lang="en-US" sz="998" b="1" dirty="0">
                 <a:solidFill>
                   <a:srgbClr val="1F2A37"/>
                 </a:solidFill>
@@ -6386,17 +6765,17 @@
               </a:rPr>
               <a:t>Graph Спорт</a:t>
             </a:r>
-            <a:endParaRPr lang="en-US" sz="1050" dirty="0"/>
-          </a:p>
-          <a:p>
-            <a:pPr algn="ctr" indent="0" marL="0">
-              <a:lnSpc>
-                <a:spcPct val="100000"/>
-              </a:lnSpc>
-              <a:buNone/>
-            </a:pPr>
-            <a:r>
-              <a:rPr lang="en-US" sz="800" i="1" dirty="0">
+            <a:endParaRPr lang="en-US" sz="998" dirty="0"/>
+          </a:p>
+          <a:p>
+            <a:pPr algn="ctr" indent="0" marL="0">
+              <a:lnSpc>
+                <a:spcPct val="100000"/>
+              </a:lnSpc>
+              <a:buNone/>
+            </a:pPr>
+            <a:r>
+              <a:rPr lang="en-US" sz="760" i="1" dirty="0">
                 <a:solidFill>
                   <a:srgbClr val="5B6B7C"/>
                 </a:solidFill>
@@ -6406,17 +6785,17 @@
               </a:rPr>
               <a:t>Дизайнер · имя н/д</a:t>
             </a:r>
-            <a:endParaRPr lang="en-US" sz="1050" dirty="0"/>
-          </a:p>
-          <a:p>
-            <a:pPr algn="ctr" indent="0" marL="0">
-              <a:lnSpc>
-                <a:spcPct val="100000"/>
-              </a:lnSpc>
-              <a:buNone/>
-            </a:pPr>
-            <a:r>
-              <a:rPr lang="en-US" sz="1100" b="1" dirty="0">
+            <a:endParaRPr lang="en-US" sz="998" dirty="0"/>
+          </a:p>
+          <a:p>
+            <a:pPr algn="ctr" indent="0" marL="0">
+              <a:lnSpc>
+                <a:spcPct val="100000"/>
+              </a:lnSpc>
+              <a:buNone/>
+            </a:pPr>
+            <a:r>
+              <a:rPr lang="en-US" sz="1045" b="1" dirty="0">
                 <a:solidFill>
                   <a:srgbClr val="B45309"/>
                 </a:solidFill>
@@ -6426,24 +6805,24 @@
               </a:rPr>
               <a:t>940 000 ₸  *</a:t>
             </a:r>
-            <a:endParaRPr lang="en-US" sz="1050" dirty="0"/>
-          </a:p>
-        </p:txBody>
-      </p:sp>
-      <p:sp>
-        <p:nvSpPr>
-          <p:cNvPr id="22" name="Shape 20"/>
-          <p:cNvSpPr/>
-          <p:nvPr/>
-        </p:nvSpPr>
-        <p:spPr>
-          <a:xfrm>
-            <a:off x="822960" y="5088636"/>
-            <a:ext cx="4480560" cy="621792"/>
+            <a:endParaRPr lang="en-US" sz="998" dirty="0"/>
+          </a:p>
+        </p:txBody>
+      </p:sp>
+      <p:sp>
+        <p:nvSpPr>
+          <p:cNvPr id="27" name="Shape 25"/>
+          <p:cNvSpPr/>
+          <p:nvPr/>
+        </p:nvSpPr>
+        <p:spPr>
+          <a:xfrm>
+            <a:off x="3108960" y="3108960"/>
+            <a:ext cx="1920240" cy="658368"/>
           </a:xfrm>
           <a:prstGeom prst="roundRect">
             <a:avLst>
-              <a:gd name="adj" fmla="val 8824"/>
+              <a:gd name="adj" fmla="val 8333"/>
             </a:avLst>
           </a:prstGeom>
           <a:solidFill>
@@ -6466,14 +6845,14 @@
       </p:sp>
       <p:sp>
         <p:nvSpPr>
-          <p:cNvPr id="23" name="Text 21"/>
-          <p:cNvSpPr/>
-          <p:nvPr/>
-        </p:nvSpPr>
-        <p:spPr>
-          <a:xfrm>
-            <a:off x="896112" y="5134356"/>
-            <a:ext cx="4334256" cy="530352"/>
+          <p:cNvPr id="28" name="Text 26"/>
+          <p:cNvSpPr/>
+          <p:nvPr/>
+        </p:nvSpPr>
+        <p:spPr>
+          <a:xfrm>
+            <a:off x="3182112" y="3154680"/>
+            <a:ext cx="1773936" cy="566928"/>
           </a:xfrm>
           <a:prstGeom prst="rect">
             <a:avLst/>
@@ -6492,7 +6871,7 @@
               <a:buNone/>
             </a:pPr>
             <a:r>
-              <a:rPr lang="en-US" sz="1050" b="1" dirty="0">
+              <a:rPr lang="en-US" sz="998" b="1" dirty="0">
                 <a:solidFill>
                   <a:srgbClr val="1F2A37"/>
                 </a:solidFill>
@@ -6502,17 +6881,17 @@
               </a:rPr>
               <a:t>Motion</a:t>
             </a:r>
-            <a:endParaRPr lang="en-US" sz="1050" dirty="0"/>
-          </a:p>
-          <a:p>
-            <a:pPr algn="ctr" indent="0" marL="0">
-              <a:lnSpc>
-                <a:spcPct val="100000"/>
-              </a:lnSpc>
-              <a:buNone/>
-            </a:pPr>
-            <a:r>
-              <a:rPr lang="en-US" sz="800" i="1" dirty="0">
+            <a:endParaRPr lang="en-US" sz="998" dirty="0"/>
+          </a:p>
+          <a:p>
+            <a:pPr algn="ctr" indent="0" marL="0">
+              <a:lnSpc>
+                <a:spcPct val="100000"/>
+              </a:lnSpc>
+              <a:buNone/>
+            </a:pPr>
+            <a:r>
+              <a:rPr lang="en-US" sz="760" i="1" dirty="0">
                 <a:solidFill>
                   <a:srgbClr val="5B6B7C"/>
                 </a:solidFill>
@@ -6522,17 +6901,17 @@
               </a:rPr>
               <a:t>Motion-дизайнер · имя н/д</a:t>
             </a:r>
-            <a:endParaRPr lang="en-US" sz="1050" dirty="0"/>
-          </a:p>
-          <a:p>
-            <a:pPr algn="ctr" indent="0" marL="0">
-              <a:lnSpc>
-                <a:spcPct val="100000"/>
-              </a:lnSpc>
-              <a:buNone/>
-            </a:pPr>
-            <a:r>
-              <a:rPr lang="en-US" sz="1100" b="1" dirty="0">
+            <a:endParaRPr lang="en-US" sz="998" dirty="0"/>
+          </a:p>
+          <a:p>
+            <a:pPr algn="ctr" indent="0" marL="0">
+              <a:lnSpc>
+                <a:spcPct val="100000"/>
+              </a:lnSpc>
+              <a:buNone/>
+            </a:pPr>
+            <a:r>
+              <a:rPr lang="en-US" sz="1045" b="1" dirty="0">
                 <a:solidFill>
                   <a:srgbClr val="B45309"/>
                 </a:solidFill>
@@ -6542,24 +6921,24 @@
               </a:rPr>
               <a:t>877 000 ₸  *</a:t>
             </a:r>
-            <a:endParaRPr lang="en-US" sz="1050" dirty="0"/>
-          </a:p>
-        </p:txBody>
-      </p:sp>
-      <p:sp>
-        <p:nvSpPr>
-          <p:cNvPr id="24" name="Shape 22"/>
-          <p:cNvSpPr/>
-          <p:nvPr/>
-        </p:nvSpPr>
-        <p:spPr>
-          <a:xfrm>
-            <a:off x="822960" y="5779008"/>
-            <a:ext cx="4480560" cy="621792"/>
+            <a:endParaRPr lang="en-US" sz="998" dirty="0"/>
+          </a:p>
+        </p:txBody>
+      </p:sp>
+      <p:sp>
+        <p:nvSpPr>
+          <p:cNvPr id="29" name="Shape 27"/>
+          <p:cNvSpPr/>
+          <p:nvPr/>
+        </p:nvSpPr>
+        <p:spPr>
+          <a:xfrm>
+            <a:off x="3108960" y="3895344"/>
+            <a:ext cx="1920240" cy="658368"/>
           </a:xfrm>
           <a:prstGeom prst="roundRect">
             <a:avLst>
-              <a:gd name="adj" fmla="val 8824"/>
+              <a:gd name="adj" fmla="val 8333"/>
             </a:avLst>
           </a:prstGeom>
           <a:solidFill>
@@ -6582,14 +6961,14 @@
       </p:sp>
       <p:sp>
         <p:nvSpPr>
-          <p:cNvPr id="25" name="Text 23"/>
-          <p:cNvSpPr/>
-          <p:nvPr/>
-        </p:nvSpPr>
-        <p:spPr>
-          <a:xfrm>
-            <a:off x="896112" y="5824728"/>
-            <a:ext cx="4334256" cy="530352"/>
+          <p:cNvPr id="30" name="Text 28"/>
+          <p:cNvSpPr/>
+          <p:nvPr/>
+        </p:nvSpPr>
+        <p:spPr>
+          <a:xfrm>
+            <a:off x="3182112" y="3941064"/>
+            <a:ext cx="1773936" cy="566928"/>
           </a:xfrm>
           <a:prstGeom prst="rect">
             <a:avLst/>
@@ -6608,7 +6987,7 @@
               <a:buNone/>
             </a:pPr>
             <a:r>
-              <a:rPr lang="en-US" sz="1050" b="1" dirty="0">
+              <a:rPr lang="en-US" sz="998" b="1" dirty="0">
                 <a:solidFill>
                   <a:srgbClr val="1F2A37"/>
                 </a:solidFill>
@@ -6618,17 +6997,17 @@
               </a:rPr>
               <a:t>Motion</a:t>
             </a:r>
-            <a:endParaRPr lang="en-US" sz="1050" dirty="0"/>
-          </a:p>
-          <a:p>
-            <a:pPr algn="ctr" indent="0" marL="0">
-              <a:lnSpc>
-                <a:spcPct val="100000"/>
-              </a:lnSpc>
-              <a:buNone/>
-            </a:pPr>
-            <a:r>
-              <a:rPr lang="en-US" sz="800" i="1" dirty="0">
+            <a:endParaRPr lang="en-US" sz="998" dirty="0"/>
+          </a:p>
+          <a:p>
+            <a:pPr algn="ctr" indent="0" marL="0">
+              <a:lnSpc>
+                <a:spcPct val="100000"/>
+              </a:lnSpc>
+              <a:buNone/>
+            </a:pPr>
+            <a:r>
+              <a:rPr lang="en-US" sz="760" i="1" dirty="0">
                 <a:solidFill>
                   <a:srgbClr val="5B6B7C"/>
                 </a:solidFill>
@@ -6638,17 +7017,17 @@
               </a:rPr>
               <a:t>Motion-дизайнер · имя н/д</a:t>
             </a:r>
-            <a:endParaRPr lang="en-US" sz="1050" dirty="0"/>
-          </a:p>
-          <a:p>
-            <a:pPr algn="ctr" indent="0" marL="0">
-              <a:lnSpc>
-                <a:spcPct val="100000"/>
-              </a:lnSpc>
-              <a:buNone/>
-            </a:pPr>
-            <a:r>
-              <a:rPr lang="en-US" sz="1100" b="1" dirty="0">
+            <a:endParaRPr lang="en-US" sz="998" dirty="0"/>
+          </a:p>
+          <a:p>
+            <a:pPr algn="ctr" indent="0" marL="0">
+              <a:lnSpc>
+                <a:spcPct val="100000"/>
+              </a:lnSpc>
+              <a:buNone/>
+            </a:pPr>
+            <a:r>
+              <a:rPr lang="en-US" sz="1045" b="1" dirty="0">
                 <a:solidFill>
                   <a:srgbClr val="B45309"/>
                 </a:solidFill>
@@ -6658,20 +7037,20 @@
               </a:rPr>
               <a:t>877 000 ₸  *</a:t>
             </a:r>
-            <a:endParaRPr lang="en-US" sz="1050" dirty="0"/>
-          </a:p>
-        </p:txBody>
-      </p:sp>
-      <p:sp>
-        <p:nvSpPr>
-          <p:cNvPr id="26" name="Shape 24"/>
-          <p:cNvSpPr/>
-          <p:nvPr/>
-        </p:nvSpPr>
-        <p:spPr>
-          <a:xfrm>
-            <a:off x="9125712" y="2834640"/>
-            <a:ext cx="0" cy="182880"/>
+            <a:endParaRPr lang="en-US" sz="998" dirty="0"/>
+          </a:p>
+        </p:txBody>
+      </p:sp>
+      <p:sp>
+        <p:nvSpPr>
+          <p:cNvPr id="31" name="Shape 29"/>
+          <p:cNvSpPr/>
+          <p:nvPr/>
+        </p:nvSpPr>
+        <p:spPr>
+          <a:xfrm>
+            <a:off x="9144000" y="2670048"/>
+            <a:ext cx="0" cy="384048"/>
           </a:xfrm>
           <a:prstGeom prst="line">
             <a:avLst/>
@@ -6687,18 +7066,18 @@
       </p:sp>
       <p:sp>
         <p:nvSpPr>
-          <p:cNvPr id="27" name="Shape 25"/>
-          <p:cNvSpPr/>
-          <p:nvPr/>
-        </p:nvSpPr>
-        <p:spPr>
-          <a:xfrm>
-            <a:off x="6885432" y="3017520"/>
-            <a:ext cx="4480560" cy="621792"/>
+          <p:cNvPr id="32" name="Shape 30"/>
+          <p:cNvSpPr/>
+          <p:nvPr/>
+        </p:nvSpPr>
+        <p:spPr>
+          <a:xfrm>
+            <a:off x="7498080" y="3108960"/>
+            <a:ext cx="3291840" cy="658368"/>
           </a:xfrm>
           <a:prstGeom prst="roundRect">
             <a:avLst>
-              <a:gd name="adj" fmla="val 8824"/>
+              <a:gd name="adj" fmla="val 8333"/>
             </a:avLst>
           </a:prstGeom>
           <a:solidFill>
@@ -6721,14 +7100,14 @@
       </p:sp>
       <p:sp>
         <p:nvSpPr>
-          <p:cNvPr id="28" name="Text 26"/>
-          <p:cNvSpPr/>
-          <p:nvPr/>
-        </p:nvSpPr>
-        <p:spPr>
-          <a:xfrm>
-            <a:off x="6958584" y="3063240"/>
-            <a:ext cx="4334256" cy="530352"/>
+          <p:cNvPr id="33" name="Text 31"/>
+          <p:cNvSpPr/>
+          <p:nvPr/>
+        </p:nvSpPr>
+        <p:spPr>
+          <a:xfrm>
+            <a:off x="7571232" y="3154680"/>
+            <a:ext cx="3145536" cy="566928"/>
           </a:xfrm>
           <a:prstGeom prst="rect">
             <a:avLst/>
@@ -6775,7 +7154,7 @@
                 <a:ea typeface="Arial" pitchFamily="34" charset="-122"/>
                 <a:cs typeface="Arial" pitchFamily="34" charset="-120"/>
               </a:rPr>
-              <a:t>Видеограф · имя н/д</a:t>
+              <a:t>Асанов Әділ Асанұлы</a:t>
             </a:r>
             <a:endParaRPr lang="en-US" sz="1050" dirty="0"/>
           </a:p>
@@ -6789,13 +7168,13 @@
             <a:r>
               <a:rPr lang="en-US" sz="1100" b="1" dirty="0">
                 <a:solidFill>
-                  <a:srgbClr val="B45309"/>
-                </a:solidFill>
-                <a:latin typeface="Arial" pitchFamily="34" charset="0"/>
-                <a:ea typeface="Arial" pitchFamily="34" charset="-122"/>
-                <a:cs typeface="Arial" pitchFamily="34" charset="-120"/>
-              </a:rPr>
-              <a:t>1 498 769 ₸  *</a:t>
+                  <a:srgbClr val="0F6E4F"/>
+                </a:solidFill>
+                <a:latin typeface="Arial" pitchFamily="34" charset="0"/>
+                <a:ea typeface="Arial" pitchFamily="34" charset="-122"/>
+                <a:cs typeface="Arial" pitchFamily="34" charset="-120"/>
+              </a:rPr>
+              <a:t>1 000 162 ₸</a:t>
             </a:r>
             <a:endParaRPr lang="en-US" sz="1050" dirty="0"/>
           </a:p>
@@ -6803,18 +7182,18 @@
       </p:sp>
       <p:sp>
         <p:nvSpPr>
-          <p:cNvPr id="29" name="Shape 27"/>
-          <p:cNvSpPr/>
-          <p:nvPr/>
-        </p:nvSpPr>
-        <p:spPr>
-          <a:xfrm>
-            <a:off x="6885432" y="3707892"/>
-            <a:ext cx="4480560" cy="621792"/>
+          <p:cNvPr id="34" name="Shape 32"/>
+          <p:cNvSpPr/>
+          <p:nvPr/>
+        </p:nvSpPr>
+        <p:spPr>
+          <a:xfrm>
+            <a:off x="7498080" y="3895344"/>
+            <a:ext cx="3291840" cy="658368"/>
           </a:xfrm>
           <a:prstGeom prst="roundRect">
             <a:avLst>
-              <a:gd name="adj" fmla="val 8824"/>
+              <a:gd name="adj" fmla="val 8333"/>
             </a:avLst>
           </a:prstGeom>
           <a:solidFill>
@@ -6837,14 +7216,14 @@
       </p:sp>
       <p:sp>
         <p:nvSpPr>
-          <p:cNvPr id="30" name="Text 28"/>
-          <p:cNvSpPr/>
-          <p:nvPr/>
-        </p:nvSpPr>
-        <p:spPr>
-          <a:xfrm>
-            <a:off x="6958584" y="3753612"/>
-            <a:ext cx="4334256" cy="530352"/>
+          <p:cNvPr id="35" name="Text 33"/>
+          <p:cNvSpPr/>
+          <p:nvPr/>
+        </p:nvSpPr>
+        <p:spPr>
+          <a:xfrm>
+            <a:off x="7571232" y="3941064"/>
+            <a:ext cx="3145536" cy="566928"/>
           </a:xfrm>
           <a:prstGeom prst="rect">
             <a:avLst/>
@@ -6891,7 +7270,7 @@
                 <a:ea typeface="Arial" pitchFamily="34" charset="-122"/>
                 <a:cs typeface="Arial" pitchFamily="34" charset="-120"/>
               </a:rPr>
-              <a:t>Видеограф · имя н/д</a:t>
+              <a:t>Шаймардан Мағжан Адилұлы</a:t>
             </a:r>
             <a:endParaRPr lang="en-US" sz="1050" dirty="0"/>
           </a:p>
@@ -6905,13 +7284,13 @@
             <a:r>
               <a:rPr lang="en-US" sz="1100" b="1" dirty="0">
                 <a:solidFill>
-                  <a:srgbClr val="B45309"/>
-                </a:solidFill>
-                <a:latin typeface="Arial" pitchFamily="34" charset="0"/>
-                <a:ea typeface="Arial" pitchFamily="34" charset="-122"/>
-                <a:cs typeface="Arial" pitchFamily="34" charset="-120"/>
-              </a:rPr>
-              <a:t>1 498 769 ₸  *</a:t>
+                  <a:srgbClr val="0F6E4F"/>
+                </a:solidFill>
+                <a:latin typeface="Arial" pitchFamily="34" charset="0"/>
+                <a:ea typeface="Arial" pitchFamily="34" charset="-122"/>
+                <a:cs typeface="Arial" pitchFamily="34" charset="-120"/>
+              </a:rPr>
+              <a:t>751 000 ₸</a:t>
             </a:r>
             <a:endParaRPr lang="en-US" sz="1050" dirty="0"/>
           </a:p>
@@ -6919,18 +7298,18 @@
       </p:sp>
       <p:sp>
         <p:nvSpPr>
-          <p:cNvPr id="31" name="Shape 29"/>
-          <p:cNvSpPr/>
-          <p:nvPr/>
-        </p:nvSpPr>
-        <p:spPr>
-          <a:xfrm>
-            <a:off x="6885432" y="4398264"/>
-            <a:ext cx="4480560" cy="621792"/>
+          <p:cNvPr id="36" name="Shape 34"/>
+          <p:cNvSpPr/>
+          <p:nvPr/>
+        </p:nvSpPr>
+        <p:spPr>
+          <a:xfrm>
+            <a:off x="7498080" y="4681728"/>
+            <a:ext cx="3291840" cy="658368"/>
           </a:xfrm>
           <a:prstGeom prst="roundRect">
             <a:avLst>
-              <a:gd name="adj" fmla="val 8824"/>
+              <a:gd name="adj" fmla="val 8333"/>
             </a:avLst>
           </a:prstGeom>
           <a:solidFill>
@@ -6953,14 +7332,14 @@
       </p:sp>
       <p:sp>
         <p:nvSpPr>
-          <p:cNvPr id="32" name="Text 30"/>
-          <p:cNvSpPr/>
-          <p:nvPr/>
-        </p:nvSpPr>
-        <p:spPr>
-          <a:xfrm>
-            <a:off x="6958584" y="4443984"/>
-            <a:ext cx="4334256" cy="530352"/>
+          <p:cNvPr id="37" name="Text 35"/>
+          <p:cNvSpPr/>
+          <p:nvPr/>
+        </p:nvSpPr>
+        <p:spPr>
+          <a:xfrm>
+            <a:off x="7571232" y="4727448"/>
+            <a:ext cx="3145536" cy="566928"/>
           </a:xfrm>
           <a:prstGeom prst="rect">
             <a:avLst/>
@@ -7007,7 +7386,7 @@
                 <a:ea typeface="Arial" pitchFamily="34" charset="-122"/>
                 <a:cs typeface="Arial" pitchFamily="34" charset="-120"/>
               </a:rPr>
-              <a:t>Видеограф · имя н/д</a:t>
+              <a:t>Жұмағали Әділжан Бауыржанұлы</a:t>
             </a:r>
             <a:endParaRPr lang="en-US" sz="1050" dirty="0"/>
           </a:p>
@@ -7021,13 +7400,13 @@
             <a:r>
               <a:rPr lang="en-US" sz="1100" b="1" dirty="0">
                 <a:solidFill>
-                  <a:srgbClr val="B45309"/>
-                </a:solidFill>
-                <a:latin typeface="Arial" pitchFamily="34" charset="0"/>
-                <a:ea typeface="Arial" pitchFamily="34" charset="-122"/>
-                <a:cs typeface="Arial" pitchFamily="34" charset="-120"/>
-              </a:rPr>
-              <a:t>1 498 769 ₸  *</a:t>
+                  <a:srgbClr val="0F6E4F"/>
+                </a:solidFill>
+                <a:latin typeface="Arial" pitchFamily="34" charset="0"/>
+                <a:ea typeface="Arial" pitchFamily="34" charset="-122"/>
+                <a:cs typeface="Arial" pitchFamily="34" charset="-120"/>
+              </a:rPr>
+              <a:t>804 324 ₸</a:t>
             </a:r>
             <a:endParaRPr lang="en-US" sz="1050" dirty="0"/>
           </a:p>
@@ -7035,18 +7414,18 @@
       </p:sp>
       <p:sp>
         <p:nvSpPr>
-          <p:cNvPr id="33" name="Shape 31"/>
-          <p:cNvSpPr/>
-          <p:nvPr/>
-        </p:nvSpPr>
-        <p:spPr>
-          <a:xfrm>
-            <a:off x="6885432" y="5088636"/>
-            <a:ext cx="4480560" cy="621792"/>
+          <p:cNvPr id="38" name="Shape 36"/>
+          <p:cNvSpPr/>
+          <p:nvPr/>
+        </p:nvSpPr>
+        <p:spPr>
+          <a:xfrm>
+            <a:off x="7498080" y="5468112"/>
+            <a:ext cx="3291840" cy="658368"/>
           </a:xfrm>
           <a:prstGeom prst="roundRect">
             <a:avLst>
-              <a:gd name="adj" fmla="val 8824"/>
+              <a:gd name="adj" fmla="val 8333"/>
             </a:avLst>
           </a:prstGeom>
           <a:solidFill>
@@ -7069,14 +7448,14 @@
       </p:sp>
       <p:sp>
         <p:nvSpPr>
-          <p:cNvPr id="34" name="Text 32"/>
-          <p:cNvSpPr/>
-          <p:nvPr/>
-        </p:nvSpPr>
-        <p:spPr>
-          <a:xfrm>
-            <a:off x="6958584" y="5134356"/>
-            <a:ext cx="4334256" cy="530352"/>
+          <p:cNvPr id="39" name="Text 37"/>
+          <p:cNvSpPr/>
+          <p:nvPr/>
+        </p:nvSpPr>
+        <p:spPr>
+          <a:xfrm>
+            <a:off x="7571232" y="5513832"/>
+            <a:ext cx="3145536" cy="566928"/>
           </a:xfrm>
           <a:prstGeom prst="rect">
             <a:avLst/>
@@ -7123,7 +7502,7 @@
                 <a:ea typeface="Arial" pitchFamily="34" charset="-122"/>
                 <a:cs typeface="Arial" pitchFamily="34" charset="-120"/>
               </a:rPr>
-              <a:t>Видеограф · имя н/д</a:t>
+              <a:t>Боровков Владимир Владимирович</a:t>
             </a:r>
             <a:endParaRPr lang="en-US" sz="1050" dirty="0"/>
           </a:p>
@@ -7137,13 +7516,13 @@
             <a:r>
               <a:rPr lang="en-US" sz="1100" b="1" dirty="0">
                 <a:solidFill>
-                  <a:srgbClr val="B45309"/>
-                </a:solidFill>
-                <a:latin typeface="Arial" pitchFamily="34" charset="0"/>
-                <a:ea typeface="Arial" pitchFamily="34" charset="-122"/>
-                <a:cs typeface="Arial" pitchFamily="34" charset="-120"/>
-              </a:rPr>
-              <a:t>1 498 769 ₸  *</a:t>
+                  <a:srgbClr val="0F6E4F"/>
+                </a:solidFill>
+                <a:latin typeface="Arial" pitchFamily="34" charset="0"/>
+                <a:ea typeface="Arial" pitchFamily="34" charset="-122"/>
+                <a:cs typeface="Arial" pitchFamily="34" charset="-120"/>
+              </a:rPr>
+              <a:t>523 000 ₸</a:t>
             </a:r>
             <a:endParaRPr lang="en-US" sz="1050" dirty="0"/>
           </a:p>
@@ -8755,7 +9134,7 @@
                 <a:ea typeface="Arial" pitchFamily="34" charset="-122"/>
                 <a:cs typeface="Arial" pitchFamily="34" charset="-120"/>
               </a:rPr>
-              <a:t>Мобилограф / монтажёр (4 позиции)</a:t>
+              <a:t>PPC (1)</a:t>
             </a:r>
             <a:endParaRPr lang="en-US" sz="1200" dirty="0"/>
           </a:p>
@@ -8794,7 +9173,7 @@
                 <a:ea typeface="Arial" pitchFamily="34" charset="-122"/>
                 <a:cs typeface="Arial" pitchFamily="34" charset="-120"/>
               </a:rPr>
-              <a:t>Видеограф — макс. из 5</a:t>
+              <a:t>Трафик менеджер — макс. из 2</a:t>
             </a:r>
             <a:endParaRPr lang="en-US" sz="1100" dirty="0"/>
           </a:p>
@@ -8833,7 +9212,7 @@
                 <a:ea typeface="Arial" pitchFamily="34" charset="-122"/>
                 <a:cs typeface="Arial" pitchFamily="34" charset="-120"/>
               </a:rPr>
-              <a:t>1 498 769 ₸</a:t>
+              <a:t>1 124 000 ₸</a:t>
             </a:r>
             <a:endParaRPr lang="en-US" sz="1300" dirty="0"/>
           </a:p>
@@ -8897,7 +9276,7 @@
                 <a:ea typeface="Arial" pitchFamily="34" charset="-122"/>
                 <a:cs typeface="Arial" pitchFamily="34" charset="-120"/>
               </a:rPr>
-              <a:t>PPC (1)</a:t>
+              <a:t>CVM (?) — планируемая позиция</a:t>
             </a:r>
             <a:endParaRPr lang="en-US" sz="1200" dirty="0"/>
           </a:p>
@@ -8936,7 +9315,7 @@
                 <a:ea typeface="Arial" pitchFamily="34" charset="-122"/>
                 <a:cs typeface="Arial" pitchFamily="34" charset="-120"/>
               </a:rPr>
-              <a:t>Трафик менеджер — макс. из 2</a:t>
+              <a:t>CVM ≈ CRM менеджер</a:t>
             </a:r>
             <a:endParaRPr lang="en-US" sz="1100" dirty="0"/>
           </a:p>
@@ -8975,7 +9354,7 @@
                 <a:ea typeface="Arial" pitchFamily="34" charset="-122"/>
                 <a:cs typeface="Arial" pitchFamily="34" charset="-120"/>
               </a:rPr>
-              <a:t>1 124 000 ₸</a:t>
+              <a:t>867 456 ₸</a:t>
             </a:r>
             <a:endParaRPr lang="en-US" sz="1300" dirty="0"/>
           </a:p>
@@ -8983,51 +9362,46 @@
       </p:sp>
       <p:sp>
         <p:nvSpPr>
-          <p:cNvPr id="28" name="Shape 26"/>
-          <p:cNvSpPr/>
-          <p:nvPr/>
-        </p:nvSpPr>
-        <p:spPr>
-          <a:xfrm>
-            <a:off x="548640" y="4690872"/>
-            <a:ext cx="11091672" cy="548640"/>
-          </a:xfrm>
-          <a:prstGeom prst="rect">
-            <a:avLst/>
-          </a:prstGeom>
-          <a:solidFill>
-            <a:srgbClr val="FFFFFF"/>
-          </a:solidFill>
-          <a:ln w="6350">
-            <a:solidFill>
-              <a:srgbClr val="C7D8EE"/>
-            </a:solidFill>
-            <a:prstDash val="solid"/>
-          </a:ln>
-        </p:spPr>
-      </p:sp>
-      <p:sp>
-        <p:nvSpPr>
-          <p:cNvPr id="29" name="Text 27"/>
-          <p:cNvSpPr/>
-          <p:nvPr/>
-        </p:nvSpPr>
-        <p:spPr>
-          <a:xfrm>
-            <a:off x="777240" y="4690872"/>
-            <a:ext cx="4937760" cy="548640"/>
-          </a:xfrm>
-          <a:prstGeom prst="rect">
-            <a:avLst/>
-          </a:prstGeom>
-          <a:noFill/>
-          <a:ln/>
-        </p:spPr>
-        <p:txBody>
-          <a:bodyPr wrap="square" lIns="0" tIns="0" rIns="0" bIns="0" rtlCol="0" anchor="ctr"/>
+          <p:cNvPr id="28" name="Text 26"/>
+          <p:cNvSpPr/>
+          <p:nvPr/>
+        </p:nvSpPr>
+        <p:spPr>
+          <a:xfrm>
+            <a:off x="548640" y="4965192"/>
+            <a:ext cx="11091672" cy="731520"/>
+          </a:xfrm>
+          <a:prstGeom prst="rect">
+            <a:avLst/>
+          </a:prstGeom>
+          <a:noFill/>
+          <a:ln/>
+        </p:spPr>
+        <p:txBody>
+          <a:bodyPr wrap="square" lIns="0" tIns="0" rIns="0" bIns="0" rtlCol="0" anchor="t"/>
           <a:lstStyle/>
           <a:p>
             <a:pPr algn="l" indent="0" marL="0">
+              <a:lnSpc>
+                <a:spcPct val="115000"/>
+              </a:lnSpc>
+              <a:buNone/>
+            </a:pPr>
+            <a:r>
+              <a:rPr lang="en-US" sz="1200" b="1" dirty="0">
+                <a:solidFill>
+                  <a:srgbClr val="1F3A5F"/>
+                </a:solidFill>
+                <a:latin typeface="Arial" pitchFamily="34" charset="0"/>
+                <a:ea typeface="Arial" pitchFamily="34" charset="-122"/>
+                <a:cs typeface="Arial" pitchFamily="34" charset="-120"/>
+              </a:rPr>
+              <a:t>Как считалось.  </a:t>
+            </a:r>
+            <a:pPr algn="l" indent="0" marL="0">
+              <a:lnSpc>
+                <a:spcPct val="115000"/>
+              </a:lnSpc>
               <a:buNone/>
             </a:pPr>
             <a:r>
@@ -9039,144 +9413,7 @@
                 <a:ea typeface="Arial" pitchFamily="34" charset="-122"/>
                 <a:cs typeface="Arial" pitchFamily="34" charset="-120"/>
               </a:rPr>
-              <a:t>CVM (?) — планируемая позиция</a:t>
-            </a:r>
-            <a:endParaRPr lang="en-US" sz="1200" dirty="0"/>
-          </a:p>
-        </p:txBody>
-      </p:sp>
-      <p:sp>
-        <p:nvSpPr>
-          <p:cNvPr id="30" name="Text 28"/>
-          <p:cNvSpPr/>
-          <p:nvPr/>
-        </p:nvSpPr>
-        <p:spPr>
-          <a:xfrm>
-            <a:off x="5852160" y="4690872"/>
-            <a:ext cx="4206240" cy="548640"/>
-          </a:xfrm>
-          <a:prstGeom prst="rect">
-            <a:avLst/>
-          </a:prstGeom>
-          <a:noFill/>
-          <a:ln/>
-        </p:spPr>
-        <p:txBody>
-          <a:bodyPr wrap="square" lIns="0" tIns="0" rIns="0" bIns="0" rtlCol="0" anchor="ctr"/>
-          <a:lstStyle/>
-          <a:p>
-            <a:pPr algn="l" indent="0" marL="0">
-              <a:buNone/>
-            </a:pPr>
-            <a:r>
-              <a:rPr lang="en-US" sz="1100" i="1" dirty="0">
-                <a:solidFill>
-                  <a:srgbClr val="5B6B7C"/>
-                </a:solidFill>
-                <a:latin typeface="Arial" pitchFamily="34" charset="0"/>
-                <a:ea typeface="Arial" pitchFamily="34" charset="-122"/>
-                <a:cs typeface="Arial" pitchFamily="34" charset="-120"/>
-              </a:rPr>
-              <a:t>CVM ≈ CRM менеджер</a:t>
-            </a:r>
-            <a:endParaRPr lang="en-US" sz="1100" dirty="0"/>
-          </a:p>
-        </p:txBody>
-      </p:sp>
-      <p:sp>
-        <p:nvSpPr>
-          <p:cNvPr id="31" name="Text 29"/>
-          <p:cNvSpPr/>
-          <p:nvPr/>
-        </p:nvSpPr>
-        <p:spPr>
-          <a:xfrm>
-            <a:off x="9171432" y="4690872"/>
-            <a:ext cx="2286000" cy="548640"/>
-          </a:xfrm>
-          <a:prstGeom prst="rect">
-            <a:avLst/>
-          </a:prstGeom>
-          <a:noFill/>
-          <a:ln/>
-        </p:spPr>
-        <p:txBody>
-          <a:bodyPr wrap="square" lIns="0" tIns="0" rIns="0" bIns="0" rtlCol="0" anchor="ctr"/>
-          <a:lstStyle/>
-          <a:p>
-            <a:pPr algn="r" indent="0" marL="0">
-              <a:buNone/>
-            </a:pPr>
-            <a:r>
-              <a:rPr lang="en-US" sz="1300" b="1" dirty="0">
-                <a:solidFill>
-                  <a:srgbClr val="B45309"/>
-                </a:solidFill>
-                <a:latin typeface="Arial" pitchFamily="34" charset="0"/>
-                <a:ea typeface="Arial" pitchFamily="34" charset="-122"/>
-                <a:cs typeface="Arial" pitchFamily="34" charset="-120"/>
-              </a:rPr>
-              <a:t>867 456 ₸</a:t>
-            </a:r>
-            <a:endParaRPr lang="en-US" sz="1300" dirty="0"/>
-          </a:p>
-        </p:txBody>
-      </p:sp>
-      <p:sp>
-        <p:nvSpPr>
-          <p:cNvPr id="32" name="Text 30"/>
-          <p:cNvSpPr/>
-          <p:nvPr/>
-        </p:nvSpPr>
-        <p:spPr>
-          <a:xfrm>
-            <a:off x="548640" y="5513832"/>
-            <a:ext cx="11091672" cy="731520"/>
-          </a:xfrm>
-          <a:prstGeom prst="rect">
-            <a:avLst/>
-          </a:prstGeom>
-          <a:noFill/>
-          <a:ln/>
-        </p:spPr>
-        <p:txBody>
-          <a:bodyPr wrap="square" lIns="0" tIns="0" rIns="0" bIns="0" rtlCol="0" anchor="t"/>
-          <a:lstStyle/>
-          <a:p>
-            <a:pPr algn="l" indent="0" marL="0">
-              <a:lnSpc>
-                <a:spcPct val="115000"/>
-              </a:lnSpc>
-              <a:buNone/>
-            </a:pPr>
-            <a:r>
-              <a:rPr lang="en-US" sz="1200" b="1" dirty="0">
-                <a:solidFill>
-                  <a:srgbClr val="1F3A5F"/>
-                </a:solidFill>
-                <a:latin typeface="Arial" pitchFamily="34" charset="0"/>
-                <a:ea typeface="Arial" pitchFamily="34" charset="-122"/>
-                <a:cs typeface="Arial" pitchFamily="34" charset="-120"/>
-              </a:rPr>
-              <a:t>Как считалось.  </a:t>
-            </a:r>
-            <a:pPr algn="l" indent="0" marL="0">
-              <a:lnSpc>
-                <a:spcPct val="115000"/>
-              </a:lnSpc>
-              <a:buNone/>
-            </a:pPr>
-            <a:r>
-              <a:rPr lang="en-US" sz="1200" dirty="0">
-                <a:solidFill>
-                  <a:srgbClr val="1F2A37"/>
-                </a:solidFill>
-                <a:latin typeface="Arial" pitchFamily="34" charset="0"/>
-                <a:ea typeface="Arial" pitchFamily="34" charset="-122"/>
-                <a:cs typeface="Arial" pitchFamily="34" charset="-120"/>
-              </a:rPr>
-              <a:t>ФОТ отдела = сумма должностных окладов (тотал) всех позиций отдела, включая руководителя. Суммы взяты из Excel; руководители и senior-роли — из отдельного блока стоимостей. Итог по 4 отделам: 44 050 321 ₸ в месяц.</a:t>
+              <a:t>ФОТ отдела = сумма должностных окладов (тотал) всех позиций отдела, включая руководителя. Суммы взяты из Excel; руководители и senior-роли — из отдельного блока стоимостей. Итог по 4 отделам: 41 133 731 ₸ в месяц.</a:t>
             </a:r>
             <a:endParaRPr lang="en-US" sz="1200" dirty="0"/>
           </a:p>

--- a/Структура маркетинга — отделы и ФОТ.pptx
+++ b/Структура маркетинга — отделы и ФОТ.pptx
@@ -2946,13 +2946,91 @@
       </p:sp>
       <p:sp>
         <p:nvSpPr>
-          <p:cNvPr id="15" name="Shape 13"/>
-          <p:cNvSpPr/>
-          <p:nvPr/>
-        </p:nvSpPr>
-        <p:spPr>
-          <a:xfrm>
-            <a:off x="457200" y="2340864"/>
+          <p:cNvPr id="15" name="Text 13"/>
+          <p:cNvSpPr/>
+          <p:nvPr/>
+        </p:nvSpPr>
+        <p:spPr>
+          <a:xfrm>
+            <a:off x="457200" y="2359152"/>
+            <a:ext cx="1691640" cy="201168"/>
+          </a:xfrm>
+          <a:prstGeom prst="rect">
+            <a:avLst/>
+          </a:prstGeom>
+          <a:noFill/>
+          <a:ln/>
+        </p:spPr>
+        <p:txBody>
+          <a:bodyPr wrap="square" lIns="0" tIns="0" rIns="0" bIns="0" rtlCol="0" anchor="ctr"/>
+          <a:lstStyle/>
+          <a:p>
+            <a:pPr algn="ctr" indent="0" marL="0">
+              <a:buNone/>
+            </a:pPr>
+            <a:r>
+              <a:rPr lang="en-US" sz="900" b="1" dirty="0">
+                <a:solidFill>
+                  <a:srgbClr val="5B6B7C"/>
+                </a:solidFill>
+                <a:latin typeface="Arial" pitchFamily="34" charset="0"/>
+                <a:ea typeface="Arial" pitchFamily="34" charset="-122"/>
+                <a:cs typeface="Arial" pitchFamily="34" charset="-120"/>
+              </a:rPr>
+              <a:t>Originals</a:t>
+            </a:r>
+            <a:endParaRPr lang="en-US" sz="900" dirty="0"/>
+          </a:p>
+        </p:txBody>
+      </p:sp>
+      <p:sp>
+        <p:nvSpPr>
+          <p:cNvPr id="16" name="Text 14"/>
+          <p:cNvSpPr/>
+          <p:nvPr/>
+        </p:nvSpPr>
+        <p:spPr>
+          <a:xfrm>
+            <a:off x="2258568" y="2359152"/>
+            <a:ext cx="1691640" cy="201168"/>
+          </a:xfrm>
+          <a:prstGeom prst="rect">
+            <a:avLst/>
+          </a:prstGeom>
+          <a:noFill/>
+          <a:ln/>
+        </p:spPr>
+        <p:txBody>
+          <a:bodyPr wrap="square" lIns="0" tIns="0" rIns="0" bIns="0" rtlCol="0" anchor="ctr"/>
+          <a:lstStyle/>
+          <a:p>
+            <a:pPr algn="ctr" indent="0" marL="0">
+              <a:buNone/>
+            </a:pPr>
+            <a:r>
+              <a:rPr lang="en-US" sz="900" b="1" dirty="0">
+                <a:solidFill>
+                  <a:srgbClr val="5B6B7C"/>
+                </a:solidFill>
+                <a:latin typeface="Arial" pitchFamily="34" charset="0"/>
+                <a:ea typeface="Arial" pitchFamily="34" charset="-122"/>
+                <a:cs typeface="Arial" pitchFamily="34" charset="-120"/>
+              </a:rPr>
+              <a:t>Sport</a:t>
+            </a:r>
+            <a:endParaRPr lang="en-US" sz="900" dirty="0"/>
+          </a:p>
+        </p:txBody>
+      </p:sp>
+      <p:sp>
+        <p:nvSpPr>
+          <p:cNvPr id="17" name="Shape 15"/>
+          <p:cNvSpPr/>
+          <p:nvPr/>
+        </p:nvSpPr>
+        <p:spPr>
+          <a:xfrm>
+            <a:off x="457200" y="2615184"/>
             <a:ext cx="1691640" cy="932688"/>
           </a:xfrm>
           <a:prstGeom prst="roundRect">
@@ -2980,13 +3058,13 @@
       </p:sp>
       <p:sp>
         <p:nvSpPr>
-          <p:cNvPr id="16" name="Text 14"/>
-          <p:cNvSpPr/>
-          <p:nvPr/>
-        </p:nvSpPr>
-        <p:spPr>
-          <a:xfrm>
-            <a:off x="530352" y="2386584"/>
+          <p:cNvPr id="18" name="Text 16"/>
+          <p:cNvSpPr/>
+          <p:nvPr/>
+        </p:nvSpPr>
+        <p:spPr>
+          <a:xfrm>
+            <a:off x="530352" y="2660904"/>
             <a:ext cx="1545336" cy="841248"/>
           </a:xfrm>
           <a:prstGeom prst="rect">
@@ -3062,13 +3140,13 @@
       </p:sp>
       <p:sp>
         <p:nvSpPr>
-          <p:cNvPr id="17" name="Shape 15"/>
-          <p:cNvSpPr/>
-          <p:nvPr/>
-        </p:nvSpPr>
-        <p:spPr>
-          <a:xfrm>
-            <a:off x="457200" y="3364992"/>
+          <p:cNvPr id="19" name="Shape 17"/>
+          <p:cNvSpPr/>
+          <p:nvPr/>
+        </p:nvSpPr>
+        <p:spPr>
+          <a:xfrm>
+            <a:off x="457200" y="3639312"/>
             <a:ext cx="1691640" cy="932688"/>
           </a:xfrm>
           <a:prstGeom prst="roundRect">
@@ -3096,13 +3174,13 @@
       </p:sp>
       <p:sp>
         <p:nvSpPr>
-          <p:cNvPr id="18" name="Text 16"/>
-          <p:cNvSpPr/>
-          <p:nvPr/>
-        </p:nvSpPr>
-        <p:spPr>
-          <a:xfrm>
-            <a:off x="530352" y="3410712"/>
+          <p:cNvPr id="20" name="Text 18"/>
+          <p:cNvSpPr/>
+          <p:nvPr/>
+        </p:nvSpPr>
+        <p:spPr>
+          <a:xfrm>
+            <a:off x="530352" y="3685032"/>
             <a:ext cx="1545336" cy="841248"/>
           </a:xfrm>
           <a:prstGeom prst="rect">
@@ -3178,13 +3256,13 @@
       </p:sp>
       <p:sp>
         <p:nvSpPr>
-          <p:cNvPr id="19" name="Shape 17"/>
-          <p:cNvSpPr/>
-          <p:nvPr/>
-        </p:nvSpPr>
-        <p:spPr>
-          <a:xfrm>
-            <a:off x="457200" y="4389120"/>
+          <p:cNvPr id="21" name="Shape 19"/>
+          <p:cNvSpPr/>
+          <p:nvPr/>
+        </p:nvSpPr>
+        <p:spPr>
+          <a:xfrm>
+            <a:off x="457200" y="4663440"/>
             <a:ext cx="1691640" cy="932688"/>
           </a:xfrm>
           <a:prstGeom prst="roundRect">
@@ -3212,13 +3290,13 @@
       </p:sp>
       <p:sp>
         <p:nvSpPr>
-          <p:cNvPr id="20" name="Text 18"/>
-          <p:cNvSpPr/>
-          <p:nvPr/>
-        </p:nvSpPr>
-        <p:spPr>
-          <a:xfrm>
-            <a:off x="530352" y="4434840"/>
+          <p:cNvPr id="22" name="Text 20"/>
+          <p:cNvSpPr/>
+          <p:nvPr/>
+        </p:nvSpPr>
+        <p:spPr>
+          <a:xfrm>
+            <a:off x="530352" y="4709160"/>
             <a:ext cx="1545336" cy="841248"/>
           </a:xfrm>
           <a:prstGeom prst="rect">
@@ -3294,13 +3372,13 @@
       </p:sp>
       <p:sp>
         <p:nvSpPr>
-          <p:cNvPr id="21" name="Shape 19"/>
-          <p:cNvSpPr/>
-          <p:nvPr/>
-        </p:nvSpPr>
-        <p:spPr>
-          <a:xfrm>
-            <a:off x="2258568" y="2340864"/>
+          <p:cNvPr id="23" name="Shape 21"/>
+          <p:cNvSpPr/>
+          <p:nvPr/>
+        </p:nvSpPr>
+        <p:spPr>
+          <a:xfrm>
+            <a:off x="457200" y="5687568"/>
             <a:ext cx="1691640" cy="932688"/>
           </a:xfrm>
           <a:prstGeom prst="roundRect">
@@ -3328,13 +3406,13 @@
       </p:sp>
       <p:sp>
         <p:nvSpPr>
-          <p:cNvPr id="22" name="Text 20"/>
-          <p:cNvSpPr/>
-          <p:nvPr/>
-        </p:nvSpPr>
-        <p:spPr>
-          <a:xfrm>
-            <a:off x="2331720" y="2386584"/>
+          <p:cNvPr id="24" name="Text 22"/>
+          <p:cNvSpPr/>
+          <p:nvPr/>
+        </p:nvSpPr>
+        <p:spPr>
+          <a:xfrm>
+            <a:off x="530352" y="5733288"/>
             <a:ext cx="1545336" cy="841248"/>
           </a:xfrm>
           <a:prstGeom prst="rect">
@@ -3362,7 +3440,7 @@
                 <a:ea typeface="Arial" pitchFamily="34" charset="-122"/>
                 <a:cs typeface="Arial" pitchFamily="34" charset="-120"/>
               </a:rPr>
-              <a:t>Promo · Александр К</a:t>
+              <a:t>Promo · Аяулым</a:t>
             </a:r>
             <a:endParaRPr lang="en-US" sz="945" dirty="0"/>
           </a:p>
@@ -3382,7 +3460,7 @@
                 <a:ea typeface="Arial" pitchFamily="34" charset="-122"/>
                 <a:cs typeface="Arial" pitchFamily="34" charset="-120"/>
               </a:rPr>
-              <a:t>Казачков Александр</a:t>
+              <a:t>Иманбаева Аяулым Маратовна</a:t>
             </a:r>
             <a:endParaRPr lang="en-US" sz="945" dirty="0"/>
           </a:p>
@@ -3402,7 +3480,7 @@
                 <a:ea typeface="Arial" pitchFamily="34" charset="-122"/>
                 <a:cs typeface="Arial" pitchFamily="34" charset="-120"/>
               </a:rPr>
-              <a:t>800 000 ₸</a:t>
+              <a:t>1 000 162 ₸</a:t>
             </a:r>
             <a:endParaRPr lang="en-US" sz="945" dirty="0"/>
           </a:p>
@@ -3410,13 +3488,13 @@
       </p:sp>
       <p:sp>
         <p:nvSpPr>
-          <p:cNvPr id="23" name="Shape 21"/>
-          <p:cNvSpPr/>
-          <p:nvPr/>
-        </p:nvSpPr>
-        <p:spPr>
-          <a:xfrm>
-            <a:off x="2258568" y="3364992"/>
+          <p:cNvPr id="25" name="Shape 23"/>
+          <p:cNvSpPr/>
+          <p:nvPr/>
+        </p:nvSpPr>
+        <p:spPr>
+          <a:xfrm>
+            <a:off x="2258568" y="2615184"/>
             <a:ext cx="1691640" cy="932688"/>
           </a:xfrm>
           <a:prstGeom prst="roundRect">
@@ -3444,13 +3522,13 @@
       </p:sp>
       <p:sp>
         <p:nvSpPr>
-          <p:cNvPr id="24" name="Text 22"/>
-          <p:cNvSpPr/>
-          <p:nvPr/>
-        </p:nvSpPr>
-        <p:spPr>
-          <a:xfrm>
-            <a:off x="2331720" y="3410712"/>
+          <p:cNvPr id="26" name="Text 24"/>
+          <p:cNvSpPr/>
+          <p:nvPr/>
+        </p:nvSpPr>
+        <p:spPr>
+          <a:xfrm>
+            <a:off x="2331720" y="2660904"/>
             <a:ext cx="1545336" cy="841248"/>
           </a:xfrm>
           <a:prstGeom prst="rect">
@@ -3478,7 +3556,7 @@
                 <a:ea typeface="Arial" pitchFamily="34" charset="-122"/>
                 <a:cs typeface="Arial" pitchFamily="34" charset="-120"/>
               </a:rPr>
-              <a:t>Promo · Яков</a:t>
+              <a:t>Promo · Александр К</a:t>
             </a:r>
             <a:endParaRPr lang="en-US" sz="945" dirty="0"/>
           </a:p>
@@ -3498,7 +3576,7 @@
                 <a:ea typeface="Arial" pitchFamily="34" charset="-122"/>
                 <a:cs typeface="Arial" pitchFamily="34" charset="-120"/>
               </a:rPr>
-              <a:t>Сорокин Яков Андреевич</a:t>
+              <a:t>Казачков Александр</a:t>
             </a:r>
             <a:endParaRPr lang="en-US" sz="945" dirty="0"/>
           </a:p>
@@ -3518,7 +3596,7 @@
                 <a:ea typeface="Arial" pitchFamily="34" charset="-122"/>
                 <a:cs typeface="Arial" pitchFamily="34" charset="-120"/>
               </a:rPr>
-              <a:t>614 931 ₸</a:t>
+              <a:t>800 000 ₸</a:t>
             </a:r>
             <a:endParaRPr lang="en-US" sz="945" dirty="0"/>
           </a:p>
@@ -3526,13 +3604,13 @@
       </p:sp>
       <p:sp>
         <p:nvSpPr>
-          <p:cNvPr id="25" name="Shape 23"/>
-          <p:cNvSpPr/>
-          <p:nvPr/>
-        </p:nvSpPr>
-        <p:spPr>
-          <a:xfrm>
-            <a:off x="2258568" y="4389120"/>
+          <p:cNvPr id="27" name="Shape 25"/>
+          <p:cNvSpPr/>
+          <p:nvPr/>
+        </p:nvSpPr>
+        <p:spPr>
+          <a:xfrm>
+            <a:off x="2258568" y="3639312"/>
             <a:ext cx="1691640" cy="932688"/>
           </a:xfrm>
           <a:prstGeom prst="roundRect">
@@ -3560,13 +3638,13 @@
       </p:sp>
       <p:sp>
         <p:nvSpPr>
-          <p:cNvPr id="26" name="Text 24"/>
-          <p:cNvSpPr/>
-          <p:nvPr/>
-        </p:nvSpPr>
-        <p:spPr>
-          <a:xfrm>
-            <a:off x="2331720" y="4434840"/>
+          <p:cNvPr id="28" name="Text 26"/>
+          <p:cNvSpPr/>
+          <p:nvPr/>
+        </p:nvSpPr>
+        <p:spPr>
+          <a:xfrm>
+            <a:off x="2331720" y="3685032"/>
             <a:ext cx="1545336" cy="841248"/>
           </a:xfrm>
           <a:prstGeom prst="rect">
@@ -3594,7 +3672,7 @@
                 <a:ea typeface="Arial" pitchFamily="34" charset="-122"/>
                 <a:cs typeface="Arial" pitchFamily="34" charset="-120"/>
               </a:rPr>
-              <a:t>Promo · Аяулым</a:t>
+              <a:t>Promo · Яков</a:t>
             </a:r>
             <a:endParaRPr lang="en-US" sz="945" dirty="0"/>
           </a:p>
@@ -3614,7 +3692,7 @@
                 <a:ea typeface="Arial" pitchFamily="34" charset="-122"/>
                 <a:cs typeface="Arial" pitchFamily="34" charset="-120"/>
               </a:rPr>
-              <a:t>Иманбаева Аяулым Маратовна</a:t>
+              <a:t>Сорокин Яков Андреевич</a:t>
             </a:r>
             <a:endParaRPr lang="en-US" sz="945" dirty="0"/>
           </a:p>
@@ -3634,7 +3712,7 @@
                 <a:ea typeface="Arial" pitchFamily="34" charset="-122"/>
                 <a:cs typeface="Arial" pitchFamily="34" charset="-120"/>
               </a:rPr>
-              <a:t>1 000 162 ₸</a:t>
+              <a:t>614 931 ₸</a:t>
             </a:r>
             <a:endParaRPr lang="en-US" sz="945" dirty="0"/>
           </a:p>
@@ -3642,7 +3720,7 @@
       </p:sp>
       <p:sp>
         <p:nvSpPr>
-          <p:cNvPr id="27" name="Shape 25"/>
+          <p:cNvPr id="29" name="Shape 27"/>
           <p:cNvSpPr/>
           <p:nvPr/>
         </p:nvSpPr>
@@ -3676,7 +3754,7 @@
       </p:sp>
       <p:sp>
         <p:nvSpPr>
-          <p:cNvPr id="28" name="Text 26"/>
+          <p:cNvPr id="30" name="Text 28"/>
           <p:cNvSpPr/>
           <p:nvPr/>
         </p:nvSpPr>
@@ -3758,7 +3836,7 @@
       </p:sp>
       <p:sp>
         <p:nvSpPr>
-          <p:cNvPr id="29" name="Text 27"/>
+          <p:cNvPr id="31" name="Text 29"/>
           <p:cNvSpPr/>
           <p:nvPr/>
         </p:nvSpPr>
@@ -3797,7 +3875,7 @@
       </p:sp>
       <p:sp>
         <p:nvSpPr>
-          <p:cNvPr id="30" name="Text 28"/>
+          <p:cNvPr id="32" name="Text 30"/>
           <p:cNvSpPr/>
           <p:nvPr/>
         </p:nvSpPr>
@@ -3836,7 +3914,7 @@
       </p:sp>
       <p:sp>
         <p:nvSpPr>
-          <p:cNvPr id="31" name="Text 29"/>
+          <p:cNvPr id="33" name="Text 31"/>
           <p:cNvSpPr/>
           <p:nvPr/>
         </p:nvSpPr>
@@ -3875,7 +3953,7 @@
       </p:sp>
       <p:sp>
         <p:nvSpPr>
-          <p:cNvPr id="32" name="Shape 30"/>
+          <p:cNvPr id="34" name="Shape 32"/>
           <p:cNvSpPr/>
           <p:nvPr/>
         </p:nvSpPr>
@@ -3898,7 +3976,7 @@
       </p:sp>
       <p:sp>
         <p:nvSpPr>
-          <p:cNvPr id="33" name="Shape 31"/>
+          <p:cNvPr id="35" name="Shape 33"/>
           <p:cNvSpPr/>
           <p:nvPr/>
         </p:nvSpPr>
@@ -3921,7 +3999,7 @@
       </p:sp>
       <p:sp>
         <p:nvSpPr>
-          <p:cNvPr id="34" name="Shape 32"/>
+          <p:cNvPr id="36" name="Shape 34"/>
           <p:cNvSpPr/>
           <p:nvPr/>
         </p:nvSpPr>
@@ -3944,7 +4022,7 @@
       </p:sp>
       <p:sp>
         <p:nvSpPr>
-          <p:cNvPr id="35" name="Shape 33"/>
+          <p:cNvPr id="37" name="Shape 35"/>
           <p:cNvSpPr/>
           <p:nvPr/>
         </p:nvSpPr>
@@ -3967,7 +4045,7 @@
       </p:sp>
       <p:sp>
         <p:nvSpPr>
-          <p:cNvPr id="36" name="Shape 34"/>
+          <p:cNvPr id="38" name="Shape 36"/>
           <p:cNvSpPr/>
           <p:nvPr/>
         </p:nvSpPr>
@@ -3990,7 +4068,7 @@
       </p:sp>
       <p:sp>
         <p:nvSpPr>
-          <p:cNvPr id="37" name="Shape 35"/>
+          <p:cNvPr id="39" name="Shape 37"/>
           <p:cNvSpPr/>
           <p:nvPr/>
         </p:nvSpPr>
@@ -4024,7 +4102,7 @@
       </p:sp>
       <p:sp>
         <p:nvSpPr>
-          <p:cNvPr id="38" name="Text 36"/>
+          <p:cNvPr id="40" name="Text 38"/>
           <p:cNvSpPr/>
           <p:nvPr/>
         </p:nvSpPr>
@@ -4106,7 +4184,7 @@
       </p:sp>
       <p:sp>
         <p:nvSpPr>
-          <p:cNvPr id="39" name="Shape 37"/>
+          <p:cNvPr id="41" name="Shape 39"/>
           <p:cNvSpPr/>
           <p:nvPr/>
         </p:nvSpPr>
@@ -4140,7 +4218,7 @@
       </p:sp>
       <p:sp>
         <p:nvSpPr>
-          <p:cNvPr id="40" name="Text 38"/>
+          <p:cNvPr id="42" name="Text 40"/>
           <p:cNvSpPr/>
           <p:nvPr/>
         </p:nvSpPr>
@@ -4222,7 +4300,7 @@
       </p:sp>
       <p:sp>
         <p:nvSpPr>
-          <p:cNvPr id="41" name="Shape 39"/>
+          <p:cNvPr id="43" name="Shape 41"/>
           <p:cNvSpPr/>
           <p:nvPr/>
         </p:nvSpPr>
@@ -4256,7 +4334,7 @@
       </p:sp>
       <p:sp>
         <p:nvSpPr>
-          <p:cNvPr id="42" name="Text 40"/>
+          <p:cNvPr id="44" name="Text 42"/>
           <p:cNvSpPr/>
           <p:nvPr/>
         </p:nvSpPr>
@@ -4338,7 +4416,7 @@
       </p:sp>
       <p:sp>
         <p:nvSpPr>
-          <p:cNvPr id="43" name="Shape 41"/>
+          <p:cNvPr id="45" name="Shape 43"/>
           <p:cNvSpPr/>
           <p:nvPr/>
         </p:nvSpPr>
@@ -4372,7 +4450,7 @@
       </p:sp>
       <p:sp>
         <p:nvSpPr>
-          <p:cNvPr id="44" name="Text 42"/>
+          <p:cNvPr id="46" name="Text 44"/>
           <p:cNvSpPr/>
           <p:nvPr/>
         </p:nvSpPr>
@@ -4454,7 +4532,7 @@
       </p:sp>
       <p:sp>
         <p:nvSpPr>
-          <p:cNvPr id="45" name="Shape 43"/>
+          <p:cNvPr id="47" name="Shape 45"/>
           <p:cNvSpPr/>
           <p:nvPr/>
         </p:nvSpPr>
@@ -4488,7 +4566,7 @@
       </p:sp>
       <p:sp>
         <p:nvSpPr>
-          <p:cNvPr id="46" name="Text 44"/>
+          <p:cNvPr id="48" name="Text 46"/>
           <p:cNvSpPr/>
           <p:nvPr/>
         </p:nvSpPr>
@@ -4570,7 +4648,7 @@
       </p:sp>
       <p:sp>
         <p:nvSpPr>
-          <p:cNvPr id="47" name="Shape 45"/>
+          <p:cNvPr id="49" name="Shape 47"/>
           <p:cNvSpPr/>
           <p:nvPr/>
         </p:nvSpPr>
@@ -4604,7 +4682,7 @@
       </p:sp>
       <p:sp>
         <p:nvSpPr>
-          <p:cNvPr id="48" name="Text 46"/>
+          <p:cNvPr id="50" name="Text 48"/>
           <p:cNvSpPr/>
           <p:nvPr/>
         </p:nvSpPr>

--- a/Структура маркетинга — отделы и ФОТ.pptx
+++ b/Структура маркетинга — отделы и ФОТ.pptx
@@ -4925,12 +4925,12 @@
         </p:nvSpPr>
         <p:spPr>
           <a:xfrm>
-            <a:off x="3991356" y="1417320"/>
-            <a:ext cx="4206240" cy="841248"/>
+            <a:off x="3991356" y="1051560"/>
+            <a:ext cx="4206240" cy="731520"/>
           </a:xfrm>
           <a:prstGeom prst="roundRect">
             <a:avLst>
-              <a:gd name="adj" fmla="val 6522"/>
+              <a:gd name="adj" fmla="val 7500"/>
             </a:avLst>
           </a:prstGeom>
           <a:solidFill>
@@ -4959,8 +4959,8 @@
         </p:nvSpPr>
         <p:spPr>
           <a:xfrm>
-            <a:off x="4064508" y="1463040"/>
-            <a:ext cx="4059936" cy="749808"/>
+            <a:off x="4064508" y="1097280"/>
+            <a:ext cx="4059936" cy="640080"/>
           </a:xfrm>
           <a:prstGeom prst="rect">
             <a:avLst/>
@@ -5041,8 +5041,8 @@
         </p:nvSpPr>
         <p:spPr>
           <a:xfrm>
-            <a:off x="6094476" y="2258568"/>
-            <a:ext cx="0" cy="987552"/>
+            <a:off x="6094476" y="1783080"/>
+            <a:ext cx="0" cy="182880"/>
           </a:xfrm>
           <a:prstGeom prst="line">
             <a:avLst/>
@@ -5064,8 +5064,8 @@
         </p:nvSpPr>
         <p:spPr>
           <a:xfrm>
-            <a:off x="1482242" y="3246120"/>
-            <a:ext cx="9224467" cy="0"/>
+            <a:off x="2702052" y="1965960"/>
+            <a:ext cx="6784848" cy="0"/>
           </a:xfrm>
           <a:prstGeom prst="line">
             <a:avLst/>
@@ -5087,7 +5087,7 @@
         </p:nvSpPr>
         <p:spPr>
           <a:xfrm>
-            <a:off x="1482242" y="3246120"/>
+            <a:off x="2702052" y="1965960"/>
             <a:ext cx="0" cy="411480"/>
           </a:xfrm>
           <a:prstGeom prst="line">
@@ -5110,12 +5110,12 @@
         </p:nvSpPr>
         <p:spPr>
           <a:xfrm>
-            <a:off x="457200" y="3657600"/>
-            <a:ext cx="2050085" cy="1554480"/>
+            <a:off x="1280160" y="2377440"/>
+            <a:ext cx="2843784" cy="1234440"/>
           </a:xfrm>
           <a:prstGeom prst="roundRect">
             <a:avLst>
-              <a:gd name="adj" fmla="val 3529"/>
+              <a:gd name="adj" fmla="val 4444"/>
             </a:avLst>
           </a:prstGeom>
           <a:solidFill>
@@ -5144,8 +5144,8 @@
         </p:nvSpPr>
         <p:spPr>
           <a:xfrm>
-            <a:off x="530352" y="3703320"/>
-            <a:ext cx="1903781" cy="1463040"/>
+            <a:off x="1353312" y="2423160"/>
+            <a:ext cx="2697480" cy="1143000"/>
           </a:xfrm>
           <a:prstGeom prst="rect">
             <a:avLst/>
@@ -5226,7 +5226,7 @@
         </p:nvSpPr>
         <p:spPr>
           <a:xfrm>
-            <a:off x="3788359" y="3246120"/>
+            <a:off x="6094476" y="1965960"/>
             <a:ext cx="0" cy="411480"/>
           </a:xfrm>
           <a:prstGeom prst="line">
@@ -5249,12 +5249,12 @@
         </p:nvSpPr>
         <p:spPr>
           <a:xfrm>
-            <a:off x="2763317" y="3657600"/>
-            <a:ext cx="2050085" cy="1554480"/>
+            <a:off x="4672584" y="2377440"/>
+            <a:ext cx="2843784" cy="1234440"/>
           </a:xfrm>
           <a:prstGeom prst="roundRect">
             <a:avLst>
-              <a:gd name="adj" fmla="val 3529"/>
+              <a:gd name="adj" fmla="val 4444"/>
             </a:avLst>
           </a:prstGeom>
           <a:solidFill>
@@ -5283,8 +5283,8 @@
         </p:nvSpPr>
         <p:spPr>
           <a:xfrm>
-            <a:off x="2836469" y="3703320"/>
-            <a:ext cx="1903781" cy="1463040"/>
+            <a:off x="4745736" y="2423160"/>
+            <a:ext cx="2697480" cy="1143000"/>
           </a:xfrm>
           <a:prstGeom prst="rect">
             <a:avLst/>
@@ -5365,7 +5365,7 @@
         </p:nvSpPr>
         <p:spPr>
           <a:xfrm>
-            <a:off x="6094476" y="3246120"/>
+            <a:off x="9486900" y="1965960"/>
             <a:ext cx="0" cy="411480"/>
           </a:xfrm>
           <a:prstGeom prst="line">
@@ -5388,12 +5388,12 @@
         </p:nvSpPr>
         <p:spPr>
           <a:xfrm>
-            <a:off x="5069434" y="3657600"/>
-            <a:ext cx="2050085" cy="1554480"/>
+            <a:off x="8065008" y="2377440"/>
+            <a:ext cx="2843784" cy="1234440"/>
           </a:xfrm>
           <a:prstGeom prst="roundRect">
             <a:avLst>
-              <a:gd name="adj" fmla="val 3529"/>
+              <a:gd name="adj" fmla="val 4444"/>
             </a:avLst>
           </a:prstGeom>
           <a:solidFill>
@@ -5422,8 +5422,8 @@
         </p:nvSpPr>
         <p:spPr>
           <a:xfrm>
-            <a:off x="5142586" y="3703320"/>
-            <a:ext cx="1903781" cy="1463040"/>
+            <a:off x="8138160" y="2423160"/>
+            <a:ext cx="2697480" cy="1143000"/>
           </a:xfrm>
           <a:prstGeom prst="rect">
             <a:avLst/>
@@ -5504,8 +5504,8 @@
         </p:nvSpPr>
         <p:spPr>
           <a:xfrm>
-            <a:off x="8400593" y="3246120"/>
-            <a:ext cx="0" cy="411480"/>
+            <a:off x="2702052" y="3611880"/>
+            <a:ext cx="0" cy="457200"/>
           </a:xfrm>
           <a:prstGeom prst="line">
             <a:avLst/>
@@ -5527,12 +5527,12 @@
         </p:nvSpPr>
         <p:spPr>
           <a:xfrm>
-            <a:off x="7375550" y="3657600"/>
-            <a:ext cx="2050085" cy="1554480"/>
+            <a:off x="1280160" y="4069080"/>
+            <a:ext cx="2843784" cy="1234440"/>
           </a:xfrm>
           <a:prstGeom prst="roundRect">
             <a:avLst>
-              <a:gd name="adj" fmla="val 3529"/>
+              <a:gd name="adj" fmla="val 4444"/>
             </a:avLst>
           </a:prstGeom>
           <a:solidFill>
@@ -5561,8 +5561,8 @@
         </p:nvSpPr>
         <p:spPr>
           <a:xfrm>
-            <a:off x="7448702" y="3703320"/>
-            <a:ext cx="1903781" cy="1463040"/>
+            <a:off x="1353312" y="4114800"/>
+            <a:ext cx="2697480" cy="1143000"/>
           </a:xfrm>
           <a:prstGeom prst="rect">
             <a:avLst/>
@@ -5643,8 +5643,8 @@
         </p:nvSpPr>
         <p:spPr>
           <a:xfrm>
-            <a:off x="10706710" y="3246120"/>
-            <a:ext cx="0" cy="411480"/>
+            <a:off x="6094476" y="3611880"/>
+            <a:ext cx="0" cy="457200"/>
           </a:xfrm>
           <a:prstGeom prst="line">
             <a:avLst/>
@@ -5666,12 +5666,12 @@
         </p:nvSpPr>
         <p:spPr>
           <a:xfrm>
-            <a:off x="9681667" y="3657600"/>
-            <a:ext cx="2050085" cy="1554480"/>
+            <a:off x="4672584" y="4069080"/>
+            <a:ext cx="2843784" cy="1234440"/>
           </a:xfrm>
           <a:prstGeom prst="roundRect">
             <a:avLst>
-              <a:gd name="adj" fmla="val 3529"/>
+              <a:gd name="adj" fmla="val 4444"/>
             </a:avLst>
           </a:prstGeom>
           <a:solidFill>
@@ -5700,8 +5700,8 @@
         </p:nvSpPr>
         <p:spPr>
           <a:xfrm>
-            <a:off x="9754819" y="3703320"/>
-            <a:ext cx="1903781" cy="1463040"/>
+            <a:off x="4745736" y="4114800"/>
+            <a:ext cx="2697480" cy="1143000"/>
           </a:xfrm>
           <a:prstGeom prst="rect">
             <a:avLst/>

--- a/Структура маркетинга — отделы и ФОТ.pptx
+++ b/Структура маркетинга — отделы и ФОТ.pptx
@@ -1939,7 +1939,7 @@
                 <a:ea typeface="Arial" pitchFamily="34" charset="-122"/>
                 <a:cs typeface="Arial" pitchFamily="34" charset="-120"/>
               </a:rPr>
-              <a:t>12</a:t>
+              <a:t>11</a:t>
             </a:r>
             <a:endParaRPr lang="en-US" sz="2900" dirty="0"/>
           </a:p>
@@ -2070,7 +2070,7 @@
                 <a:ea typeface="Arial" pitchFamily="34" charset="-122"/>
                 <a:cs typeface="Arial" pitchFamily="34" charset="-120"/>
               </a:rPr>
-              <a:t>12 930 047 ₸</a:t>
+              <a:t>12 407 047 ₸</a:t>
             </a:r>
             <a:endParaRPr lang="en-US" sz="1200" dirty="0"/>
           </a:p>
@@ -2396,7 +2396,7 @@
                 <a:ea typeface="Arial" pitchFamily="34" charset="-122"/>
                 <a:cs typeface="Arial" pitchFamily="34" charset="-120"/>
               </a:rPr>
-              <a:t>41 133 731 ₸</a:t>
+              <a:t>40 610 731 ₸</a:t>
             </a:r>
             <a:endParaRPr lang="en-US" sz="2600" dirty="0"/>
           </a:p>
@@ -5903,7 +5903,7 @@
                 <a:ea typeface="Arial" pitchFamily="34" charset="-122"/>
                 <a:cs typeface="Arial" pitchFamily="34" charset="-120"/>
               </a:rPr>
-              <a:t>12 930 047 ₸</a:t>
+              <a:t>12 407 047 ₸</a:t>
             </a:r>
             <a:endParaRPr lang="en-US" sz="1900" dirty="0"/>
           </a:p>
@@ -5923,7 +5923,7 @@
                 <a:ea typeface="Arial" pitchFamily="34" charset="-122"/>
                 <a:cs typeface="Arial" pitchFamily="34" charset="-120"/>
               </a:rPr>
-              <a:t>ФОТ отдела · 12 чел. · оклады/мес</a:t>
+              <a:t>ФОТ отдела · 11 чел. · оклады/мес</a:t>
             </a:r>
             <a:endParaRPr lang="en-US" sz="1900" dirty="0"/>
           </a:p>
@@ -7232,7 +7232,7 @@
                 <a:ea typeface="Arial" pitchFamily="34" charset="-122"/>
                 <a:cs typeface="Arial" pitchFamily="34" charset="-120"/>
               </a:rPr>
-              <a:t>Асанов Әділ Асанұлы</a:t>
+              <a:t>Асанов Әділ · Originals</a:t>
             </a:r>
             <a:endParaRPr lang="en-US" sz="1050" dirty="0"/>
           </a:p>
@@ -7348,7 +7348,7 @@
                 <a:ea typeface="Arial" pitchFamily="34" charset="-122"/>
                 <a:cs typeface="Arial" pitchFamily="34" charset="-120"/>
               </a:rPr>
-              <a:t>Шаймардан Мағжан Адилұлы</a:t>
+              <a:t>Шаймардан Мағжан · Originals</a:t>
             </a:r>
             <a:endParaRPr lang="en-US" sz="1050" dirty="0"/>
           </a:p>
@@ -7464,7 +7464,7 @@
                 <a:ea typeface="Arial" pitchFamily="34" charset="-122"/>
                 <a:cs typeface="Arial" pitchFamily="34" charset="-120"/>
               </a:rPr>
-              <a:t>Жұмағали Әділжан Бауыржанұлы</a:t>
+              <a:t>Жұмағали Әділжан · Sport</a:t>
             </a:r>
             <a:endParaRPr lang="en-US" sz="1050" dirty="0"/>
           </a:p>
@@ -7485,122 +7485,6 @@
                 <a:cs typeface="Arial" pitchFamily="34" charset="-120"/>
               </a:rPr>
               <a:t>804 324 ₸</a:t>
-            </a:r>
-            <a:endParaRPr lang="en-US" sz="1050" dirty="0"/>
-          </a:p>
-        </p:txBody>
-      </p:sp>
-      <p:sp>
-        <p:nvSpPr>
-          <p:cNvPr id="38" name="Shape 36"/>
-          <p:cNvSpPr/>
-          <p:nvPr/>
-        </p:nvSpPr>
-        <p:spPr>
-          <a:xfrm>
-            <a:off x="7498080" y="5468112"/>
-            <a:ext cx="3291840" cy="658368"/>
-          </a:xfrm>
-          <a:prstGeom prst="roundRect">
-            <a:avLst>
-              <a:gd name="adj" fmla="val 8333"/>
-            </a:avLst>
-          </a:prstGeom>
-          <a:solidFill>
-            <a:srgbClr val="EAF1FB"/>
-          </a:solidFill>
-          <a:ln w="12700">
-            <a:solidFill>
-              <a:srgbClr val="C7D8EE"/>
-            </a:solidFill>
-            <a:prstDash val="solid"/>
-          </a:ln>
-          <a:effectLst>
-            <a:outerShdw sx="100000" sy="100000" kx="0" ky="0" algn="bl" rotWithShape="0" blurRad="50800" dist="25400" dir="5400000">
-              <a:srgbClr val="9AA7B4">
-                <a:alpha val="28000"/>
-              </a:srgbClr>
-            </a:outerShdw>
-          </a:effectLst>
-        </p:spPr>
-      </p:sp>
-      <p:sp>
-        <p:nvSpPr>
-          <p:cNvPr id="39" name="Text 37"/>
-          <p:cNvSpPr/>
-          <p:nvPr/>
-        </p:nvSpPr>
-        <p:spPr>
-          <a:xfrm>
-            <a:off x="7571232" y="5513832"/>
-            <a:ext cx="3145536" cy="566928"/>
-          </a:xfrm>
-          <a:prstGeom prst="rect">
-            <a:avLst/>
-          </a:prstGeom>
-          <a:noFill/>
-          <a:ln/>
-        </p:spPr>
-        <p:txBody>
-          <a:bodyPr wrap="square" lIns="0" tIns="0" rIns="0" bIns="0" rtlCol="0" anchor="ctr"/>
-          <a:lstStyle/>
-          <a:p>
-            <a:pPr algn="ctr" indent="0" marL="0">
-              <a:lnSpc>
-                <a:spcPct val="100000"/>
-              </a:lnSpc>
-              <a:buNone/>
-            </a:pPr>
-            <a:r>
-              <a:rPr lang="en-US" sz="1050" b="1" dirty="0">
-                <a:solidFill>
-                  <a:srgbClr val="1F2A37"/>
-                </a:solidFill>
-                <a:latin typeface="Arial" pitchFamily="34" charset="0"/>
-                <a:ea typeface="Arial" pitchFamily="34" charset="-122"/>
-                <a:cs typeface="Arial" pitchFamily="34" charset="-120"/>
-              </a:rPr>
-              <a:t>Мобилограф / монтажёр Sport</a:t>
-            </a:r>
-            <a:endParaRPr lang="en-US" sz="1050" dirty="0"/>
-          </a:p>
-          <a:p>
-            <a:pPr algn="ctr" indent="0" marL="0">
-              <a:lnSpc>
-                <a:spcPct val="100000"/>
-              </a:lnSpc>
-              <a:buNone/>
-            </a:pPr>
-            <a:r>
-              <a:rPr lang="en-US" sz="800" i="1" dirty="0">
-                <a:solidFill>
-                  <a:srgbClr val="5B6B7C"/>
-                </a:solidFill>
-                <a:latin typeface="Arial" pitchFamily="34" charset="0"/>
-                <a:ea typeface="Arial" pitchFamily="34" charset="-122"/>
-                <a:cs typeface="Arial" pitchFamily="34" charset="-120"/>
-              </a:rPr>
-              <a:t>Боровков Владимир Владимирович</a:t>
-            </a:r>
-            <a:endParaRPr lang="en-US" sz="1050" dirty="0"/>
-          </a:p>
-          <a:p>
-            <a:pPr algn="ctr" indent="0" marL="0">
-              <a:lnSpc>
-                <a:spcPct val="100000"/>
-              </a:lnSpc>
-              <a:buNone/>
-            </a:pPr>
-            <a:r>
-              <a:rPr lang="en-US" sz="1100" b="1" dirty="0">
-                <a:solidFill>
-                  <a:srgbClr val="0F6E4F"/>
-                </a:solidFill>
-                <a:latin typeface="Arial" pitchFamily="34" charset="0"/>
-                <a:ea typeface="Arial" pitchFamily="34" charset="-122"/>
-                <a:cs typeface="Arial" pitchFamily="34" charset="-120"/>
-              </a:rPr>
-              <a:t>523 000 ₸</a:t>
             </a:r>
             <a:endParaRPr lang="en-US" sz="1050" dirty="0"/>
           </a:p>
@@ -9491,7 +9375,7 @@
                 <a:ea typeface="Arial" pitchFamily="34" charset="-122"/>
                 <a:cs typeface="Arial" pitchFamily="34" charset="-120"/>
               </a:rPr>
-              <a:t>ФОТ отдела = сумма должностных окладов (тотал) всех позиций отдела, включая руководителя. Суммы взяты из Excel; руководители и senior-роли — из отдельного блока стоимостей. Итог по 4 отделам: 41 133 731 ₸ в месяц.</a:t>
+              <a:t>ФОТ отдела = сумма должностных окладов (тотал) всех позиций отдела, включая руководителя. Суммы взяты из Excel; руководители и senior-роли — из отдельного блока стоимостей. Итог по 4 отделам: 40 610 731 ₸ в месяц.</a:t>
             </a:r>
             <a:endParaRPr lang="en-US" sz="1200" dirty="0"/>
           </a:p>

--- a/Структура маркетинга — отделы и ФОТ.pptx
+++ b/Структура маркетинга — отделы и ФОТ.pptx
@@ -1618,7 +1618,7 @@
                 <a:ea typeface="Arial" pitchFamily="34" charset="-122"/>
                 <a:cs typeface="Arial" pitchFamily="34" charset="-120"/>
               </a:rPr>
-              <a:t>15 676 563 ₸</a:t>
+              <a:t>15 496 844 ₸</a:t>
             </a:r>
             <a:endParaRPr lang="en-US" sz="1200" dirty="0"/>
           </a:p>
@@ -1939,7 +1939,7 @@
                 <a:ea typeface="Arial" pitchFamily="34" charset="-122"/>
                 <a:cs typeface="Arial" pitchFamily="34" charset="-120"/>
               </a:rPr>
-              <a:t>11</a:t>
+              <a:t>12</a:t>
             </a:r>
             <a:endParaRPr lang="en-US" sz="2900" dirty="0"/>
           </a:p>
@@ -2070,7 +2070,7 @@
                 <a:ea typeface="Arial" pitchFamily="34" charset="-122"/>
                 <a:cs typeface="Arial" pitchFamily="34" charset="-120"/>
               </a:rPr>
-              <a:t>12 407 047 ₸</a:t>
+              <a:t>13 581 877 ₸</a:t>
             </a:r>
             <a:endParaRPr lang="en-US" sz="1200" dirty="0"/>
           </a:p>
@@ -2396,7 +2396,7 @@
                 <a:ea typeface="Arial" pitchFamily="34" charset="-122"/>
                 <a:cs typeface="Arial" pitchFamily="34" charset="-120"/>
               </a:rPr>
-              <a:t>40 610 731 ₸</a:t>
+              <a:t>41 605 842 ₸</a:t>
             </a:r>
             <a:endParaRPr lang="en-US" sz="2600" dirty="0"/>
           </a:p>
@@ -2570,7 +2570,7 @@
                 <a:ea typeface="Arial" pitchFamily="34" charset="-122"/>
                 <a:cs typeface="Arial" pitchFamily="34" charset="-120"/>
               </a:rPr>
-              <a:t>15 676 563 ₸</a:t>
+              <a:t>15 496 844 ₸</a:t>
             </a:r>
             <a:endParaRPr lang="en-US" sz="1900" dirty="0"/>
           </a:p>
@@ -4156,7 +4156,7 @@
                 <a:ea typeface="Arial" pitchFamily="34" charset="-122"/>
                 <a:cs typeface="Arial" pitchFamily="34" charset="-120"/>
               </a:rPr>
-              <a:t>SMM менеджер · имя н/д</a:t>
+              <a:t>Шафкат Дария</a:t>
             </a:r>
             <a:endParaRPr lang="en-US" sz="945" dirty="0"/>
           </a:p>
@@ -4170,13 +4170,13 @@
             <a:r>
               <a:rPr lang="en-US" sz="990" b="1" dirty="0">
                 <a:solidFill>
-                  <a:srgbClr val="B45309"/>
-                </a:solidFill>
-                <a:latin typeface="Arial" pitchFamily="34" charset="0"/>
-                <a:ea typeface="Arial" pitchFamily="34" charset="-122"/>
-                <a:cs typeface="Arial" pitchFamily="34" charset="-120"/>
-              </a:rPr>
-              <a:t>867 456 ₸  *</a:t>
+                  <a:srgbClr val="0F6E4F"/>
+                </a:solidFill>
+                <a:latin typeface="Arial" pitchFamily="34" charset="0"/>
+                <a:ea typeface="Arial" pitchFamily="34" charset="-122"/>
+                <a:cs typeface="Arial" pitchFamily="34" charset="-120"/>
+              </a:rPr>
+              <a:t>741 193 ₸</a:t>
             </a:r>
             <a:endParaRPr lang="en-US" sz="945" dirty="0"/>
           </a:p>
@@ -4272,7 +4272,7 @@
                 <a:ea typeface="Arial" pitchFamily="34" charset="-122"/>
                 <a:cs typeface="Arial" pitchFamily="34" charset="-120"/>
               </a:rPr>
-              <a:t>SMM менеджер · имя н/д</a:t>
+              <a:t>Кулбаева Салтанат Фархатқызы</a:t>
             </a:r>
             <a:endParaRPr lang="en-US" sz="945" dirty="0"/>
           </a:p>
@@ -4388,7 +4388,7 @@
                 <a:ea typeface="Arial" pitchFamily="34" charset="-122"/>
                 <a:cs typeface="Arial" pitchFamily="34" charset="-120"/>
               </a:rPr>
-              <a:t>SMM менеджер · имя н/д</a:t>
+              <a:t>Жандильдина Сабина Канатовна</a:t>
             </a:r>
             <a:endParaRPr lang="en-US" sz="945" dirty="0"/>
           </a:p>
@@ -4402,13 +4402,13 @@
             <a:r>
               <a:rPr lang="en-US" sz="990" b="1" dirty="0">
                 <a:solidFill>
-                  <a:srgbClr val="B45309"/>
-                </a:solidFill>
-                <a:latin typeface="Arial" pitchFamily="34" charset="0"/>
-                <a:ea typeface="Arial" pitchFamily="34" charset="-122"/>
-                <a:cs typeface="Arial" pitchFamily="34" charset="-120"/>
-              </a:rPr>
-              <a:t>867 456 ₸  *</a:t>
+                  <a:srgbClr val="0F6E4F"/>
+                </a:solidFill>
+                <a:latin typeface="Arial" pitchFamily="34" charset="0"/>
+                <a:ea typeface="Arial" pitchFamily="34" charset="-122"/>
+                <a:cs typeface="Arial" pitchFamily="34" charset="-120"/>
+              </a:rPr>
+              <a:t>814 000 ₸</a:t>
             </a:r>
             <a:endParaRPr lang="en-US" sz="945" dirty="0"/>
           </a:p>
@@ -4504,7 +4504,7 @@
                 <a:ea typeface="Arial" pitchFamily="34" charset="-122"/>
                 <a:cs typeface="Arial" pitchFamily="34" charset="-120"/>
               </a:rPr>
-              <a:t>SMM менеджер · имя н/д</a:t>
+              <a:t>Шакрат Темірлан Талғатұлы</a:t>
             </a:r>
             <a:endParaRPr lang="en-US" sz="945" dirty="0"/>
           </a:p>
@@ -5903,7 +5903,7 @@
                 <a:ea typeface="Arial" pitchFamily="34" charset="-122"/>
                 <a:cs typeface="Arial" pitchFamily="34" charset="-120"/>
               </a:rPr>
-              <a:t>12 407 047 ₸</a:t>
+              <a:t>13 581 877 ₸</a:t>
             </a:r>
             <a:endParaRPr lang="en-US" sz="1900" dirty="0"/>
           </a:p>
@@ -5923,7 +5923,7 @@
                 <a:ea typeface="Arial" pitchFamily="34" charset="-122"/>
                 <a:cs typeface="Arial" pitchFamily="34" charset="-120"/>
               </a:rPr>
-              <a:t>ФОТ отдела · 11 чел. · оклады/мес</a:t>
+              <a:t>ФОТ отдела · 12 чел. · оклады/мес</a:t>
             </a:r>
             <a:endParaRPr lang="en-US" sz="1900" dirty="0"/>
           </a:p>
@@ -6343,7 +6343,7 @@
                 <a:ea typeface="Arial" pitchFamily="34" charset="-122"/>
                 <a:cs typeface="Arial" pitchFamily="34" charset="-120"/>
               </a:rPr>
-              <a:t>Senior production</a:t>
+              <a:t>Александр Е</a:t>
             </a:r>
             <a:endParaRPr lang="en-US" sz="1200" dirty="0"/>
           </a:p>
@@ -6629,7 +6629,7 @@
                 <a:ea typeface="Arial" pitchFamily="34" charset="-122"/>
                 <a:cs typeface="Arial" pitchFamily="34" charset="-120"/>
               </a:rPr>
-              <a:t>Дизайнер · имя н/д</a:t>
+              <a:t>Ахметова Раушан Нұрланқызы</a:t>
             </a:r>
             <a:endParaRPr lang="en-US" sz="998" dirty="0"/>
           </a:p>
@@ -6643,13 +6643,13 @@
             <a:r>
               <a:rPr lang="en-US" sz="1045" b="1" dirty="0">
                 <a:solidFill>
-                  <a:srgbClr val="B45309"/>
-                </a:solidFill>
-                <a:latin typeface="Arial" pitchFamily="34" charset="0"/>
-                <a:ea typeface="Arial" pitchFamily="34" charset="-122"/>
-                <a:cs typeface="Arial" pitchFamily="34" charset="-120"/>
-              </a:rPr>
-              <a:t>940 000 ₸  *</a:t>
+                  <a:srgbClr val="0F6E4F"/>
+                </a:solidFill>
+                <a:latin typeface="Arial" pitchFamily="34" charset="0"/>
+                <a:ea typeface="Arial" pitchFamily="34" charset="-122"/>
+                <a:cs typeface="Arial" pitchFamily="34" charset="-120"/>
+              </a:rPr>
+              <a:t>815 000 ₸</a:t>
             </a:r>
             <a:endParaRPr lang="en-US" sz="998" dirty="0"/>
           </a:p>
@@ -6745,7 +6745,7 @@
                 <a:ea typeface="Arial" pitchFamily="34" charset="-122"/>
                 <a:cs typeface="Arial" pitchFamily="34" charset="-120"/>
               </a:rPr>
-              <a:t>Дизайнер · имя н/д</a:t>
+              <a:t>Ли Яна Вячеславовна</a:t>
             </a:r>
             <a:endParaRPr lang="en-US" sz="998" dirty="0"/>
           </a:p>
@@ -6861,7 +6861,7 @@
                 <a:ea typeface="Arial" pitchFamily="34" charset="-122"/>
                 <a:cs typeface="Arial" pitchFamily="34" charset="-120"/>
               </a:rPr>
-              <a:t>Дизайнер · имя н/д</a:t>
+              <a:t>Аркениязов Ильяс Юлдашевич</a:t>
             </a:r>
             <a:endParaRPr lang="en-US" sz="998" dirty="0"/>
           </a:p>
@@ -6875,13 +6875,13 @@
             <a:r>
               <a:rPr lang="en-US" sz="1045" b="1" dirty="0">
                 <a:solidFill>
-                  <a:srgbClr val="B45309"/>
-                </a:solidFill>
-                <a:latin typeface="Arial" pitchFamily="34" charset="0"/>
-                <a:ea typeface="Arial" pitchFamily="34" charset="-122"/>
-                <a:cs typeface="Arial" pitchFamily="34" charset="-120"/>
-              </a:rPr>
-              <a:t>940 000 ₸  *</a:t>
+                  <a:srgbClr val="0F6E4F"/>
+                </a:solidFill>
+                <a:latin typeface="Arial" pitchFamily="34" charset="0"/>
+                <a:ea typeface="Arial" pitchFamily="34" charset="-122"/>
+                <a:cs typeface="Arial" pitchFamily="34" charset="-120"/>
+              </a:rPr>
+              <a:t>678 061 ₸</a:t>
             </a:r>
             <a:endParaRPr lang="en-US" sz="998" dirty="0"/>
           </a:p>
@@ -6957,7 +6957,7 @@
                 <a:ea typeface="Arial" pitchFamily="34" charset="-122"/>
                 <a:cs typeface="Arial" pitchFamily="34" charset="-120"/>
               </a:rPr>
-              <a:t>Motion</a:t>
+              <a:t>Graph</a:t>
             </a:r>
             <a:endParaRPr lang="en-US" sz="998" dirty="0"/>
           </a:p>
@@ -6977,7 +6977,7 @@
                 <a:ea typeface="Arial" pitchFamily="34" charset="-122"/>
                 <a:cs typeface="Arial" pitchFamily="34" charset="-120"/>
               </a:rPr>
-              <a:t>Motion-дизайнер · имя н/д</a:t>
+              <a:t>Граф дизайнер</a:t>
             </a:r>
             <a:endParaRPr lang="en-US" sz="998" dirty="0"/>
           </a:p>
@@ -6997,7 +6997,7 @@
                 <a:ea typeface="Arial" pitchFamily="34" charset="-122"/>
                 <a:cs typeface="Arial" pitchFamily="34" charset="-120"/>
               </a:rPr>
-              <a:t>877 000 ₸  *</a:t>
+              <a:t>940 000 ₸  *</a:t>
             </a:r>
             <a:endParaRPr lang="en-US" sz="998" dirty="0"/>
           </a:p>
@@ -7093,7 +7093,7 @@
                 <a:ea typeface="Arial" pitchFamily="34" charset="-122"/>
                 <a:cs typeface="Arial" pitchFamily="34" charset="-120"/>
               </a:rPr>
-              <a:t>Motion-дизайнер · имя н/д</a:t>
+              <a:t>Мкпо Майкл Жозеф</a:t>
             </a:r>
             <a:endParaRPr lang="en-US" sz="998" dirty="0"/>
           </a:p>
@@ -7107,13 +7107,13 @@
             <a:r>
               <a:rPr lang="en-US" sz="1045" b="1" dirty="0">
                 <a:solidFill>
-                  <a:srgbClr val="B45309"/>
-                </a:solidFill>
-                <a:latin typeface="Arial" pitchFamily="34" charset="0"/>
-                <a:ea typeface="Arial" pitchFamily="34" charset="-122"/>
-                <a:cs typeface="Arial" pitchFamily="34" charset="-120"/>
-              </a:rPr>
-              <a:t>877 000 ₸  *</a:t>
+                  <a:srgbClr val="0F6E4F"/>
+                </a:solidFill>
+                <a:latin typeface="Arial" pitchFamily="34" charset="0"/>
+                <a:ea typeface="Arial" pitchFamily="34" charset="-122"/>
+                <a:cs typeface="Arial" pitchFamily="34" charset="-120"/>
+              </a:rPr>
+              <a:t>877 000 ₸</a:t>
             </a:r>
             <a:endParaRPr lang="en-US" sz="998" dirty="0"/>
           </a:p>
@@ -7232,7 +7232,7 @@
                 <a:ea typeface="Arial" pitchFamily="34" charset="-122"/>
                 <a:cs typeface="Arial" pitchFamily="34" charset="-120"/>
               </a:rPr>
-              <a:t>Асанов Әділ · Originals</a:t>
+              <a:t>Асанов Әділ Асанұлы</a:t>
             </a:r>
             <a:endParaRPr lang="en-US" sz="1050" dirty="0"/>
           </a:p>
@@ -7348,7 +7348,7 @@
                 <a:ea typeface="Arial" pitchFamily="34" charset="-122"/>
                 <a:cs typeface="Arial" pitchFamily="34" charset="-120"/>
               </a:rPr>
-              <a:t>Шаймардан Мағжан · Originals</a:t>
+              <a:t>Шаймардан Мағжан Адилұлы</a:t>
             </a:r>
             <a:endParaRPr lang="en-US" sz="1050" dirty="0"/>
           </a:p>
@@ -7464,7 +7464,7 @@
                 <a:ea typeface="Arial" pitchFamily="34" charset="-122"/>
                 <a:cs typeface="Arial" pitchFamily="34" charset="-120"/>
               </a:rPr>
-              <a:t>Жұмағали Әділжан · Sport</a:t>
+              <a:t>Жұмағали Әділжан Бауыржанұлы</a:t>
             </a:r>
             <a:endParaRPr lang="en-US" sz="1050" dirty="0"/>
           </a:p>
@@ -7485,6 +7485,122 @@
                 <a:cs typeface="Arial" pitchFamily="34" charset="-120"/>
               </a:rPr>
               <a:t>804 324 ₸</a:t>
+            </a:r>
+            <a:endParaRPr lang="en-US" sz="1050" dirty="0"/>
+          </a:p>
+        </p:txBody>
+      </p:sp>
+      <p:sp>
+        <p:nvSpPr>
+          <p:cNvPr id="38" name="Shape 36"/>
+          <p:cNvSpPr/>
+          <p:nvPr/>
+        </p:nvSpPr>
+        <p:spPr>
+          <a:xfrm>
+            <a:off x="7498080" y="5468112"/>
+            <a:ext cx="3291840" cy="658368"/>
+          </a:xfrm>
+          <a:prstGeom prst="roundRect">
+            <a:avLst>
+              <a:gd name="adj" fmla="val 8333"/>
+            </a:avLst>
+          </a:prstGeom>
+          <a:solidFill>
+            <a:srgbClr val="EAF1FB"/>
+          </a:solidFill>
+          <a:ln w="12700">
+            <a:solidFill>
+              <a:srgbClr val="C7D8EE"/>
+            </a:solidFill>
+            <a:prstDash val="solid"/>
+          </a:ln>
+          <a:effectLst>
+            <a:outerShdw sx="100000" sy="100000" kx="0" ky="0" algn="bl" rotWithShape="0" blurRad="50800" dist="25400" dir="5400000">
+              <a:srgbClr val="9AA7B4">
+                <a:alpha val="28000"/>
+              </a:srgbClr>
+            </a:outerShdw>
+          </a:effectLst>
+        </p:spPr>
+      </p:sp>
+      <p:sp>
+        <p:nvSpPr>
+          <p:cNvPr id="39" name="Text 37"/>
+          <p:cNvSpPr/>
+          <p:nvPr/>
+        </p:nvSpPr>
+        <p:spPr>
+          <a:xfrm>
+            <a:off x="7571232" y="5513832"/>
+            <a:ext cx="3145536" cy="566928"/>
+          </a:xfrm>
+          <a:prstGeom prst="rect">
+            <a:avLst/>
+          </a:prstGeom>
+          <a:noFill/>
+          <a:ln/>
+        </p:spPr>
+        <p:txBody>
+          <a:bodyPr wrap="square" lIns="0" tIns="0" rIns="0" bIns="0" rtlCol="0" anchor="ctr"/>
+          <a:lstStyle/>
+          <a:p>
+            <a:pPr algn="ctr" indent="0" marL="0">
+              <a:lnSpc>
+                <a:spcPct val="100000"/>
+              </a:lnSpc>
+              <a:buNone/>
+            </a:pPr>
+            <a:r>
+              <a:rPr lang="en-US" sz="1050" b="1" dirty="0">
+                <a:solidFill>
+                  <a:srgbClr val="1F2A37"/>
+                </a:solidFill>
+                <a:latin typeface="Arial" pitchFamily="34" charset="0"/>
+                <a:ea typeface="Arial" pitchFamily="34" charset="-122"/>
+                <a:cs typeface="Arial" pitchFamily="34" charset="-120"/>
+              </a:rPr>
+              <a:t>Мобилограф / монтажёр Sport</a:t>
+            </a:r>
+            <a:endParaRPr lang="en-US" sz="1050" dirty="0"/>
+          </a:p>
+          <a:p>
+            <a:pPr algn="ctr" indent="0" marL="0">
+              <a:lnSpc>
+                <a:spcPct val="100000"/>
+              </a:lnSpc>
+              <a:buNone/>
+            </a:pPr>
+            <a:r>
+              <a:rPr lang="en-US" sz="800" i="1" dirty="0">
+                <a:solidFill>
+                  <a:srgbClr val="5B6B7C"/>
+                </a:solidFill>
+                <a:latin typeface="Arial" pitchFamily="34" charset="0"/>
+                <a:ea typeface="Arial" pitchFamily="34" charset="-122"/>
+                <a:cs typeface="Arial" pitchFamily="34" charset="-120"/>
+              </a:rPr>
+              <a:t>Жанабеков Кудайберген Канатович</a:t>
+            </a:r>
+            <a:endParaRPr lang="en-US" sz="1050" dirty="0"/>
+          </a:p>
+          <a:p>
+            <a:pPr algn="ctr" indent="0" marL="0">
+              <a:lnSpc>
+                <a:spcPct val="100000"/>
+              </a:lnSpc>
+              <a:buNone/>
+            </a:pPr>
+            <a:r>
+              <a:rPr lang="en-US" sz="1100" b="1" dirty="0">
+                <a:solidFill>
+                  <a:srgbClr val="0F6E4F"/>
+                </a:solidFill>
+                <a:latin typeface="Arial" pitchFamily="34" charset="0"/>
+                <a:ea typeface="Arial" pitchFamily="34" charset="-122"/>
+                <a:cs typeface="Arial" pitchFamily="34" charset="-120"/>
+              </a:rPr>
+              <a:t>1 498 769 ₸</a:t>
             </a:r>
             <a:endParaRPr lang="en-US" sz="1050" dirty="0"/>
           </a:p>
@@ -9375,7 +9491,7 @@
                 <a:ea typeface="Arial" pitchFamily="34" charset="-122"/>
                 <a:cs typeface="Arial" pitchFamily="34" charset="-120"/>
               </a:rPr>
-              <a:t>ФОТ отдела = сумма должностных окладов (тотал) всех позиций отдела, включая руководителя. Суммы взяты из Excel; руководители и senior-роли — из отдельного блока стоимостей. Итог по 4 отделам: 40 610 731 ₸ в месяц.</a:t>
+              <a:t>ФОТ отдела = сумма должностных окладов (тотал) всех позиций отдела, включая руководителя. Суммы взяты из Excel; руководители и senior-роли — из отдельного блока стоимостей. Итог по 4 отделам: 41 605 842 ₸ в месяц.</a:t>
             </a:r>
             <a:endParaRPr lang="en-US" sz="1200" dirty="0"/>
           </a:p>

--- a/Структура маркетинга — отделы и ФОТ.pptx
+++ b/Структура маркетинга — отделы и ФОТ.pptx
@@ -6968,17 +6968,6 @@
               </a:lnSpc>
               <a:buNone/>
             </a:pPr>
-            <a:r>
-              <a:rPr lang="en-US" sz="760" i="1" dirty="0">
-                <a:solidFill>
-                  <a:srgbClr val="5B6B7C"/>
-                </a:solidFill>
-                <a:latin typeface="Arial" pitchFamily="34" charset="0"/>
-                <a:ea typeface="Arial" pitchFamily="34" charset="-122"/>
-                <a:cs typeface="Arial" pitchFamily="34" charset="-120"/>
-              </a:rPr>
-              <a:t>Граф дизайнер</a:t>
-            </a:r>
             <a:endParaRPr lang="en-US" sz="998" dirty="0"/>
           </a:p>
           <a:p>

--- a/Структура маркетинга — отделы и ФОТ.pptx
+++ b/Структура маркетинга — отделы и ФОТ.pptx
@@ -2985,46 +2985,7 @@
       </p:sp>
       <p:sp>
         <p:nvSpPr>
-          <p:cNvPr id="16" name="Text 14"/>
-          <p:cNvSpPr/>
-          <p:nvPr/>
-        </p:nvSpPr>
-        <p:spPr>
-          <a:xfrm>
-            <a:off x="2258568" y="2359152"/>
-            <a:ext cx="1691640" cy="201168"/>
-          </a:xfrm>
-          <a:prstGeom prst="rect">
-            <a:avLst/>
-          </a:prstGeom>
-          <a:noFill/>
-          <a:ln/>
-        </p:spPr>
-        <p:txBody>
-          <a:bodyPr wrap="square" lIns="0" tIns="0" rIns="0" bIns="0" rtlCol="0" anchor="ctr"/>
-          <a:lstStyle/>
-          <a:p>
-            <a:pPr algn="ctr" indent="0" marL="0">
-              <a:buNone/>
-            </a:pPr>
-            <a:r>
-              <a:rPr lang="en-US" sz="900" b="1" dirty="0">
-                <a:solidFill>
-                  <a:srgbClr val="5B6B7C"/>
-                </a:solidFill>
-                <a:latin typeface="Arial" pitchFamily="34" charset="0"/>
-                <a:ea typeface="Arial" pitchFamily="34" charset="-122"/>
-                <a:cs typeface="Arial" pitchFamily="34" charset="-120"/>
-              </a:rPr>
-              <a:t>Sport</a:t>
-            </a:r>
-            <a:endParaRPr lang="en-US" sz="900" dirty="0"/>
-          </a:p>
-        </p:txBody>
-      </p:sp>
-      <p:sp>
-        <p:nvSpPr>
-          <p:cNvPr id="17" name="Shape 15"/>
+          <p:cNvPr id="16" name="Shape 14"/>
           <p:cNvSpPr/>
           <p:nvPr/>
         </p:nvSpPr>
@@ -3058,7 +3019,7 @@
       </p:sp>
       <p:sp>
         <p:nvSpPr>
-          <p:cNvPr id="18" name="Text 16"/>
+          <p:cNvPr id="17" name="Text 15"/>
           <p:cNvSpPr/>
           <p:nvPr/>
         </p:nvSpPr>
@@ -3140,7 +3101,7 @@
       </p:sp>
       <p:sp>
         <p:nvSpPr>
-          <p:cNvPr id="19" name="Shape 17"/>
+          <p:cNvPr id="18" name="Shape 16"/>
           <p:cNvSpPr/>
           <p:nvPr/>
         </p:nvSpPr>
@@ -3174,7 +3135,7 @@
       </p:sp>
       <p:sp>
         <p:nvSpPr>
-          <p:cNvPr id="20" name="Text 18"/>
+          <p:cNvPr id="19" name="Text 17"/>
           <p:cNvSpPr/>
           <p:nvPr/>
         </p:nvSpPr>
@@ -3256,7 +3217,7 @@
       </p:sp>
       <p:sp>
         <p:nvSpPr>
-          <p:cNvPr id="21" name="Shape 19"/>
+          <p:cNvPr id="20" name="Shape 18"/>
           <p:cNvSpPr/>
           <p:nvPr/>
         </p:nvSpPr>
@@ -3290,7 +3251,7 @@
       </p:sp>
       <p:sp>
         <p:nvSpPr>
-          <p:cNvPr id="22" name="Text 20"/>
+          <p:cNvPr id="21" name="Text 19"/>
           <p:cNvSpPr/>
           <p:nvPr/>
         </p:nvSpPr>
@@ -3372,7 +3333,7 @@
       </p:sp>
       <p:sp>
         <p:nvSpPr>
-          <p:cNvPr id="23" name="Shape 21"/>
+          <p:cNvPr id="22" name="Shape 20"/>
           <p:cNvSpPr/>
           <p:nvPr/>
         </p:nvSpPr>
@@ -3406,7 +3367,7 @@
       </p:sp>
       <p:sp>
         <p:nvSpPr>
-          <p:cNvPr id="24" name="Text 22"/>
+          <p:cNvPr id="23" name="Text 21"/>
           <p:cNvSpPr/>
           <p:nvPr/>
         </p:nvSpPr>
@@ -3483,6 +3444,45 @@
               <a:t>1 000 162 ₸</a:t>
             </a:r>
             <a:endParaRPr lang="en-US" sz="945" dirty="0"/>
+          </a:p>
+        </p:txBody>
+      </p:sp>
+      <p:sp>
+        <p:nvSpPr>
+          <p:cNvPr id="24" name="Text 22"/>
+          <p:cNvSpPr/>
+          <p:nvPr/>
+        </p:nvSpPr>
+        <p:spPr>
+          <a:xfrm>
+            <a:off x="2258568" y="2359152"/>
+            <a:ext cx="1691640" cy="201168"/>
+          </a:xfrm>
+          <a:prstGeom prst="rect">
+            <a:avLst/>
+          </a:prstGeom>
+          <a:noFill/>
+          <a:ln/>
+        </p:spPr>
+        <p:txBody>
+          <a:bodyPr wrap="square" lIns="0" tIns="0" rIns="0" bIns="0" rtlCol="0" anchor="ctr"/>
+          <a:lstStyle/>
+          <a:p>
+            <a:pPr algn="ctr" indent="0" marL="0">
+              <a:buNone/>
+            </a:pPr>
+            <a:r>
+              <a:rPr lang="en-US" sz="900" b="1" dirty="0">
+                <a:solidFill>
+                  <a:srgbClr val="5B6B7C"/>
+                </a:solidFill>
+                <a:latin typeface="Arial" pitchFamily="34" charset="0"/>
+                <a:ea typeface="Arial" pitchFamily="34" charset="-122"/>
+                <a:cs typeface="Arial" pitchFamily="34" charset="-120"/>
+              </a:rPr>
+              <a:t>Sport</a:t>
+            </a:r>
+            <a:endParaRPr lang="en-US" sz="900" dirty="0"/>
           </a:p>
         </p:txBody>
       </p:sp>
@@ -3836,124 +3836,7 @@
       </p:sp>
       <p:sp>
         <p:nvSpPr>
-          <p:cNvPr id="31" name="Text 29"/>
-          <p:cNvSpPr/>
-          <p:nvPr/>
-        </p:nvSpPr>
-        <p:spPr>
-          <a:xfrm>
-            <a:off x="4315968" y="3090672"/>
-            <a:ext cx="1691640" cy="201168"/>
-          </a:xfrm>
-          <a:prstGeom prst="rect">
-            <a:avLst/>
-          </a:prstGeom>
-          <a:noFill/>
-          <a:ln/>
-        </p:spPr>
-        <p:txBody>
-          <a:bodyPr wrap="square" lIns="0" tIns="0" rIns="0" bIns="0" rtlCol="0" anchor="ctr"/>
-          <a:lstStyle/>
-          <a:p>
-            <a:pPr algn="ctr" indent="0" marL="0">
-              <a:buNone/>
-            </a:pPr>
-            <a:r>
-              <a:rPr lang="en-US" sz="900" b="1" dirty="0">
-                <a:solidFill>
-                  <a:srgbClr val="5B6B7C"/>
-                </a:solidFill>
-                <a:latin typeface="Arial" pitchFamily="34" charset="0"/>
-                <a:ea typeface="Arial" pitchFamily="34" charset="-122"/>
-                <a:cs typeface="Arial" pitchFamily="34" charset="-120"/>
-              </a:rPr>
-              <a:t>Originals</a:t>
-            </a:r>
-            <a:endParaRPr lang="en-US" sz="900" dirty="0"/>
-          </a:p>
-        </p:txBody>
-      </p:sp>
-      <p:sp>
-        <p:nvSpPr>
-          <p:cNvPr id="32" name="Text 30"/>
-          <p:cNvSpPr/>
-          <p:nvPr/>
-        </p:nvSpPr>
-        <p:spPr>
-          <a:xfrm>
-            <a:off x="6117336" y="3090672"/>
-            <a:ext cx="1691640" cy="201168"/>
-          </a:xfrm>
-          <a:prstGeom prst="rect">
-            <a:avLst/>
-          </a:prstGeom>
-          <a:noFill/>
-          <a:ln/>
-        </p:spPr>
-        <p:txBody>
-          <a:bodyPr wrap="square" lIns="0" tIns="0" rIns="0" bIns="0" rtlCol="0" anchor="ctr"/>
-          <a:lstStyle/>
-          <a:p>
-            <a:pPr algn="ctr" indent="0" marL="0">
-              <a:buNone/>
-            </a:pPr>
-            <a:r>
-              <a:rPr lang="en-US" sz="900" b="1" dirty="0">
-                <a:solidFill>
-                  <a:srgbClr val="5B6B7C"/>
-                </a:solidFill>
-                <a:latin typeface="Arial" pitchFamily="34" charset="0"/>
-                <a:ea typeface="Arial" pitchFamily="34" charset="-122"/>
-                <a:cs typeface="Arial" pitchFamily="34" charset="-120"/>
-              </a:rPr>
-              <a:t>Gen</a:t>
-            </a:r>
-            <a:endParaRPr lang="en-US" sz="900" dirty="0"/>
-          </a:p>
-        </p:txBody>
-      </p:sp>
-      <p:sp>
-        <p:nvSpPr>
-          <p:cNvPr id="33" name="Text 31"/>
-          <p:cNvSpPr/>
-          <p:nvPr/>
-        </p:nvSpPr>
-        <p:spPr>
-          <a:xfrm>
-            <a:off x="7918704" y="3090672"/>
-            <a:ext cx="1691640" cy="201168"/>
-          </a:xfrm>
-          <a:prstGeom prst="rect">
-            <a:avLst/>
-          </a:prstGeom>
-          <a:noFill/>
-          <a:ln/>
-        </p:spPr>
-        <p:txBody>
-          <a:bodyPr wrap="square" lIns="0" tIns="0" rIns="0" bIns="0" rtlCol="0" anchor="ctr"/>
-          <a:lstStyle/>
-          <a:p>
-            <a:pPr algn="ctr" indent="0" marL="0">
-              <a:buNone/>
-            </a:pPr>
-            <a:r>
-              <a:rPr lang="en-US" sz="900" b="1" dirty="0">
-                <a:solidFill>
-                  <a:srgbClr val="5B6B7C"/>
-                </a:solidFill>
-                <a:latin typeface="Arial" pitchFamily="34" charset="0"/>
-                <a:ea typeface="Arial" pitchFamily="34" charset="-122"/>
-                <a:cs typeface="Arial" pitchFamily="34" charset="-120"/>
-              </a:rPr>
-              <a:t>Sport</a:t>
-            </a:r>
-            <a:endParaRPr lang="en-US" sz="900" dirty="0"/>
-          </a:p>
-        </p:txBody>
-      </p:sp>
-      <p:sp>
-        <p:nvSpPr>
-          <p:cNvPr id="34" name="Shape 32"/>
+          <p:cNvPr id="31" name="Shape 29"/>
           <p:cNvSpPr/>
           <p:nvPr/>
         </p:nvSpPr>
@@ -3976,7 +3859,7 @@
       </p:sp>
       <p:sp>
         <p:nvSpPr>
-          <p:cNvPr id="35" name="Shape 33"/>
+          <p:cNvPr id="32" name="Shape 30"/>
           <p:cNvSpPr/>
           <p:nvPr/>
         </p:nvSpPr>
@@ -3999,7 +3882,46 @@
       </p:sp>
       <p:sp>
         <p:nvSpPr>
-          <p:cNvPr id="36" name="Shape 34"/>
+          <p:cNvPr id="33" name="Text 31"/>
+          <p:cNvSpPr/>
+          <p:nvPr/>
+        </p:nvSpPr>
+        <p:spPr>
+          <a:xfrm>
+            <a:off x="4315968" y="3090672"/>
+            <a:ext cx="1691640" cy="201168"/>
+          </a:xfrm>
+          <a:prstGeom prst="rect">
+            <a:avLst/>
+          </a:prstGeom>
+          <a:noFill/>
+          <a:ln/>
+        </p:spPr>
+        <p:txBody>
+          <a:bodyPr wrap="square" lIns="0" tIns="0" rIns="0" bIns="0" rtlCol="0" anchor="ctr"/>
+          <a:lstStyle/>
+          <a:p>
+            <a:pPr algn="ctr" indent="0" marL="0">
+              <a:buNone/>
+            </a:pPr>
+            <a:r>
+              <a:rPr lang="en-US" sz="900" b="1" dirty="0">
+                <a:solidFill>
+                  <a:srgbClr val="5B6B7C"/>
+                </a:solidFill>
+                <a:latin typeface="Arial" pitchFamily="34" charset="0"/>
+                <a:ea typeface="Arial" pitchFamily="34" charset="-122"/>
+                <a:cs typeface="Arial" pitchFamily="34" charset="-120"/>
+              </a:rPr>
+              <a:t>Originals</a:t>
+            </a:r>
+            <a:endParaRPr lang="en-US" sz="900" dirty="0"/>
+          </a:p>
+        </p:txBody>
+      </p:sp>
+      <p:sp>
+        <p:nvSpPr>
+          <p:cNvPr id="34" name="Shape 32"/>
           <p:cNvSpPr/>
           <p:nvPr/>
         </p:nvSpPr>
@@ -4022,53 +3944,7 @@
       </p:sp>
       <p:sp>
         <p:nvSpPr>
-          <p:cNvPr id="37" name="Shape 35"/>
-          <p:cNvSpPr/>
-          <p:nvPr/>
-        </p:nvSpPr>
-        <p:spPr>
-          <a:xfrm>
-            <a:off x="6963156" y="3145536"/>
-            <a:ext cx="0" cy="182880"/>
-          </a:xfrm>
-          <a:prstGeom prst="line">
-            <a:avLst/>
-          </a:prstGeom>
-          <a:noFill/>
-          <a:ln w="12700">
-            <a:solidFill>
-              <a:srgbClr val="C7D8EE"/>
-            </a:solidFill>
-            <a:prstDash val="solid"/>
-          </a:ln>
-        </p:spPr>
-      </p:sp>
-      <p:sp>
-        <p:nvSpPr>
-          <p:cNvPr id="38" name="Shape 36"/>
-          <p:cNvSpPr/>
-          <p:nvPr/>
-        </p:nvSpPr>
-        <p:spPr>
-          <a:xfrm>
-            <a:off x="8764524" y="3145536"/>
-            <a:ext cx="0" cy="182880"/>
-          </a:xfrm>
-          <a:prstGeom prst="line">
-            <a:avLst/>
-          </a:prstGeom>
-          <a:noFill/>
-          <a:ln w="12700">
-            <a:solidFill>
-              <a:srgbClr val="C7D8EE"/>
-            </a:solidFill>
-            <a:prstDash val="solid"/>
-          </a:ln>
-        </p:spPr>
-      </p:sp>
-      <p:sp>
-        <p:nvSpPr>
-          <p:cNvPr id="39" name="Shape 37"/>
+          <p:cNvPr id="35" name="Shape 33"/>
           <p:cNvSpPr/>
           <p:nvPr/>
         </p:nvSpPr>
@@ -4102,7 +3978,7 @@
       </p:sp>
       <p:sp>
         <p:nvSpPr>
-          <p:cNvPr id="40" name="Text 38"/>
+          <p:cNvPr id="36" name="Text 34"/>
           <p:cNvSpPr/>
           <p:nvPr/>
         </p:nvSpPr>
@@ -4184,7 +4060,7 @@
       </p:sp>
       <p:sp>
         <p:nvSpPr>
-          <p:cNvPr id="41" name="Shape 39"/>
+          <p:cNvPr id="37" name="Shape 35"/>
           <p:cNvSpPr/>
           <p:nvPr/>
         </p:nvSpPr>
@@ -4218,7 +4094,7 @@
       </p:sp>
       <p:sp>
         <p:nvSpPr>
-          <p:cNvPr id="42" name="Text 40"/>
+          <p:cNvPr id="38" name="Text 36"/>
           <p:cNvSpPr/>
           <p:nvPr/>
         </p:nvSpPr>
@@ -4300,7 +4176,69 @@
       </p:sp>
       <p:sp>
         <p:nvSpPr>
-          <p:cNvPr id="43" name="Shape 41"/>
+          <p:cNvPr id="39" name="Text 37"/>
+          <p:cNvSpPr/>
+          <p:nvPr/>
+        </p:nvSpPr>
+        <p:spPr>
+          <a:xfrm>
+            <a:off x="6117336" y="3090672"/>
+            <a:ext cx="1691640" cy="201168"/>
+          </a:xfrm>
+          <a:prstGeom prst="rect">
+            <a:avLst/>
+          </a:prstGeom>
+          <a:noFill/>
+          <a:ln/>
+        </p:spPr>
+        <p:txBody>
+          <a:bodyPr wrap="square" lIns="0" tIns="0" rIns="0" bIns="0" rtlCol="0" anchor="ctr"/>
+          <a:lstStyle/>
+          <a:p>
+            <a:pPr algn="ctr" indent="0" marL="0">
+              <a:buNone/>
+            </a:pPr>
+            <a:r>
+              <a:rPr lang="en-US" sz="900" b="1" dirty="0">
+                <a:solidFill>
+                  <a:srgbClr val="5B6B7C"/>
+                </a:solidFill>
+                <a:latin typeface="Arial" pitchFamily="34" charset="0"/>
+                <a:ea typeface="Arial" pitchFamily="34" charset="-122"/>
+                <a:cs typeface="Arial" pitchFamily="34" charset="-120"/>
+              </a:rPr>
+              <a:t>Gen</a:t>
+            </a:r>
+            <a:endParaRPr lang="en-US" sz="900" dirty="0"/>
+          </a:p>
+        </p:txBody>
+      </p:sp>
+      <p:sp>
+        <p:nvSpPr>
+          <p:cNvPr id="40" name="Shape 38"/>
+          <p:cNvSpPr/>
+          <p:nvPr/>
+        </p:nvSpPr>
+        <p:spPr>
+          <a:xfrm>
+            <a:off x="6963156" y="3145536"/>
+            <a:ext cx="0" cy="182880"/>
+          </a:xfrm>
+          <a:prstGeom prst="line">
+            <a:avLst/>
+          </a:prstGeom>
+          <a:noFill/>
+          <a:ln w="12700">
+            <a:solidFill>
+              <a:srgbClr val="C7D8EE"/>
+            </a:solidFill>
+            <a:prstDash val="solid"/>
+          </a:ln>
+        </p:spPr>
+      </p:sp>
+      <p:sp>
+        <p:nvSpPr>
+          <p:cNvPr id="41" name="Shape 39"/>
           <p:cNvSpPr/>
           <p:nvPr/>
         </p:nvSpPr>
@@ -4334,7 +4272,7 @@
       </p:sp>
       <p:sp>
         <p:nvSpPr>
-          <p:cNvPr id="44" name="Text 42"/>
+          <p:cNvPr id="42" name="Text 40"/>
           <p:cNvSpPr/>
           <p:nvPr/>
         </p:nvSpPr>
@@ -4413,6 +4351,68 @@
             <a:endParaRPr lang="en-US" sz="945" dirty="0"/>
           </a:p>
         </p:txBody>
+      </p:sp>
+      <p:sp>
+        <p:nvSpPr>
+          <p:cNvPr id="43" name="Text 41"/>
+          <p:cNvSpPr/>
+          <p:nvPr/>
+        </p:nvSpPr>
+        <p:spPr>
+          <a:xfrm>
+            <a:off x="7918704" y="3090672"/>
+            <a:ext cx="1691640" cy="201168"/>
+          </a:xfrm>
+          <a:prstGeom prst="rect">
+            <a:avLst/>
+          </a:prstGeom>
+          <a:noFill/>
+          <a:ln/>
+        </p:spPr>
+        <p:txBody>
+          <a:bodyPr wrap="square" lIns="0" tIns="0" rIns="0" bIns="0" rtlCol="0" anchor="ctr"/>
+          <a:lstStyle/>
+          <a:p>
+            <a:pPr algn="ctr" indent="0" marL="0">
+              <a:buNone/>
+            </a:pPr>
+            <a:r>
+              <a:rPr lang="en-US" sz="900" b="1" dirty="0">
+                <a:solidFill>
+                  <a:srgbClr val="5B6B7C"/>
+                </a:solidFill>
+                <a:latin typeface="Arial" pitchFamily="34" charset="0"/>
+                <a:ea typeface="Arial" pitchFamily="34" charset="-122"/>
+                <a:cs typeface="Arial" pitchFamily="34" charset="-120"/>
+              </a:rPr>
+              <a:t>Sport</a:t>
+            </a:r>
+            <a:endParaRPr lang="en-US" sz="900" dirty="0"/>
+          </a:p>
+        </p:txBody>
+      </p:sp>
+      <p:sp>
+        <p:nvSpPr>
+          <p:cNvPr id="44" name="Shape 42"/>
+          <p:cNvSpPr/>
+          <p:nvPr/>
+        </p:nvSpPr>
+        <p:spPr>
+          <a:xfrm>
+            <a:off x="8764524" y="3145536"/>
+            <a:ext cx="0" cy="182880"/>
+          </a:xfrm>
+          <a:prstGeom prst="line">
+            <a:avLst/>
+          </a:prstGeom>
+          <a:noFill/>
+          <a:ln w="12700">
+            <a:solidFill>
+              <a:srgbClr val="C7D8EE"/>
+            </a:solidFill>
+            <a:prstDash val="solid"/>
+          </a:ln>
+        </p:spPr>
       </p:sp>
       <p:sp>
         <p:nvSpPr>
